--- a/documents/slides/bath-set-production-slides.pptx
+++ b/documents/slides/bath-set-production-slides.pptx
@@ -13,8 +13,6 @@
     <p:sldId id="261" r:id="rId12"/>
     <p:sldId id="262" r:id="rId13"/>
     <p:sldId id="263" r:id="rId14"/>
-    <p:sldId id="264" r:id="rId15"/>
-    <p:sldId id="265" r:id="rId16"/>
   </p:sldIdLst>
   <p:sldSz cx="12191695" cy="6858000" type="screen4x3"/>
   <p:notesSz cx="6858000" cy="9144000"/>
@@ -3342,7 +3340,7 @@
               </a:defRPr>
             </a:pPr>
             <a:r>
-              <a:t>アース製薬 企業ブース｜3Dお風呂セット 制作発注資料｜仕様確認用 v0.3</a:t>
+              <a:t>アース製薬 企業ブース｜3Dお風呂セット 制作発注資料｜制作内容 v0.4</a:t>
             </a:r>
           </a:p>
         </p:txBody>
@@ -3394,7 +3392,7 @@
         </p:nvSpPr>
         <p:spPr>
           <a:xfrm>
-            <a:off x="594360" y="2057400"/>
+            <a:off x="612648" y="2011680"/>
             <a:ext cx="5486400" cy="1554480"/>
           </a:xfrm>
           <a:prstGeom prst="rect">
@@ -3449,25 +3447,25 @@
         </p:nvSpPr>
         <p:spPr>
           <a:xfrm>
-            <a:off x="612648" y="3794760"/>
-            <a:ext cx="5257800" cy="822960"/>
-          </a:xfrm>
-          <a:prstGeom prst="rect">
-            <a:avLst/>
-          </a:prstGeom>
-          <a:noFill/>
-        </p:spPr>
-        <p:txBody>
-          <a:bodyPr wrap="square" lIns="0" rIns="0" tIns="0" bIns="0">
-            <a:spAutoFit/>
-          </a:bodyPr>
-          <a:lstStyle/>
-          <a:p>
-            <a:pPr>
-              <a:spcAft>
-                <a:spcPts val="800"/>
-              </a:spcAft>
-              <a:defRPr sz="1800" b="0">
+            <a:off x="630936" y="3803904"/>
+            <a:ext cx="5303520" cy="822960"/>
+          </a:xfrm>
+          <a:prstGeom prst="rect">
+            <a:avLst/>
+          </a:prstGeom>
+          <a:noFill/>
+        </p:spPr>
+        <p:txBody>
+          <a:bodyPr wrap="square" lIns="0" rIns="0" tIns="0" bIns="0">
+            <a:spAutoFit/>
+          </a:bodyPr>
+          <a:lstStyle/>
+          <a:p>
+            <a:pPr>
+              <a:spcAft>
+                <a:spcPts val="800"/>
+              </a:spcAft>
+              <a:defRPr sz="2100" b="0">
                 <a:solidFill>
                   <a:srgbClr val="61716B"/>
                 </a:solidFill>
@@ -3475,15 +3473,15 @@
               </a:defRPr>
             </a:pPr>
             <a:r>
-              <a:t>頭部小物3点＋着用バスタオル</a:t>
-            </a:r>
-          </a:p>
-          <a:p>
-            <a:pPr>
-              <a:spcAft>
-                <a:spcPts val="800"/>
-              </a:spcAft>
-              <a:defRPr sz="1800" b="0">
+              <a:t>制作するものは、</a:t>
+            </a:r>
+          </a:p>
+          <a:p>
+            <a:pPr>
+              <a:spcAft>
+                <a:spcPts val="800"/>
+              </a:spcAft>
+              <a:defRPr sz="2100" b="0">
                 <a:solidFill>
                   <a:srgbClr val="61716B"/>
                 </a:solidFill>
@@ -3491,7 +3489,7 @@
               </a:defRPr>
             </a:pPr>
             <a:r>
-              <a:t>外注制作に向けた仕様・納品・検収の整理</a:t>
+              <a:t>頭部小物3点と着用バスタオル。</a:t>
             </a:r>
           </a:p>
         </p:txBody>
@@ -3504,7 +3502,7 @@
         </p:nvSpPr>
         <p:spPr>
           <a:xfrm>
-            <a:off x="612648" y="4965192"/>
+            <a:off x="630936" y="5056632"/>
             <a:ext cx="1463040" cy="292608"/>
           </a:xfrm>
           <a:prstGeom prst="roundRect">
@@ -3549,7 +3547,7 @@
         </p:nvSpPr>
         <p:spPr>
           <a:xfrm>
-            <a:off x="704088" y="5006340"/>
+            <a:off x="722375" y="5097780"/>
             <a:ext cx="1298448" cy="228600"/>
           </a:xfrm>
           <a:prstGeom prst="rect">
@@ -3588,7 +3586,7 @@
         </p:nvSpPr>
         <p:spPr>
           <a:xfrm>
-            <a:off x="2240280" y="4965192"/>
+            <a:off x="2258568" y="5056632"/>
             <a:ext cx="1828800" cy="292608"/>
           </a:xfrm>
           <a:prstGeom prst="roundRect">
@@ -3633,7 +3631,7 @@
         </p:nvSpPr>
         <p:spPr>
           <a:xfrm>
-            <a:off x="2331720" y="5006340"/>
+            <a:off x="2350008" y="5097780"/>
             <a:ext cx="1664208" cy="228600"/>
           </a:xfrm>
           <a:prstGeom prst="rect">
@@ -3672,7 +3670,7 @@
         </p:nvSpPr>
         <p:spPr>
           <a:xfrm>
-            <a:off x="612648" y="5468112"/>
+            <a:off x="630936" y="5559552"/>
             <a:ext cx="1828800" cy="292608"/>
           </a:xfrm>
           <a:prstGeom prst="roundRect">
@@ -3717,7 +3715,7 @@
         </p:nvSpPr>
         <p:spPr>
           <a:xfrm>
-            <a:off x="704088" y="5509260"/>
+            <a:off x="722375" y="5600700"/>
             <a:ext cx="1664208" cy="228600"/>
           </a:xfrm>
           <a:prstGeom prst="rect">
@@ -3806,790 +3804,7 @@
               </a:defRPr>
             </a:pPr>
             <a:r>
-              <a:t>制作イメージ（AI生成）／完成仕様はラフ承認で確定</a:t>
-            </a:r>
-          </a:p>
-        </p:txBody>
-      </p:sp>
-    </p:spTree>
-  </p:cSld>
-  <p:clrMapOvr>
-    <a:masterClrMapping/>
-  </p:clrMapOvr>
-</p:sld>
-</file>
-
-<file path=ppt/slides/slide10.xml><?xml version="1.0" encoding="utf-8"?>
-<p:sld xmlns:a="http://schemas.openxmlformats.org/drawingml/2006/main" xmlns:p="http://schemas.openxmlformats.org/presentationml/2006/main" xmlns:r="http://schemas.openxmlformats.org/officeDocument/2006/relationships">
-  <p:cSld>
-    <p:bg>
-      <p:bgPr>
-        <a:solidFill>
-          <a:srgbClr val="F7FAF8"/>
-        </a:solidFill>
-        <a:effectLst/>
-      </p:bgPr>
-    </p:bg>
-    <p:spTree>
-      <p:nvGrpSpPr>
-        <p:cNvPr id="1" name=""/>
-        <p:cNvGrpSpPr/>
-        <p:nvPr/>
-      </p:nvGrpSpPr>
-      <p:grpSpPr/>
-      <p:sp>
-        <p:nvSpPr>
-          <p:cNvPr id="2" name="Rectangle 1"/>
-          <p:cNvSpPr/>
-          <p:nvPr/>
-        </p:nvSpPr>
-        <p:spPr>
-          <a:xfrm>
-            <a:off x="0" y="0"/>
-            <a:ext cx="128016" cy="6858000"/>
-          </a:xfrm>
-          <a:prstGeom prst="rect">
-            <a:avLst/>
-          </a:prstGeom>
-          <a:solidFill>
-            <a:srgbClr val="24685E"/>
-          </a:solidFill>
-          <a:ln>
-            <a:noFill/>
-          </a:ln>
-        </p:spPr>
-        <p:style>
-          <a:lnRef idx="1">
-            <a:schemeClr val="accent1"/>
-          </a:lnRef>
-          <a:fillRef idx="3">
-            <a:schemeClr val="accent1"/>
-          </a:fillRef>
-          <a:effectRef idx="2">
-            <a:schemeClr val="accent1"/>
-          </a:effectRef>
-          <a:fontRef idx="minor">
-            <a:schemeClr val="lt1"/>
-          </a:fontRef>
-        </p:style>
-        <p:txBody>
-          <a:bodyPr rtlCol="0" anchor="ctr"/>
-          <a:lstStyle/>
-          <a:p>
-            <a:pPr algn="ctr"/>
-          </a:p>
-        </p:txBody>
-      </p:sp>
-      <p:sp>
-        <p:nvSpPr>
-          <p:cNvPr id="3" name="TextBox 2"/>
-          <p:cNvSpPr txBox="1"/>
-          <p:nvPr/>
-        </p:nvSpPr>
-        <p:spPr>
-          <a:xfrm>
-            <a:off x="502920" y="256032"/>
-            <a:ext cx="9144000" cy="274320"/>
-          </a:xfrm>
-          <a:prstGeom prst="rect">
-            <a:avLst/>
-          </a:prstGeom>
-          <a:noFill/>
-        </p:spPr>
-        <p:txBody>
-          <a:bodyPr wrap="square" lIns="0" rIns="0" tIns="0" bIns="0">
-            <a:spAutoFit/>
-          </a:bodyPr>
-          <a:lstStyle/>
-          <a:p>
-            <a:pPr>
-              <a:spcAft>
-                <a:spcPts val="800"/>
-              </a:spcAft>
-              <a:defRPr sz="1100" b="1">
-                <a:solidFill>
-                  <a:srgbClr val="24685E"/>
-                </a:solidFill>
-                <a:latin typeface="Noto Sans CJK JP"/>
-              </a:defRPr>
-            </a:pPr>
-            <a:r>
-              <a:t>REFERENCE / NOTES</a:t>
-            </a:r>
-          </a:p>
-        </p:txBody>
-      </p:sp>
-      <p:sp>
-        <p:nvSpPr>
-          <p:cNvPr id="4" name="TextBox 3"/>
-          <p:cNvSpPr txBox="1"/>
-          <p:nvPr/>
-        </p:nvSpPr>
-        <p:spPr>
-          <a:xfrm>
-            <a:off x="502920" y="694944"/>
-            <a:ext cx="11155680" cy="594360"/>
-          </a:xfrm>
-          <a:prstGeom prst="rect">
-            <a:avLst/>
-          </a:prstGeom>
-          <a:noFill/>
-        </p:spPr>
-        <p:txBody>
-          <a:bodyPr wrap="square" lIns="0" rIns="0" tIns="0" bIns="0">
-            <a:spAutoFit/>
-          </a:bodyPr>
-          <a:lstStyle/>
-          <a:p>
-            <a:pPr>
-              <a:spcAft>
-                <a:spcPts val="800"/>
-              </a:spcAft>
-              <a:defRPr sz="2800" b="1">
-                <a:solidFill>
-                  <a:srgbClr val="173E3C"/>
-                </a:solidFill>
-                <a:latin typeface="Noto Sans CJK JP"/>
-              </a:defRPr>
-            </a:pPr>
-            <a:r>
-              <a:t>参考画像・アバター選定の扱い</a:t>
-            </a:r>
-          </a:p>
-        </p:txBody>
-      </p:sp>
-      <p:sp>
-        <p:nvSpPr>
-          <p:cNvPr id="5" name="TextBox 4"/>
-          <p:cNvSpPr txBox="1"/>
-          <p:nvPr/>
-        </p:nvSpPr>
-        <p:spPr>
-          <a:xfrm>
-            <a:off x="521207" y="1344168"/>
-            <a:ext cx="11064240" cy="457200"/>
-          </a:xfrm>
-          <a:prstGeom prst="rect">
-            <a:avLst/>
-          </a:prstGeom>
-          <a:noFill/>
-        </p:spPr>
-        <p:txBody>
-          <a:bodyPr wrap="square" lIns="0" rIns="0" tIns="0" bIns="0">
-            <a:spAutoFit/>
-          </a:bodyPr>
-          <a:lstStyle/>
-          <a:p>
-            <a:pPr>
-              <a:spcAft>
-                <a:spcPts val="800"/>
-              </a:spcAft>
-              <a:defRPr sz="1200" b="0">
-                <a:solidFill>
-                  <a:srgbClr val="61716B"/>
-                </a:solidFill>
-                <a:latin typeface="Noto Sans CJK JP"/>
-              </a:defRPr>
-            </a:pPr>
-            <a:r>
-              <a:t>本資料は発注仕様を確定するための確認用です。未確定事項は制作開始前に合意してください。</a:t>
-            </a:r>
-          </a:p>
-        </p:txBody>
-      </p:sp>
-      <p:sp>
-        <p:nvSpPr>
-          <p:cNvPr id="6" name="Rectangle 5"/>
-          <p:cNvSpPr/>
-          <p:nvPr/>
-        </p:nvSpPr>
-        <p:spPr>
-          <a:xfrm>
-            <a:off x="502920" y="6419088"/>
-            <a:ext cx="11155680" cy="10972"/>
-          </a:xfrm>
-          <a:prstGeom prst="rect">
-            <a:avLst/>
-          </a:prstGeom>
-          <a:solidFill>
-            <a:srgbClr val="CEDFD4"/>
-          </a:solidFill>
-          <a:ln>
-            <a:noFill/>
-          </a:ln>
-        </p:spPr>
-        <p:style>
-          <a:lnRef idx="1">
-            <a:schemeClr val="accent1"/>
-          </a:lnRef>
-          <a:fillRef idx="3">
-            <a:schemeClr val="accent1"/>
-          </a:fillRef>
-          <a:effectRef idx="2">
-            <a:schemeClr val="accent1"/>
-          </a:effectRef>
-          <a:fontRef idx="minor">
-            <a:schemeClr val="lt1"/>
-          </a:fontRef>
-        </p:style>
-        <p:txBody>
-          <a:bodyPr rtlCol="0" anchor="ctr"/>
-          <a:lstStyle/>
-          <a:p>
-            <a:pPr algn="ctr"/>
-          </a:p>
-        </p:txBody>
-      </p:sp>
-      <p:sp>
-        <p:nvSpPr>
-          <p:cNvPr id="7" name="TextBox 6"/>
-          <p:cNvSpPr txBox="1"/>
-          <p:nvPr/>
-        </p:nvSpPr>
-        <p:spPr>
-          <a:xfrm>
-            <a:off x="512064" y="6519672"/>
-            <a:ext cx="9601200" cy="182880"/>
-          </a:xfrm>
-          <a:prstGeom prst="rect">
-            <a:avLst/>
-          </a:prstGeom>
-          <a:noFill/>
-        </p:spPr>
-        <p:txBody>
-          <a:bodyPr wrap="square" lIns="0" rIns="0" tIns="0" bIns="0">
-            <a:spAutoFit/>
-          </a:bodyPr>
-          <a:lstStyle/>
-          <a:p>
-            <a:pPr>
-              <a:spcAft>
-                <a:spcPts val="800"/>
-              </a:spcAft>
-              <a:defRPr sz="800" b="0">
-                <a:solidFill>
-                  <a:srgbClr val="61716B"/>
-                </a:solidFill>
-                <a:latin typeface="Noto Sans CJK JP"/>
-              </a:defRPr>
-            </a:pPr>
-            <a:r>
-              <a:t>アース製薬 企業ブース｜3Dお風呂セット 制作発注資料｜仕様確認用 v0.3</a:t>
-            </a:r>
-          </a:p>
-        </p:txBody>
-      </p:sp>
-      <p:sp>
-        <p:nvSpPr>
-          <p:cNvPr id="8" name="TextBox 7"/>
-          <p:cNvSpPr txBox="1"/>
-          <p:nvPr/>
-        </p:nvSpPr>
-        <p:spPr>
-          <a:xfrm>
-            <a:off x="11128248" y="6473952"/>
-            <a:ext cx="548640" cy="274320"/>
-          </a:xfrm>
-          <a:prstGeom prst="rect">
-            <a:avLst/>
-          </a:prstGeom>
-          <a:noFill/>
-        </p:spPr>
-        <p:txBody>
-          <a:bodyPr wrap="square" lIns="0" rIns="0" tIns="0" bIns="0">
-            <a:spAutoFit/>
-          </a:bodyPr>
-          <a:lstStyle/>
-          <a:p>
-            <a:pPr>
-              <a:spcAft>
-                <a:spcPts val="800"/>
-              </a:spcAft>
-              <a:defRPr sz="1200" b="1">
-                <a:solidFill>
-                  <a:srgbClr val="24685E"/>
-                </a:solidFill>
-                <a:latin typeface="Noto Sans CJK JP"/>
-              </a:defRPr>
-            </a:pPr>
-            <a:r>
-              <a:t>10</a:t>
-            </a:r>
-          </a:p>
-        </p:txBody>
-      </p:sp>
-      <p:sp>
-        <p:nvSpPr>
-          <p:cNvPr id="9" name="Rounded Rectangle 8"/>
-          <p:cNvSpPr/>
-          <p:nvPr/>
-        </p:nvSpPr>
-        <p:spPr>
-          <a:xfrm>
-            <a:off x="621792" y="1929384"/>
-            <a:ext cx="10936224" cy="960120"/>
-          </a:xfrm>
-          <a:prstGeom prst="roundRect">
-            <a:avLst>
-              <a:gd name="adj" fmla="val 10000"/>
-            </a:avLst>
-          </a:prstGeom>
-          <a:solidFill>
-            <a:srgbClr val="E4F0E8"/>
-          </a:solidFill>
-          <a:ln>
-            <a:noFill/>
-          </a:ln>
-        </p:spPr>
-        <p:style>
-          <a:lnRef idx="1">
-            <a:schemeClr val="accent1"/>
-          </a:lnRef>
-          <a:fillRef idx="3">
-            <a:schemeClr val="accent1"/>
-          </a:fillRef>
-          <a:effectRef idx="2">
-            <a:schemeClr val="accent1"/>
-          </a:effectRef>
-          <a:fontRef idx="minor">
-            <a:schemeClr val="lt1"/>
-          </a:fontRef>
-        </p:style>
-        <p:txBody>
-          <a:bodyPr rtlCol="0" anchor="ctr"/>
-          <a:lstStyle/>
-          <a:p>
-            <a:pPr algn="ctr"/>
-          </a:p>
-        </p:txBody>
-      </p:sp>
-      <p:sp>
-        <p:nvSpPr>
-          <p:cNvPr id="10" name="TextBox 9"/>
-          <p:cNvSpPr txBox="1"/>
-          <p:nvPr/>
-        </p:nvSpPr>
-        <p:spPr>
-          <a:xfrm>
-            <a:off x="859536" y="2130552"/>
-            <a:ext cx="10442448" cy="566928"/>
-          </a:xfrm>
-          <a:prstGeom prst="rect">
-            <a:avLst/>
-          </a:prstGeom>
-          <a:noFill/>
-        </p:spPr>
-        <p:txBody>
-          <a:bodyPr wrap="square" lIns="0" rIns="0" tIns="0" bIns="0">
-            <a:spAutoFit/>
-          </a:bodyPr>
-          <a:lstStyle/>
-          <a:p>
-            <a:pPr>
-              <a:spcAft>
-                <a:spcPts val="800"/>
-              </a:spcAft>
-              <a:defRPr sz="1600" b="1">
-                <a:solidFill>
-                  <a:srgbClr val="24685E"/>
-                </a:solidFill>
-                <a:latin typeface="Noto Sans CJK JP"/>
-              </a:defRPr>
-            </a:pPr>
-            <a:r>
-              <a:t>掲載画像は企画画像をもとに作成したAI生成の制作イメージです。</a:t>
-            </a:r>
-          </a:p>
-          <a:p>
-            <a:pPr>
-              <a:spcAft>
-                <a:spcPts val="800"/>
-              </a:spcAft>
-              <a:defRPr sz="1600" b="1">
-                <a:solidFill>
-                  <a:srgbClr val="24685E"/>
-                </a:solidFill>
-                <a:latin typeface="Noto Sans CJK JP"/>
-              </a:defRPr>
-            </a:pPr>
-            <a:r>
-              <a:t>実在のアバター着用例や完成モデルではなく、最終形状・質感・ロゴはラフ承認で確定します。</a:t>
-            </a:r>
-          </a:p>
-        </p:txBody>
-      </p:sp>
-      <p:sp>
-        <p:nvSpPr>
-          <p:cNvPr id="11" name="TextBox 10"/>
-          <p:cNvSpPr txBox="1"/>
-          <p:nvPr/>
-        </p:nvSpPr>
-        <p:spPr>
-          <a:xfrm>
-            <a:off x="667512" y="3200400"/>
-            <a:ext cx="10789920" cy="393192"/>
-          </a:xfrm>
-          <a:prstGeom prst="rect">
-            <a:avLst/>
-          </a:prstGeom>
-          <a:noFill/>
-        </p:spPr>
-        <p:txBody>
-          <a:bodyPr wrap="square" lIns="0" rIns="0" tIns="0" bIns="0">
-            <a:spAutoFit/>
-          </a:bodyPr>
-          <a:lstStyle/>
-          <a:p>
-            <a:pPr>
-              <a:spcAft>
-                <a:spcPts val="800"/>
-              </a:spcAft>
-              <a:defRPr sz="2000" b="1">
-                <a:solidFill>
-                  <a:srgbClr val="173E3C"/>
-                </a:solidFill>
-                <a:latin typeface="Noto Sans CJK JP"/>
-              </a:defRPr>
-            </a:pPr>
-            <a:r>
-              <a:t>対応5種の選定について</a:t>
-            </a:r>
-          </a:p>
-        </p:txBody>
-      </p:sp>
-      <p:sp>
-        <p:nvSpPr>
-          <p:cNvPr id="12" name="TextBox 11"/>
-          <p:cNvSpPr txBox="1"/>
-          <p:nvPr/>
-        </p:nvSpPr>
-        <p:spPr>
-          <a:xfrm>
-            <a:off x="676656" y="3703320"/>
-            <a:ext cx="10561320" cy="758952"/>
-          </a:xfrm>
-          <a:prstGeom prst="rect">
-            <a:avLst/>
-          </a:prstGeom>
-          <a:noFill/>
-        </p:spPr>
-        <p:txBody>
-          <a:bodyPr wrap="square" lIns="0" rIns="0" tIns="0" bIns="0">
-            <a:spAutoFit/>
-          </a:bodyPr>
-          <a:lstStyle/>
-          <a:p>
-            <a:pPr>
-              <a:spcAft>
-                <a:spcPts val="800"/>
-              </a:spcAft>
-              <a:defRPr sz="1600" b="0">
-                <a:solidFill>
-                  <a:srgbClr val="173E3C"/>
-                </a:solidFill>
-                <a:latin typeface="Noto Sans CJK JP"/>
-              </a:defRPr>
-            </a:pPr>
-            <a:r>
-              <a:t>公開されたVRChat向けツールのアバター辞書・対応情報を参照して選定。</a:t>
-            </a:r>
-          </a:p>
-          <a:p>
-            <a:pPr>
-              <a:spcAft>
-                <a:spcPts val="800"/>
-              </a:spcAft>
-              <a:defRPr sz="1600" b="0">
-                <a:solidFill>
-                  <a:srgbClr val="173E3C"/>
-                </a:solidFill>
-                <a:latin typeface="Noto Sans CJK JP"/>
-              </a:defRPr>
-            </a:pPr>
-            <a:r>
-              <a:t>最新の販売数・利用率の上位5種と確認したものではありません。</a:t>
-            </a:r>
-          </a:p>
-        </p:txBody>
-      </p:sp>
-      <p:sp>
-        <p:nvSpPr>
-          <p:cNvPr id="13" name="TextBox 12"/>
-          <p:cNvSpPr txBox="1"/>
-          <p:nvPr/>
-        </p:nvSpPr>
-        <p:spPr>
-          <a:xfrm>
-            <a:off x="713232" y="4617720"/>
-            <a:ext cx="3749039" cy="274320"/>
-          </a:xfrm>
-          <a:prstGeom prst="rect">
-            <a:avLst/>
-          </a:prstGeom>
-          <a:noFill/>
-        </p:spPr>
-        <p:txBody>
-          <a:bodyPr wrap="square" lIns="0" rIns="0" tIns="0" bIns="0">
-            <a:spAutoFit/>
-          </a:bodyPr>
-          <a:lstStyle/>
-          <a:p>
-            <a:pPr>
-              <a:spcAft>
-                <a:spcPts val="800"/>
-              </a:spcAft>
-              <a:defRPr sz="1100" b="1">
-                <a:solidFill>
-                  <a:srgbClr val="173E3C"/>
-                </a:solidFill>
-                <a:latin typeface="Noto Sans CJK JP"/>
-              </a:defRPr>
-            </a:pPr>
-            <a:r>
-              <a:t>AssetVault｜アバター辞書</a:t>
-            </a:r>
-          </a:p>
-        </p:txBody>
-      </p:sp>
-      <p:sp>
-        <p:nvSpPr>
-          <p:cNvPr id="14" name="TextBox 13"/>
-          <p:cNvSpPr txBox="1"/>
-          <p:nvPr/>
-        </p:nvSpPr>
-        <p:spPr>
-          <a:xfrm>
-            <a:off x="4553712" y="4636007"/>
-            <a:ext cx="6812280" cy="228600"/>
-          </a:xfrm>
-          <a:prstGeom prst="rect">
-            <a:avLst/>
-          </a:prstGeom>
-          <a:noFill/>
-        </p:spPr>
-        <p:txBody>
-          <a:bodyPr wrap="square" lIns="0" rIns="0" tIns="0" bIns="0">
-            <a:spAutoFit/>
-          </a:bodyPr>
-          <a:lstStyle/>
-          <a:p>
-            <a:pPr>
-              <a:spcAft>
-                <a:spcPts val="800"/>
-              </a:spcAft>
-              <a:defRPr sz="900" b="0">
-                <a:solidFill>
-                  <a:srgbClr val="24685E"/>
-                </a:solidFill>
-                <a:latin typeface="Noto Sans CJK JP"/>
-              </a:defRPr>
-            </a:pPr>
-            <a:r>
-              <a:rPr>
-                <a:hlinkClick r:id="rId2"/>
-              </a:rPr>
-              <a:t>https://github.com/elysia-5201/asset-vault/blob/main/config/avatars.seed.json</a:t>
-            </a:r>
-          </a:p>
-        </p:txBody>
-      </p:sp>
-      <p:sp>
-        <p:nvSpPr>
-          <p:cNvPr id="15" name="TextBox 14"/>
-          <p:cNvSpPr txBox="1"/>
-          <p:nvPr/>
-        </p:nvSpPr>
-        <p:spPr>
-          <a:xfrm>
-            <a:off x="713232" y="4983480"/>
-            <a:ext cx="3749039" cy="274320"/>
-          </a:xfrm>
-          <a:prstGeom prst="rect">
-            <a:avLst/>
-          </a:prstGeom>
-          <a:noFill/>
-        </p:spPr>
-        <p:txBody>
-          <a:bodyPr wrap="square" lIns="0" rIns="0" tIns="0" bIns="0">
-            <a:spAutoFit/>
-          </a:bodyPr>
-          <a:lstStyle/>
-          <a:p>
-            <a:pPr>
-              <a:spcAft>
-                <a:spcPts val="800"/>
-              </a:spcAft>
-              <a:defRPr sz="1100" b="1">
-                <a:solidFill>
-                  <a:srgbClr val="173E3C"/>
-                </a:solidFill>
-                <a:latin typeface="Noto Sans CJK JP"/>
-              </a:defRPr>
-            </a:pPr>
-            <a:r>
-              <a:t>avatar-closet-mcp｜対応名称の説明</a:t>
-            </a:r>
-          </a:p>
-        </p:txBody>
-      </p:sp>
-      <p:sp>
-        <p:nvSpPr>
-          <p:cNvPr id="16" name="TextBox 15"/>
-          <p:cNvSpPr txBox="1"/>
-          <p:nvPr/>
-        </p:nvSpPr>
-        <p:spPr>
-          <a:xfrm>
-            <a:off x="4553712" y="5001768"/>
-            <a:ext cx="6812280" cy="228600"/>
-          </a:xfrm>
-          <a:prstGeom prst="rect">
-            <a:avLst/>
-          </a:prstGeom>
-          <a:noFill/>
-        </p:spPr>
-        <p:txBody>
-          <a:bodyPr wrap="square" lIns="0" rIns="0" tIns="0" bIns="0">
-            <a:spAutoFit/>
-          </a:bodyPr>
-          <a:lstStyle/>
-          <a:p>
-            <a:pPr>
-              <a:spcAft>
-                <a:spcPts val="800"/>
-              </a:spcAft>
-              <a:defRPr sz="900" b="0">
-                <a:solidFill>
-                  <a:srgbClr val="24685E"/>
-                </a:solidFill>
-                <a:latin typeface="Noto Sans CJK JP"/>
-              </a:defRPr>
-            </a:pPr>
-            <a:r>
-              <a:rPr>
-                <a:hlinkClick r:id="rId3"/>
-              </a:rPr>
-              <a:t>https://github.com/tomo1560/avatar-closet-mcp/blob/main/README.md</a:t>
-            </a:r>
-          </a:p>
-        </p:txBody>
-      </p:sp>
-      <p:sp>
-        <p:nvSpPr>
-          <p:cNvPr id="17" name="TextBox 16"/>
-          <p:cNvSpPr txBox="1"/>
-          <p:nvPr/>
-        </p:nvSpPr>
-        <p:spPr>
-          <a:xfrm>
-            <a:off x="713232" y="5349240"/>
-            <a:ext cx="3749039" cy="274320"/>
-          </a:xfrm>
-          <a:prstGeom prst="rect">
-            <a:avLst/>
-          </a:prstGeom>
-          <a:noFill/>
-        </p:spPr>
-        <p:txBody>
-          <a:bodyPr wrap="square" lIns="0" rIns="0" tIns="0" bIns="0">
-            <a:spAutoFit/>
-          </a:bodyPr>
-          <a:lstStyle/>
-          <a:p>
-            <a:pPr>
-              <a:spcAft>
-                <a:spcPts val="800"/>
-              </a:spcAft>
-              <a:defRPr sz="1100" b="1">
-                <a:solidFill>
-                  <a:srgbClr val="173E3C"/>
-                </a:solidFill>
-                <a:latin typeface="Noto Sans CJK JP"/>
-              </a:defRPr>
-            </a:pPr>
-            <a:r>
-              <a:t>Knee Fixer｜対応プリセット一覧</a:t>
-            </a:r>
-          </a:p>
-        </p:txBody>
-      </p:sp>
-      <p:sp>
-        <p:nvSpPr>
-          <p:cNvPr id="18" name="TextBox 17"/>
-          <p:cNvSpPr txBox="1"/>
-          <p:nvPr/>
-        </p:nvSpPr>
-        <p:spPr>
-          <a:xfrm>
-            <a:off x="4553712" y="5367527"/>
-            <a:ext cx="6812280" cy="228600"/>
-          </a:xfrm>
-          <a:prstGeom prst="rect">
-            <a:avLst/>
-          </a:prstGeom>
-          <a:noFill/>
-        </p:spPr>
-        <p:txBody>
-          <a:bodyPr wrap="square" lIns="0" rIns="0" tIns="0" bIns="0">
-            <a:spAutoFit/>
-          </a:bodyPr>
-          <a:lstStyle/>
-          <a:p>
-            <a:pPr>
-              <a:spcAft>
-                <a:spcPts val="800"/>
-              </a:spcAft>
-              <a:defRPr sz="900" b="0">
-                <a:solidFill>
-                  <a:srgbClr val="24685E"/>
-                </a:solidFill>
-                <a:latin typeface="Noto Sans CJK JP"/>
-              </a:defRPr>
-            </a:pPr>
-            <a:r>
-              <a:rPr>
-                <a:hlinkClick r:id="rId4"/>
-              </a:rPr>
-              <a:t>https://github.com/KOZ39/Knee-Fixer/blob/main/README_JA.md</a:t>
-            </a:r>
-          </a:p>
-        </p:txBody>
-      </p:sp>
-      <p:sp>
-        <p:nvSpPr>
-          <p:cNvPr id="19" name="TextBox 18"/>
-          <p:cNvSpPr txBox="1"/>
-          <p:nvPr/>
-        </p:nvSpPr>
-        <p:spPr>
-          <a:xfrm>
-            <a:off x="704088" y="5916168"/>
-            <a:ext cx="10698480" cy="365760"/>
-          </a:xfrm>
-          <a:prstGeom prst="rect">
-            <a:avLst/>
-          </a:prstGeom>
-          <a:noFill/>
-        </p:spPr>
-        <p:txBody>
-          <a:bodyPr wrap="square" lIns="0" rIns="0" tIns="0" bIns="0">
-            <a:spAutoFit/>
-          </a:bodyPr>
-          <a:lstStyle/>
-          <a:p>
-            <a:pPr>
-              <a:spcAft>
-                <a:spcPts val="800"/>
-              </a:spcAft>
-              <a:defRPr sz="1000" b="0">
-                <a:solidFill>
-                  <a:srgbClr val="61716B"/>
-                </a:solidFill>
-                <a:latin typeface="Noto Sans CJK JP"/>
-              </a:defRPr>
-            </a:pPr>
-            <a:r>
-              <a:t>調査日：2026年10月20日。BOOTHの商品ページ本文・最新版・規約は接続制限により未確認。制作開始前に正規販売元で確認してください。</a:t>
+              <a:t>参考イメージ（AI生成）</a:t>
             </a:r>
           </a:p>
         </p:txBody>
@@ -4697,7 +3912,7 @@
               </a:defRPr>
             </a:pPr>
             <a:r>
-              <a:t>01 / SCOPE</a:t>
+              <a:t>01 / ITEMS</a:t>
             </a:r>
           </a:p>
         </p:txBody>
@@ -4736,7 +3951,7 @@
               </a:defRPr>
             </a:pPr>
             <a:r>
-              <a:t>今回の制作対象は、4アイテム</a:t>
+              <a:t>制作するもの｜4アイテム</a:t>
             </a:r>
           </a:p>
         </p:txBody>
@@ -4775,7 +3990,7 @@
               </a:defRPr>
             </a:pPr>
             <a:r>
-              <a:t>各アイテムの形状・色・質感は、ラフ提出後に発注者が承認します。</a:t>
+              <a:t>白を基調に、お風呂らしい清潔感とかわいらしさを揃えます。</a:t>
             </a:r>
           </a:p>
         </p:txBody>
@@ -4857,7 +4072,7 @@
               </a:defRPr>
             </a:pPr>
             <a:r>
-              <a:t>アース製薬 企業ブース｜3Dお風呂セット 制作発注資料｜仕様確認用 v0.3</a:t>
+              <a:t>アース製薬 企業ブース｜3Dお風呂セット 制作発注資料｜制作内容 v0.4</a:t>
             </a:r>
           </a:p>
         </p:txBody>
@@ -5075,7 +4290,7 @@
               <a:spcAft>
                 <a:spcPts val="800"/>
               </a:spcAft>
-              <a:defRPr sz="1000" b="0">
+              <a:defRPr sz="1100" b="0">
                 <a:solidFill>
                   <a:srgbClr val="61716B"/>
                 </a:solidFill>
@@ -5083,7 +4298,7 @@
               </a:defRPr>
             </a:pPr>
             <a:r>
-              <a:t>頭に載せるタオル＋アヒル</a:t>
+              <a:t>頭の上に載せる小物</a:t>
             </a:r>
           </a:p>
         </p:txBody>
@@ -5262,7 +4477,7 @@
               <a:spcAft>
                 <a:spcPts val="800"/>
               </a:spcAft>
-              <a:defRPr sz="1000" b="0">
+              <a:defRPr sz="1100" b="0">
                 <a:solidFill>
                   <a:srgbClr val="61716B"/>
                 </a:solidFill>
@@ -5270,7 +4485,7 @@
               </a:defRPr>
             </a:pPr>
             <a:r>
-              <a:t>ふんわりした頭部用アイテム</a:t>
+              <a:t>頭に巻く、ふわふわのターバン</a:t>
             </a:r>
           </a:p>
         </p:txBody>
@@ -5449,7 +4664,7 @@
               <a:spcAft>
                 <a:spcPts val="800"/>
               </a:spcAft>
-              <a:defRPr sz="1000" b="0">
+              <a:defRPr sz="1100" b="0">
                 <a:solidFill>
                   <a:srgbClr val="61716B"/>
                 </a:solidFill>
@@ -5457,7 +4672,7 @@
               </a:defRPr>
             </a:pPr>
             <a:r>
-              <a:t>左右の目に載せる輪切り型</a:t>
+              <a:t>左右の目に載せる小物</a:t>
             </a:r>
           </a:p>
         </p:txBody>
@@ -5636,7 +4851,7 @@
               <a:spcAft>
                 <a:spcPts val="800"/>
               </a:spcAft>
-              <a:defRPr sz="1000" b="0">
+              <a:defRPr sz="1100" b="0">
                 <a:solidFill>
                   <a:srgbClr val="61716B"/>
                 </a:solidFill>
@@ -5644,7 +4859,7 @@
               </a:defRPr>
             </a:pPr>
             <a:r>
-              <a:t>身体に巻く着用品／5種対応</a:t>
+              <a:t>身体に巻く着用品</a:t>
             </a:r>
           </a:p>
         </p:txBody>
@@ -5657,8 +4872,8 @@
         </p:nvSpPr>
         <p:spPr>
           <a:xfrm>
-            <a:off x="548640" y="5989320"/>
-            <a:ext cx="7772400" cy="292608"/>
+            <a:off x="566928" y="6025896"/>
+            <a:ext cx="7040880" cy="274320"/>
           </a:xfrm>
           <a:prstGeom prst="rect">
             <a:avLst/>
@@ -5683,7 +4898,7 @@
               </a:defRPr>
             </a:pPr>
             <a:r>
-              <a:t>対象外：バスタブ、ブース本体、ゲーム、NPC、展示パネル</a:t>
+              <a:t>バスタブは別途制作するため、今回の依頼には含みません。</a:t>
             </a:r>
           </a:p>
         </p:txBody>
@@ -5696,8 +4911,8 @@
         </p:nvSpPr>
         <p:spPr>
           <a:xfrm>
-            <a:off x="8229600" y="6007608"/>
-            <a:ext cx="3383280" cy="274320"/>
+            <a:off x="9217152" y="6053328"/>
+            <a:ext cx="2377440" cy="274320"/>
           </a:xfrm>
           <a:prstGeom prst="rect">
             <a:avLst/>
@@ -5722,7 +4937,7 @@
               </a:defRPr>
             </a:pPr>
             <a:r>
-              <a:t>制作イメージ（AI生成）／完成仕様はラフ承認で確定</a:t>
+              <a:t>参考イメージ（AI生成）</a:t>
             </a:r>
           </a:p>
         </p:txBody>
@@ -5869,7 +5084,7 @@
               </a:defRPr>
             </a:pPr>
             <a:r>
-              <a:t>頭部小物｜形状と装着しやすさ</a:t>
+              <a:t>頭部小物｜タオルとターバン</a:t>
             </a:r>
           </a:p>
         </p:txBody>
@@ -5908,7 +5123,7 @@
               </a:defRPr>
             </a:pPr>
             <a:r>
-              <a:t>共通方針：白系の清潔感、布の柔らかさ、調整しやすい構成。</a:t>
+              <a:t>どちらも、頭に装着して使うアイテムです。</a:t>
             </a:r>
           </a:p>
         </p:txBody>
@@ -5990,7 +5205,7 @@
               </a:defRPr>
             </a:pPr>
             <a:r>
-              <a:t>アース製薬 企業ブース｜3Dお風呂セット 制作発注資料｜仕様確認用 v0.3</a:t>
+              <a:t>アース製薬 企業ブース｜3Dお風呂セット 制作発注資料｜制作内容 v0.4</a:t>
             </a:r>
           </a:p>
         </p:txBody>
@@ -6042,8 +5257,8 @@
         </p:nvSpPr>
         <p:spPr>
           <a:xfrm>
-            <a:off x="521207" y="1901952"/>
-            <a:ext cx="5394960" cy="4142232"/>
+            <a:off x="566928" y="1874519"/>
+            <a:ext cx="5358384" cy="4297680"/>
           </a:xfrm>
           <a:prstGeom prst="roundRect">
             <a:avLst>
@@ -6096,8 +5311,8 @@
         </p:blipFill>
         <p:spPr>
           <a:xfrm>
-            <a:off x="731519" y="2121408"/>
-            <a:ext cx="2331720" cy="2331720"/>
+            <a:off x="768096" y="2093976"/>
+            <a:ext cx="2697480" cy="2697480"/>
           </a:xfrm>
           <a:prstGeom prst="rect">
             <a:avLst/>
@@ -6112,7 +5327,7 @@
         </p:nvSpPr>
         <p:spPr>
           <a:xfrm>
-            <a:off x="740664" y="4599432"/>
+            <a:off x="786384" y="4983480"/>
             <a:ext cx="4937760" cy="411480"/>
           </a:xfrm>
           <a:prstGeom prst="rect">
@@ -6130,7 +5345,7 @@
               <a:spcAft>
                 <a:spcPts val="800"/>
               </a:spcAft>
-              <a:defRPr sz="2000" b="1">
+              <a:defRPr sz="2100" b="1">
                 <a:solidFill>
                   <a:srgbClr val="173E3C"/>
                 </a:solidFill>
@@ -6151,33 +5366,49 @@
         </p:nvSpPr>
         <p:spPr>
           <a:xfrm>
-            <a:off x="3236976" y="2267712"/>
-            <a:ext cx="201168" cy="274320"/>
-          </a:xfrm>
-          <a:prstGeom prst="rect">
-            <a:avLst/>
-          </a:prstGeom>
-          <a:noFill/>
-        </p:spPr>
-        <p:txBody>
-          <a:bodyPr wrap="square" lIns="0" rIns="0" tIns="0" bIns="0">
-            <a:spAutoFit/>
-          </a:bodyPr>
-          <a:lstStyle/>
-          <a:p>
-            <a:pPr>
-              <a:spcAft>
-                <a:spcPts val="800"/>
-              </a:spcAft>
-              <a:defRPr sz="1400" b="1">
-                <a:solidFill>
-                  <a:srgbClr val="24685E"/>
-                </a:solidFill>
-                <a:latin typeface="Noto Sans CJK JP"/>
-              </a:defRPr>
-            </a:pPr>
-            <a:r>
-              <a:t>•</a:t>
+            <a:off x="3694176" y="2578608"/>
+            <a:ext cx="2002536" cy="1737360"/>
+          </a:xfrm>
+          <a:prstGeom prst="rect">
+            <a:avLst/>
+          </a:prstGeom>
+          <a:noFill/>
+        </p:spPr>
+        <p:txBody>
+          <a:bodyPr wrap="square" lIns="0" rIns="0" tIns="0" bIns="0">
+            <a:spAutoFit/>
+          </a:bodyPr>
+          <a:lstStyle/>
+          <a:p>
+            <a:pPr>
+              <a:spcAft>
+                <a:spcPts val="800"/>
+              </a:spcAft>
+              <a:defRPr sz="1700" b="0">
+                <a:solidFill>
+                  <a:srgbClr val="173E3C"/>
+                </a:solidFill>
+                <a:latin typeface="Noto Sans CJK JP"/>
+              </a:defRPr>
+            </a:pPr>
+            <a:r>
+              <a:t>折り畳んだ白いタオルの上に、</a:t>
+            </a:r>
+          </a:p>
+          <a:p>
+            <a:pPr>
+              <a:spcAft>
+                <a:spcPts val="800"/>
+              </a:spcAft>
+              <a:defRPr sz="1700" b="0">
+                <a:solidFill>
+                  <a:srgbClr val="173E3C"/>
+                </a:solidFill>
+                <a:latin typeface="Noto Sans CJK JP"/>
+              </a:defRPr>
+            </a:pPr>
+            <a:r>
+              <a:t>黄色いアヒルが乗ったデザイン。</a:t>
             </a:r>
           </a:p>
         </p:txBody>
@@ -6190,203 +5421,8 @@
         </p:nvSpPr>
         <p:spPr>
           <a:xfrm>
-            <a:off x="3474720" y="2267712"/>
-            <a:ext cx="2185415" cy="832103"/>
-          </a:xfrm>
-          <a:prstGeom prst="rect">
-            <a:avLst/>
-          </a:prstGeom>
-          <a:noFill/>
-        </p:spPr>
-        <p:txBody>
-          <a:bodyPr wrap="square" lIns="0" rIns="0" tIns="0" bIns="0">
-            <a:spAutoFit/>
-          </a:bodyPr>
-          <a:lstStyle/>
-          <a:p>
-            <a:pPr>
-              <a:spcAft>
-                <a:spcPts val="800"/>
-              </a:spcAft>
-              <a:defRPr sz="1400" b="0">
-                <a:solidFill>
-                  <a:srgbClr val="173E3C"/>
-                </a:solidFill>
-                <a:latin typeface="Noto Sans CJK JP"/>
-              </a:defRPr>
-            </a:pPr>
-            <a:r>
-              <a:t>タオルの厚みと折り重なりを表現</a:t>
-            </a:r>
-          </a:p>
-        </p:txBody>
-      </p:sp>
-      <p:sp>
-        <p:nvSpPr>
-          <p:cNvPr id="14" name="TextBox 13"/>
-          <p:cNvSpPr txBox="1"/>
-          <p:nvPr/>
-        </p:nvSpPr>
-        <p:spPr>
-          <a:xfrm>
-            <a:off x="3236976" y="3136391"/>
-            <a:ext cx="201168" cy="274320"/>
-          </a:xfrm>
-          <a:prstGeom prst="rect">
-            <a:avLst/>
-          </a:prstGeom>
-          <a:noFill/>
-        </p:spPr>
-        <p:txBody>
-          <a:bodyPr wrap="square" lIns="0" rIns="0" tIns="0" bIns="0">
-            <a:spAutoFit/>
-          </a:bodyPr>
-          <a:lstStyle/>
-          <a:p>
-            <a:pPr>
-              <a:spcAft>
-                <a:spcPts val="800"/>
-              </a:spcAft>
-              <a:defRPr sz="1400" b="1">
-                <a:solidFill>
-                  <a:srgbClr val="24685E"/>
-                </a:solidFill>
-                <a:latin typeface="Noto Sans CJK JP"/>
-              </a:defRPr>
-            </a:pPr>
-            <a:r>
-              <a:t>•</a:t>
-            </a:r>
-          </a:p>
-        </p:txBody>
-      </p:sp>
-      <p:sp>
-        <p:nvSpPr>
-          <p:cNvPr id="15" name="TextBox 14"/>
-          <p:cNvSpPr txBox="1"/>
-          <p:nvPr/>
-        </p:nvSpPr>
-        <p:spPr>
-          <a:xfrm>
-            <a:off x="3474720" y="3136391"/>
-            <a:ext cx="2185415" cy="832103"/>
-          </a:xfrm>
-          <a:prstGeom prst="rect">
-            <a:avLst/>
-          </a:prstGeom>
-          <a:noFill/>
-        </p:spPr>
-        <p:txBody>
-          <a:bodyPr wrap="square" lIns="0" rIns="0" tIns="0" bIns="0">
-            <a:spAutoFit/>
-          </a:bodyPr>
-          <a:lstStyle/>
-          <a:p>
-            <a:pPr>
-              <a:spcAft>
-                <a:spcPts val="800"/>
-              </a:spcAft>
-              <a:defRPr sz="1400" b="0">
-                <a:solidFill>
-                  <a:srgbClr val="173E3C"/>
-                </a:solidFill>
-                <a:latin typeface="Noto Sans CJK JP"/>
-              </a:defRPr>
-            </a:pPr>
-            <a:r>
-              <a:t>アヒルとタオルを個別に調整可能に</a:t>
-            </a:r>
-          </a:p>
-        </p:txBody>
-      </p:sp>
-      <p:sp>
-        <p:nvSpPr>
-          <p:cNvPr id="16" name="TextBox 15"/>
-          <p:cNvSpPr txBox="1"/>
-          <p:nvPr/>
-        </p:nvSpPr>
-        <p:spPr>
-          <a:xfrm>
-            <a:off x="3236976" y="4005072"/>
-            <a:ext cx="201168" cy="274320"/>
-          </a:xfrm>
-          <a:prstGeom prst="rect">
-            <a:avLst/>
-          </a:prstGeom>
-          <a:noFill/>
-        </p:spPr>
-        <p:txBody>
-          <a:bodyPr wrap="square" lIns="0" rIns="0" tIns="0" bIns="0">
-            <a:spAutoFit/>
-          </a:bodyPr>
-          <a:lstStyle/>
-          <a:p>
-            <a:pPr>
-              <a:spcAft>
-                <a:spcPts val="800"/>
-              </a:spcAft>
-              <a:defRPr sz="1400" b="1">
-                <a:solidFill>
-                  <a:srgbClr val="24685E"/>
-                </a:solidFill>
-                <a:latin typeface="Noto Sans CJK JP"/>
-              </a:defRPr>
-            </a:pPr>
-            <a:r>
-              <a:t>•</a:t>
-            </a:r>
-          </a:p>
-        </p:txBody>
-      </p:sp>
-      <p:sp>
-        <p:nvSpPr>
-          <p:cNvPr id="17" name="TextBox 16"/>
-          <p:cNvSpPr txBox="1"/>
-          <p:nvPr/>
-        </p:nvSpPr>
-        <p:spPr>
-          <a:xfrm>
-            <a:off x="3474720" y="4005072"/>
-            <a:ext cx="2185415" cy="832103"/>
-          </a:xfrm>
-          <a:prstGeom prst="rect">
-            <a:avLst/>
-          </a:prstGeom>
-          <a:noFill/>
-        </p:spPr>
-        <p:txBody>
-          <a:bodyPr wrap="square" lIns="0" rIns="0" tIns="0" bIns="0">
-            <a:spAutoFit/>
-          </a:bodyPr>
-          <a:lstStyle/>
-          <a:p>
-            <a:pPr>
-              <a:spcAft>
-                <a:spcPts val="800"/>
-              </a:spcAft>
-              <a:defRPr sz="1400" b="0">
-                <a:solidFill>
-                  <a:srgbClr val="173E3C"/>
-                </a:solidFill>
-                <a:latin typeface="Noto Sans CJK JP"/>
-              </a:defRPr>
-            </a:pPr>
-            <a:r>
-              <a:t>髪・耳・角への干渉を確認</a:t>
-            </a:r>
-          </a:p>
-        </p:txBody>
-      </p:sp>
-      <p:sp>
-        <p:nvSpPr>
-          <p:cNvPr id="18" name="TextBox 17"/>
-          <p:cNvSpPr txBox="1"/>
-          <p:nvPr/>
-        </p:nvSpPr>
-        <p:spPr>
-          <a:xfrm>
-            <a:off x="740664" y="5330952"/>
-            <a:ext cx="4983480" cy="274320"/>
+            <a:off x="786384" y="5687568"/>
+            <a:ext cx="4800600" cy="274320"/>
           </a:xfrm>
           <a:prstGeom prst="rect">
             <a:avLst/>
@@ -6411,21 +5447,21 @@
               </a:defRPr>
             </a:pPr>
             <a:r>
-              <a:t>制作イメージ（AI生成）／完成仕様はラフ承認で確定</a:t>
-            </a:r>
-          </a:p>
-        </p:txBody>
-      </p:sp>
-      <p:sp>
-        <p:nvSpPr>
-          <p:cNvPr id="19" name="Rounded Rectangle 18"/>
+              <a:t>参考イメージ（AI生成）</a:t>
+            </a:r>
+          </a:p>
+        </p:txBody>
+      </p:sp>
+      <p:sp>
+        <p:nvSpPr>
+          <p:cNvPr id="14" name="Rounded Rectangle 13"/>
           <p:cNvSpPr/>
           <p:nvPr/>
         </p:nvSpPr>
         <p:spPr>
           <a:xfrm>
-            <a:off x="6263640" y="1901952"/>
-            <a:ext cx="5394960" cy="4142232"/>
+            <a:off x="6263640" y="1874519"/>
+            <a:ext cx="5358384" cy="4297680"/>
           </a:xfrm>
           <a:prstGeom prst="roundRect">
             <a:avLst>
@@ -6463,7 +5499,7 @@
       </p:sp>
       <p:pic>
         <p:nvPicPr>
-          <p:cNvPr id="20" name="Picture 19" descr="exec-871844d4-edbb-4a08-9d69-90132a8b8d7d.png"/>
+          <p:cNvPr id="15" name="Picture 14" descr="exec-871844d4-edbb-4a08-9d69-90132a8b8d7d.png"/>
           <p:cNvPicPr>
             <a:picLocks noChangeAspect="1"/>
           </p:cNvPicPr>
@@ -6478,8 +5514,8 @@
         </p:blipFill>
         <p:spPr>
           <a:xfrm>
-            <a:off x="6473952" y="2121408"/>
-            <a:ext cx="2331720" cy="2331720"/>
+            <a:off x="6464807" y="2093976"/>
+            <a:ext cx="2697480" cy="2697480"/>
           </a:xfrm>
           <a:prstGeom prst="rect">
             <a:avLst/>
@@ -6488,13 +5524,13 @@
       </p:pic>
       <p:sp>
         <p:nvSpPr>
-          <p:cNvPr id="21" name="TextBox 20"/>
-          <p:cNvSpPr txBox="1"/>
-          <p:nvPr/>
-        </p:nvSpPr>
-        <p:spPr>
-          <a:xfrm>
-            <a:off x="6483096" y="4599432"/>
+          <p:cNvPr id="16" name="TextBox 15"/>
+          <p:cNvSpPr txBox="1"/>
+          <p:nvPr/>
+        </p:nvSpPr>
+        <p:spPr>
+          <a:xfrm>
+            <a:off x="6483096" y="4983480"/>
             <a:ext cx="4937760" cy="411480"/>
           </a:xfrm>
           <a:prstGeom prst="rect">
@@ -6512,7 +5548,7 @@
               <a:spcAft>
                 <a:spcPts val="800"/>
               </a:spcAft>
-              <a:defRPr sz="2000" b="1">
+              <a:defRPr sz="2100" b="1">
                 <a:solidFill>
                   <a:srgbClr val="173E3C"/>
                 </a:solidFill>
@@ -6527,70 +5563,31 @@
       </p:sp>
       <p:sp>
         <p:nvSpPr>
-          <p:cNvPr id="22" name="TextBox 21"/>
-          <p:cNvSpPr txBox="1"/>
-          <p:nvPr/>
-        </p:nvSpPr>
-        <p:spPr>
-          <a:xfrm>
-            <a:off x="8979408" y="2267712"/>
-            <a:ext cx="201168" cy="274320"/>
-          </a:xfrm>
-          <a:prstGeom prst="rect">
-            <a:avLst/>
-          </a:prstGeom>
-          <a:noFill/>
-        </p:spPr>
-        <p:txBody>
-          <a:bodyPr wrap="square" lIns="0" rIns="0" tIns="0" bIns="0">
-            <a:spAutoFit/>
-          </a:bodyPr>
-          <a:lstStyle/>
-          <a:p>
-            <a:pPr>
-              <a:spcAft>
-                <a:spcPts val="800"/>
-              </a:spcAft>
-              <a:defRPr sz="1400" b="1">
-                <a:solidFill>
-                  <a:srgbClr val="24685E"/>
-                </a:solidFill>
-                <a:latin typeface="Noto Sans CJK JP"/>
-              </a:defRPr>
-            </a:pPr>
-            <a:r>
-              <a:t>•</a:t>
-            </a:r>
-          </a:p>
-        </p:txBody>
-      </p:sp>
-      <p:sp>
-        <p:nvSpPr>
-          <p:cNvPr id="23" name="TextBox 22"/>
-          <p:cNvSpPr txBox="1"/>
-          <p:nvPr/>
-        </p:nvSpPr>
-        <p:spPr>
-          <a:xfrm>
-            <a:off x="9217152" y="2267712"/>
-            <a:ext cx="2185415" cy="832103"/>
-          </a:xfrm>
-          <a:prstGeom prst="rect">
-            <a:avLst/>
-          </a:prstGeom>
-          <a:noFill/>
-        </p:spPr>
-        <p:txBody>
-          <a:bodyPr wrap="square" lIns="0" rIns="0" tIns="0" bIns="0">
-            <a:spAutoFit/>
-          </a:bodyPr>
-          <a:lstStyle/>
-          <a:p>
-            <a:pPr>
-              <a:spcAft>
-                <a:spcPts val="800"/>
-              </a:spcAft>
-              <a:defRPr sz="1400" b="0">
+          <p:cNvPr id="17" name="TextBox 16"/>
+          <p:cNvSpPr txBox="1"/>
+          <p:nvPr/>
+        </p:nvSpPr>
+        <p:spPr>
+          <a:xfrm>
+            <a:off x="9390888" y="2578608"/>
+            <a:ext cx="2002536" cy="1737360"/>
+          </a:xfrm>
+          <a:prstGeom prst="rect">
+            <a:avLst/>
+          </a:prstGeom>
+          <a:noFill/>
+        </p:spPr>
+        <p:txBody>
+          <a:bodyPr wrap="square" lIns="0" rIns="0" tIns="0" bIns="0">
+            <a:spAutoFit/>
+          </a:bodyPr>
+          <a:lstStyle/>
+          <a:p>
+            <a:pPr>
+              <a:spcAft>
+                <a:spcPts val="800"/>
+              </a:spcAft>
+              <a:defRPr sz="1700" b="0">
                 <a:solidFill>
                   <a:srgbClr val="173E3C"/>
                 </a:solidFill>
@@ -6598,77 +5595,15 @@
               </a:defRPr>
             </a:pPr>
             <a:r>
-              <a:t>丸みと凹凸でもこもこ感を表現</a:t>
-            </a:r>
-          </a:p>
-        </p:txBody>
-      </p:sp>
-      <p:sp>
-        <p:nvSpPr>
-          <p:cNvPr id="24" name="TextBox 23"/>
-          <p:cNvSpPr txBox="1"/>
-          <p:nvPr/>
-        </p:nvSpPr>
-        <p:spPr>
-          <a:xfrm>
-            <a:off x="8979408" y="3136391"/>
-            <a:ext cx="201168" cy="274320"/>
-          </a:xfrm>
-          <a:prstGeom prst="rect">
-            <a:avLst/>
-          </a:prstGeom>
-          <a:noFill/>
-        </p:spPr>
-        <p:txBody>
-          <a:bodyPr wrap="square" lIns="0" rIns="0" tIns="0" bIns="0">
-            <a:spAutoFit/>
-          </a:bodyPr>
-          <a:lstStyle/>
-          <a:p>
-            <a:pPr>
-              <a:spcAft>
-                <a:spcPts val="800"/>
-              </a:spcAft>
-              <a:defRPr sz="1400" b="1">
-                <a:solidFill>
-                  <a:srgbClr val="24685E"/>
-                </a:solidFill>
-                <a:latin typeface="Noto Sans CJK JP"/>
-              </a:defRPr>
-            </a:pPr>
-            <a:r>
-              <a:t>•</a:t>
-            </a:r>
-          </a:p>
-        </p:txBody>
-      </p:sp>
-      <p:sp>
-        <p:nvSpPr>
-          <p:cNvPr id="25" name="TextBox 24"/>
-          <p:cNvSpPr txBox="1"/>
-          <p:nvPr/>
-        </p:nvSpPr>
-        <p:spPr>
-          <a:xfrm>
-            <a:off x="9217152" y="3136391"/>
-            <a:ext cx="2185415" cy="832103"/>
-          </a:xfrm>
-          <a:prstGeom prst="rect">
-            <a:avLst/>
-          </a:prstGeom>
-          <a:noFill/>
-        </p:spPr>
-        <p:txBody>
-          <a:bodyPr wrap="square" lIns="0" rIns="0" tIns="0" bIns="0">
-            <a:spAutoFit/>
-          </a:bodyPr>
-          <a:lstStyle/>
-          <a:p>
-            <a:pPr>
-              <a:spcAft>
-                <a:spcPts val="800"/>
-              </a:spcAft>
-              <a:defRPr sz="1400" b="0">
+              <a:t>白く、ふんわりした質感の</a:t>
+            </a:r>
+          </a:p>
+          <a:p>
+            <a:pPr>
+              <a:spcAft>
+                <a:spcPts val="800"/>
+              </a:spcAft>
+              <a:defRPr sz="1700" b="0">
                 <a:solidFill>
                   <a:srgbClr val="173E3C"/>
                 </a:solidFill>
@@ -6676,99 +5611,21 @@
               </a:defRPr>
             </a:pPr>
             <a:r>
-              <a:t>位置・回転・大きさを調整可能に</a:t>
-            </a:r>
-          </a:p>
-        </p:txBody>
-      </p:sp>
-      <p:sp>
-        <p:nvSpPr>
-          <p:cNvPr id="26" name="TextBox 25"/>
-          <p:cNvSpPr txBox="1"/>
-          <p:nvPr/>
-        </p:nvSpPr>
-        <p:spPr>
-          <a:xfrm>
-            <a:off x="8979408" y="4005072"/>
-            <a:ext cx="201168" cy="274320"/>
-          </a:xfrm>
-          <a:prstGeom prst="rect">
-            <a:avLst/>
-          </a:prstGeom>
-          <a:noFill/>
-        </p:spPr>
-        <p:txBody>
-          <a:bodyPr wrap="square" lIns="0" rIns="0" tIns="0" bIns="0">
-            <a:spAutoFit/>
-          </a:bodyPr>
-          <a:lstStyle/>
-          <a:p>
-            <a:pPr>
-              <a:spcAft>
-                <a:spcPts val="800"/>
-              </a:spcAft>
-              <a:defRPr sz="1400" b="1">
-                <a:solidFill>
-                  <a:srgbClr val="24685E"/>
-                </a:solidFill>
-                <a:latin typeface="Noto Sans CJK JP"/>
-              </a:defRPr>
-            </a:pPr>
-            <a:r>
-              <a:t>•</a:t>
-            </a:r>
-          </a:p>
-        </p:txBody>
-      </p:sp>
-      <p:sp>
-        <p:nvSpPr>
-          <p:cNvPr id="27" name="TextBox 26"/>
-          <p:cNvSpPr txBox="1"/>
-          <p:nvPr/>
-        </p:nvSpPr>
-        <p:spPr>
-          <a:xfrm>
-            <a:off x="9217152" y="4005072"/>
-            <a:ext cx="2185415" cy="832103"/>
-          </a:xfrm>
-          <a:prstGeom prst="rect">
-            <a:avLst/>
-          </a:prstGeom>
-          <a:noFill/>
-        </p:spPr>
-        <p:txBody>
-          <a:bodyPr wrap="square" lIns="0" rIns="0" tIns="0" bIns="0">
-            <a:spAutoFit/>
-          </a:bodyPr>
-          <a:lstStyle/>
-          <a:p>
-            <a:pPr>
-              <a:spcAft>
-                <a:spcPts val="800"/>
-              </a:spcAft>
-              <a:defRPr sz="1400" b="0">
-                <a:solidFill>
-                  <a:srgbClr val="173E3C"/>
-                </a:solidFill>
-                <a:latin typeface="Noto Sans CJK JP"/>
-              </a:defRPr>
-            </a:pPr>
-            <a:r>
-              <a:t>結び目・装飾・耳周りはラフで確認</a:t>
-            </a:r>
-          </a:p>
-        </p:txBody>
-      </p:sp>
-      <p:sp>
-        <p:nvSpPr>
-          <p:cNvPr id="28" name="TextBox 27"/>
-          <p:cNvSpPr txBox="1"/>
-          <p:nvPr/>
-        </p:nvSpPr>
-        <p:spPr>
-          <a:xfrm>
-            <a:off x="6483096" y="5330952"/>
-            <a:ext cx="4983480" cy="274320"/>
+              <a:t>頭に巻くターバン。</a:t>
+            </a:r>
+          </a:p>
+        </p:txBody>
+      </p:sp>
+      <p:sp>
+        <p:nvSpPr>
+          <p:cNvPr id="18" name="TextBox 17"/>
+          <p:cNvSpPr txBox="1"/>
+          <p:nvPr/>
+        </p:nvSpPr>
+        <p:spPr>
+          <a:xfrm>
+            <a:off x="6483096" y="5687568"/>
+            <a:ext cx="4800600" cy="274320"/>
           </a:xfrm>
           <a:prstGeom prst="rect">
             <a:avLst/>
@@ -6793,46 +5650,7 @@
               </a:defRPr>
             </a:pPr>
             <a:r>
-              <a:t>制作イメージ（AI生成）／完成仕様はラフ承認で確定</a:t>
-            </a:r>
-          </a:p>
-        </p:txBody>
-      </p:sp>
-      <p:sp>
-        <p:nvSpPr>
-          <p:cNvPr id="29" name="TextBox 28"/>
-          <p:cNvSpPr txBox="1"/>
-          <p:nvPr/>
-        </p:nvSpPr>
-        <p:spPr>
-          <a:xfrm>
-            <a:off x="585216" y="6080760"/>
-            <a:ext cx="10972800" cy="210312"/>
-          </a:xfrm>
-          <a:prstGeom prst="rect">
-            <a:avLst/>
-          </a:prstGeom>
-          <a:noFill/>
-        </p:spPr>
-        <p:txBody>
-          <a:bodyPr wrap="square" lIns="0" rIns="0" tIns="0" bIns="0">
-            <a:spAutoFit/>
-          </a:bodyPr>
-          <a:lstStyle/>
-          <a:p>
-            <a:pPr>
-              <a:spcAft>
-                <a:spcPts val="800"/>
-              </a:spcAft>
-              <a:defRPr sz="1100" b="0">
-                <a:solidFill>
-                  <a:srgbClr val="61716B"/>
-                </a:solidFill>
-                <a:latin typeface="Noto Sans CJK JP"/>
-              </a:defRPr>
-            </a:pPr>
-            <a:r>
-              <a:t>要確認：頭部小物のアバター別調整範囲／重ね着／着脱メニュー／アヒルの揺れ</a:t>
+              <a:t>参考イメージ（AI生成）</a:t>
             </a:r>
           </a:p>
         </p:txBody>
@@ -6979,7 +5797,7 @@
               </a:defRPr>
             </a:pPr>
             <a:r>
-              <a:t>キュウリの目パック｜左右を個別調整</a:t>
+              <a:t>キュウリの目パック</a:t>
             </a:r>
           </a:p>
         </p:txBody>
@@ -7018,7 +5836,7 @@
               </a:defRPr>
             </a:pPr>
             <a:r>
-              <a:t>輪切りの断面と厚みを表現し、顔周りのフィット感を確認します。</a:t>
+              <a:t>輪切りのキュウリを、左右の目に1枚ずつ載せる小物です。</a:t>
             </a:r>
           </a:p>
         </p:txBody>
@@ -7100,7 +5918,7 @@
               </a:defRPr>
             </a:pPr>
             <a:r>
-              <a:t>アース製薬 企業ブース｜3Dお風呂セット 制作発注資料｜仕様確認用 v0.3</a:t>
+              <a:t>アース製薬 企業ブース｜3Dお風呂セット 制作発注資料｜制作内容 v0.4</a:t>
             </a:r>
           </a:p>
         </p:txBody>
@@ -7161,8 +5979,8 @@
         </p:blipFill>
         <p:spPr>
           <a:xfrm>
-            <a:off x="594360" y="1874519"/>
-            <a:ext cx="4160520" cy="4160520"/>
+            <a:off x="621792" y="1874519"/>
+            <a:ext cx="4206240" cy="4206240"/>
           </a:xfrm>
           <a:prstGeom prst="rect">
             <a:avLst/>
@@ -7177,8 +5995,8 @@
         </p:nvSpPr>
         <p:spPr>
           <a:xfrm>
-            <a:off x="594360" y="6108192"/>
-            <a:ext cx="4663440" cy="274320"/>
+            <a:off x="621792" y="6153912"/>
+            <a:ext cx="4389120" cy="274320"/>
           </a:xfrm>
           <a:prstGeom prst="rect">
             <a:avLst/>
@@ -7203,7 +6021,7 @@
               </a:defRPr>
             </a:pPr>
             <a:r>
-              <a:t>制作イメージ（AI生成）／完成仕様はラフ承認で確定</a:t>
+              <a:t>参考イメージ（AI生成）</a:t>
             </a:r>
           </a:p>
         </p:txBody>
@@ -7216,25 +6034,25 @@
         </p:nvSpPr>
         <p:spPr>
           <a:xfrm>
-            <a:off x="5303520" y="1993392"/>
-            <a:ext cx="5760720" cy="457200"/>
-          </a:xfrm>
-          <a:prstGeom prst="rect">
-            <a:avLst/>
-          </a:prstGeom>
-          <a:noFill/>
-        </p:spPr>
-        <p:txBody>
-          <a:bodyPr wrap="square" lIns="0" rIns="0" tIns="0" bIns="0">
-            <a:spAutoFit/>
-          </a:bodyPr>
-          <a:lstStyle/>
-          <a:p>
-            <a:pPr>
-              <a:spcAft>
-                <a:spcPts val="800"/>
-              </a:spcAft>
-              <a:defRPr sz="2200" b="1">
+            <a:off x="5349240" y="2395728"/>
+            <a:ext cx="5669280" cy="457200"/>
+          </a:xfrm>
+          <a:prstGeom prst="rect">
+            <a:avLst/>
+          </a:prstGeom>
+          <a:noFill/>
+        </p:spPr>
+        <p:txBody>
+          <a:bodyPr wrap="square" lIns="0" rIns="0" tIns="0" bIns="0">
+            <a:spAutoFit/>
+          </a:bodyPr>
+          <a:lstStyle/>
+          <a:p>
+            <a:pPr>
+              <a:spcAft>
+                <a:spcPts val="800"/>
+              </a:spcAft>
+              <a:defRPr sz="2300" b="1">
                 <a:solidFill>
                   <a:srgbClr val="173E3C"/>
                 </a:solidFill>
@@ -7242,7 +6060,7 @@
               </a:defRPr>
             </a:pPr>
             <a:r>
-              <a:t>制作仕様</a:t>
+              <a:t>制作する形</a:t>
             </a:r>
           </a:p>
         </p:txBody>
@@ -7255,64 +6073,25 @@
         </p:nvSpPr>
         <p:spPr>
           <a:xfrm>
-            <a:off x="5303520" y="2697480"/>
-            <a:ext cx="201168" cy="274320"/>
-          </a:xfrm>
-          <a:prstGeom prst="rect">
-            <a:avLst/>
-          </a:prstGeom>
-          <a:noFill/>
-        </p:spPr>
-        <p:txBody>
-          <a:bodyPr wrap="square" lIns="0" rIns="0" tIns="0" bIns="0">
-            <a:spAutoFit/>
-          </a:bodyPr>
-          <a:lstStyle/>
-          <a:p>
-            <a:pPr>
-              <a:spcAft>
-                <a:spcPts val="800"/>
-              </a:spcAft>
-              <a:defRPr sz="1800" b="1">
-                <a:solidFill>
-                  <a:srgbClr val="24685E"/>
-                </a:solidFill>
-                <a:latin typeface="Noto Sans CJK JP"/>
-              </a:defRPr>
-            </a:pPr>
-            <a:r>
-              <a:t>•</a:t>
-            </a:r>
-          </a:p>
-        </p:txBody>
-      </p:sp>
-      <p:sp>
-        <p:nvSpPr>
-          <p:cNvPr id="13" name="TextBox 12"/>
-          <p:cNvSpPr txBox="1"/>
-          <p:nvPr/>
-        </p:nvSpPr>
-        <p:spPr>
-          <a:xfrm>
-            <a:off x="5541264" y="2697480"/>
-            <a:ext cx="5431536" cy="576072"/>
-          </a:xfrm>
-          <a:prstGeom prst="rect">
-            <a:avLst/>
-          </a:prstGeom>
-          <a:noFill/>
-        </p:spPr>
-        <p:txBody>
-          <a:bodyPr wrap="square" lIns="0" rIns="0" tIns="0" bIns="0">
-            <a:spAutoFit/>
-          </a:bodyPr>
-          <a:lstStyle/>
-          <a:p>
-            <a:pPr>
-              <a:spcAft>
-                <a:spcPts val="800"/>
-              </a:spcAft>
-              <a:defRPr sz="1800" b="0">
+            <a:off x="5367528" y="3182112"/>
+            <a:ext cx="5577840" cy="1143000"/>
+          </a:xfrm>
+          <a:prstGeom prst="rect">
+            <a:avLst/>
+          </a:prstGeom>
+          <a:noFill/>
+        </p:spPr>
+        <p:txBody>
+          <a:bodyPr wrap="square" lIns="0" rIns="0" tIns="0" bIns="0">
+            <a:spAutoFit/>
+          </a:bodyPr>
+          <a:lstStyle/>
+          <a:p>
+            <a:pPr>
+              <a:spcAft>
+                <a:spcPts val="800"/>
+              </a:spcAft>
+              <a:defRPr sz="2200" b="0">
                 <a:solidFill>
                   <a:srgbClr val="173E3C"/>
                 </a:solidFill>
@@ -7320,77 +6099,15 @@
               </a:defRPr>
             </a:pPr>
             <a:r>
-              <a:t>皮・果肉・種が識別できる意匠</a:t>
-            </a:r>
-          </a:p>
-        </p:txBody>
-      </p:sp>
-      <p:sp>
-        <p:nvSpPr>
-          <p:cNvPr id="14" name="TextBox 13"/>
-          <p:cNvSpPr txBox="1"/>
-          <p:nvPr/>
-        </p:nvSpPr>
-        <p:spPr>
-          <a:xfrm>
-            <a:off x="5303520" y="3310128"/>
-            <a:ext cx="201168" cy="274320"/>
-          </a:xfrm>
-          <a:prstGeom prst="rect">
-            <a:avLst/>
-          </a:prstGeom>
-          <a:noFill/>
-        </p:spPr>
-        <p:txBody>
-          <a:bodyPr wrap="square" lIns="0" rIns="0" tIns="0" bIns="0">
-            <a:spAutoFit/>
-          </a:bodyPr>
-          <a:lstStyle/>
-          <a:p>
-            <a:pPr>
-              <a:spcAft>
-                <a:spcPts val="800"/>
-              </a:spcAft>
-              <a:defRPr sz="1800" b="1">
-                <a:solidFill>
-                  <a:srgbClr val="24685E"/>
-                </a:solidFill>
-                <a:latin typeface="Noto Sans CJK JP"/>
-              </a:defRPr>
-            </a:pPr>
-            <a:r>
-              <a:t>•</a:t>
-            </a:r>
-          </a:p>
-        </p:txBody>
-      </p:sp>
-      <p:sp>
-        <p:nvSpPr>
-          <p:cNvPr id="15" name="TextBox 14"/>
-          <p:cNvSpPr txBox="1"/>
-          <p:nvPr/>
-        </p:nvSpPr>
-        <p:spPr>
-          <a:xfrm>
-            <a:off x="5541264" y="3310128"/>
-            <a:ext cx="5431536" cy="576072"/>
-          </a:xfrm>
-          <a:prstGeom prst="rect">
-            <a:avLst/>
-          </a:prstGeom>
-          <a:noFill/>
-        </p:spPr>
-        <p:txBody>
-          <a:bodyPr wrap="square" lIns="0" rIns="0" tIns="0" bIns="0">
-            <a:spAutoFit/>
-          </a:bodyPr>
-          <a:lstStyle/>
-          <a:p>
-            <a:pPr>
-              <a:spcAft>
-                <a:spcPts val="800"/>
-              </a:spcAft>
-              <a:defRPr sz="1800" b="0">
+              <a:t>緑の皮と淡い果肉が分かる、</a:t>
+            </a:r>
+          </a:p>
+          <a:p>
+            <a:pPr>
+              <a:spcAft>
+                <a:spcPts val="800"/>
+              </a:spcAft>
+              <a:defRPr sz="2200" b="0">
                 <a:solidFill>
                   <a:srgbClr val="173E3C"/>
                 </a:solidFill>
@@ -7398,177 +6115,21 @@
               </a:defRPr>
             </a:pPr>
             <a:r>
-              <a:t>左右を別々に位置・角度・サイズ調整</a:t>
-            </a:r>
-          </a:p>
-        </p:txBody>
-      </p:sp>
-      <p:sp>
-        <p:nvSpPr>
-          <p:cNvPr id="16" name="TextBox 15"/>
-          <p:cNvSpPr txBox="1"/>
-          <p:nvPr/>
-        </p:nvSpPr>
-        <p:spPr>
-          <a:xfrm>
-            <a:off x="5303520" y="3922776"/>
-            <a:ext cx="201168" cy="274320"/>
-          </a:xfrm>
-          <a:prstGeom prst="rect">
-            <a:avLst/>
-          </a:prstGeom>
-          <a:noFill/>
-        </p:spPr>
-        <p:txBody>
-          <a:bodyPr wrap="square" lIns="0" rIns="0" tIns="0" bIns="0">
-            <a:spAutoFit/>
-          </a:bodyPr>
-          <a:lstStyle/>
-          <a:p>
-            <a:pPr>
-              <a:spcAft>
-                <a:spcPts val="800"/>
-              </a:spcAft>
-              <a:defRPr sz="1800" b="1">
-                <a:solidFill>
-                  <a:srgbClr val="24685E"/>
-                </a:solidFill>
-                <a:latin typeface="Noto Sans CJK JP"/>
-              </a:defRPr>
-            </a:pPr>
-            <a:r>
-              <a:t>•</a:t>
-            </a:r>
-          </a:p>
-        </p:txBody>
-      </p:sp>
-      <p:sp>
-        <p:nvSpPr>
-          <p:cNvPr id="17" name="TextBox 16"/>
-          <p:cNvSpPr txBox="1"/>
-          <p:nvPr/>
-        </p:nvSpPr>
-        <p:spPr>
-          <a:xfrm>
-            <a:off x="5541264" y="3922776"/>
-            <a:ext cx="5431536" cy="576072"/>
-          </a:xfrm>
-          <a:prstGeom prst="rect">
-            <a:avLst/>
-          </a:prstGeom>
-          <a:noFill/>
-        </p:spPr>
-        <p:txBody>
-          <a:bodyPr wrap="square" lIns="0" rIns="0" tIns="0" bIns="0">
-            <a:spAutoFit/>
-          </a:bodyPr>
-          <a:lstStyle/>
-          <a:p>
-            <a:pPr>
-              <a:spcAft>
-                <a:spcPts val="800"/>
-              </a:spcAft>
-              <a:defRPr sz="1800" b="0">
-                <a:solidFill>
-                  <a:srgbClr val="173E3C"/>
-                </a:solidFill>
-                <a:latin typeface="Noto Sans CJK JP"/>
-              </a:defRPr>
-            </a:pPr>
-            <a:r>
-              <a:t>顔への埋まりや過度な浮きを防ぐ</a:t>
-            </a:r>
-          </a:p>
-        </p:txBody>
-      </p:sp>
-      <p:sp>
-        <p:nvSpPr>
-          <p:cNvPr id="18" name="TextBox 17"/>
-          <p:cNvSpPr txBox="1"/>
-          <p:nvPr/>
-        </p:nvSpPr>
-        <p:spPr>
-          <a:xfrm>
-            <a:off x="5303520" y="4535424"/>
-            <a:ext cx="201168" cy="274320"/>
-          </a:xfrm>
-          <a:prstGeom prst="rect">
-            <a:avLst/>
-          </a:prstGeom>
-          <a:noFill/>
-        </p:spPr>
-        <p:txBody>
-          <a:bodyPr wrap="square" lIns="0" rIns="0" tIns="0" bIns="0">
-            <a:spAutoFit/>
-          </a:bodyPr>
-          <a:lstStyle/>
-          <a:p>
-            <a:pPr>
-              <a:spcAft>
-                <a:spcPts val="800"/>
-              </a:spcAft>
-              <a:defRPr sz="1800" b="1">
-                <a:solidFill>
-                  <a:srgbClr val="24685E"/>
-                </a:solidFill>
-                <a:latin typeface="Noto Sans CJK JP"/>
-              </a:defRPr>
-            </a:pPr>
-            <a:r>
-              <a:t>•</a:t>
-            </a:r>
-          </a:p>
-        </p:txBody>
-      </p:sp>
-      <p:sp>
-        <p:nvSpPr>
-          <p:cNvPr id="19" name="TextBox 18"/>
-          <p:cNvSpPr txBox="1"/>
-          <p:nvPr/>
-        </p:nvSpPr>
-        <p:spPr>
-          <a:xfrm>
-            <a:off x="5541264" y="4535424"/>
-            <a:ext cx="5431536" cy="576072"/>
-          </a:xfrm>
-          <a:prstGeom prst="rect">
-            <a:avLst/>
-          </a:prstGeom>
-          <a:noFill/>
-        </p:spPr>
-        <p:txBody>
-          <a:bodyPr wrap="square" lIns="0" rIns="0" tIns="0" bIns="0">
-            <a:spAutoFit/>
-          </a:bodyPr>
-          <a:lstStyle/>
-          <a:p>
-            <a:pPr>
-              <a:spcAft>
-                <a:spcPts val="800"/>
-              </a:spcAft>
-              <a:defRPr sz="1800" b="0">
-                <a:solidFill>
-                  <a:srgbClr val="173E3C"/>
-                </a:solidFill>
-                <a:latin typeface="Noto Sans CJK JP"/>
-              </a:defRPr>
-            </a:pPr>
-            <a:r>
-              <a:t>視界・カメラへの映り込みを確認</a:t>
-            </a:r>
-          </a:p>
-        </p:txBody>
-      </p:sp>
-      <p:sp>
-        <p:nvSpPr>
-          <p:cNvPr id="20" name="Rounded Rectangle 19"/>
+              <a:t>厚みのある輪切りキュウリ2枚。</a:t>
+            </a:r>
+          </a:p>
+        </p:txBody>
+      </p:sp>
+      <p:sp>
+        <p:nvSpPr>
+          <p:cNvPr id="13" name="Rounded Rectangle 12"/>
           <p:cNvSpPr/>
           <p:nvPr/>
         </p:nvSpPr>
         <p:spPr>
           <a:xfrm>
-            <a:off x="5285232" y="5422392"/>
-            <a:ext cx="5806440" cy="649224"/>
+            <a:off x="5340096" y="4974336"/>
+            <a:ext cx="5669280" cy="749808"/>
           </a:xfrm>
           <a:prstGeom prst="roundRect">
             <a:avLst>
@@ -7606,31 +6167,31 @@
       </p:sp>
       <p:sp>
         <p:nvSpPr>
-          <p:cNvPr id="21" name="TextBox 20"/>
-          <p:cNvSpPr txBox="1"/>
-          <p:nvPr/>
-        </p:nvSpPr>
-        <p:spPr>
-          <a:xfrm>
-            <a:off x="5486400" y="5568696"/>
-            <a:ext cx="5440680" cy="411480"/>
-          </a:xfrm>
-          <a:prstGeom prst="rect">
-            <a:avLst/>
-          </a:prstGeom>
-          <a:noFill/>
-        </p:spPr>
-        <p:txBody>
-          <a:bodyPr wrap="square" lIns="0" rIns="0" tIns="0" bIns="0">
-            <a:spAutoFit/>
-          </a:bodyPr>
-          <a:lstStyle/>
-          <a:p>
-            <a:pPr>
-              <a:spcAft>
-                <a:spcPts val="800"/>
-              </a:spcAft>
-              <a:defRPr sz="1300" b="1">
+          <p:cNvPr id="14" name="TextBox 13"/>
+          <p:cNvSpPr txBox="1"/>
+          <p:nvPr/>
+        </p:nvSpPr>
+        <p:spPr>
+          <a:xfrm>
+            <a:off x="5577840" y="5175504"/>
+            <a:ext cx="5212080" cy="365760"/>
+          </a:xfrm>
+          <a:prstGeom prst="rect">
+            <a:avLst/>
+          </a:prstGeom>
+          <a:noFill/>
+        </p:spPr>
+        <p:txBody>
+          <a:bodyPr wrap="square" lIns="0" rIns="0" tIns="0" bIns="0">
+            <a:spAutoFit/>
+          </a:bodyPr>
+          <a:lstStyle/>
+          <a:p>
+            <a:pPr>
+              <a:spcAft>
+                <a:spcPts val="800"/>
+              </a:spcAft>
+              <a:defRPr sz="1900" b="1">
                 <a:solidFill>
                   <a:srgbClr val="24685E"/>
                 </a:solidFill>
@@ -7638,7 +6199,7 @@
               </a:defRPr>
             </a:pPr>
             <a:r>
-              <a:t>表情追従・まばたき連動・着脱機能は要確認</a:t>
+              <a:t>表情追従は付けません。</a:t>
             </a:r>
           </a:p>
         </p:txBody>
@@ -7746,7 +6307,7 @@
               </a:defRPr>
             </a:pPr>
             <a:r>
-              <a:t>04 / WEARABLE BATH TOWEL</a:t>
+              <a:t>04 / BATH TOWEL</a:t>
             </a:r>
           </a:p>
         </p:txBody>
@@ -7785,7 +6346,7 @@
               </a:defRPr>
             </a:pPr>
             <a:r>
-              <a:t>バスタオル｜2種類の着用タイプを基本案に</a:t>
+              <a:t>バスタオル｜身体に巻く着用品</a:t>
             </a:r>
           </a:p>
         </p:txBody>
@@ -7824,7 +6385,7 @@
               </a:defRPr>
             </a:pPr>
             <a:r>
-              <a:t>丈・被覆範囲・巻き合わせは、正面／側面／背面のラフで承認します。</a:t>
+              <a:t>胸元を覆うタイプと、腰に巻くタイプの2種類を基本案とします。</a:t>
             </a:r>
           </a:p>
         </p:txBody>
@@ -7906,7 +6467,7 @@
               </a:defRPr>
             </a:pPr>
             <a:r>
-              <a:t>アース製薬 企業ブース｜3Dお風呂セット 制作発注資料｜仕様確認用 v0.3</a:t>
+              <a:t>アース製薬 企業ブース｜3Dお風呂セット 制作発注資料｜制作内容 v0.4</a:t>
             </a:r>
           </a:p>
         </p:txBody>
@@ -7967,7 +6528,7 @@
         </p:blipFill>
         <p:spPr>
           <a:xfrm>
-            <a:off x="594360" y="1874519"/>
+            <a:off x="621792" y="1874519"/>
             <a:ext cx="4206240" cy="4206240"/>
           </a:xfrm>
           <a:prstGeom prst="rect">
@@ -7983,8 +6544,8 @@
         </p:nvSpPr>
         <p:spPr>
           <a:xfrm>
-            <a:off x="594360" y="6153912"/>
-            <a:ext cx="4572000" cy="274320"/>
+            <a:off x="621792" y="6153912"/>
+            <a:ext cx="4389120" cy="274320"/>
           </a:xfrm>
           <a:prstGeom prst="rect">
             <a:avLst/>
@@ -8009,7 +6570,7 @@
               </a:defRPr>
             </a:pPr>
             <a:r>
-              <a:t>制作イメージ（AI生成）／完成仕様はラフ承認で確定</a:t>
+              <a:t>参考イメージ（AI生成）</a:t>
             </a:r>
           </a:p>
         </p:txBody>
@@ -8022,8 +6583,8 @@
         </p:nvSpPr>
         <p:spPr>
           <a:xfrm>
-            <a:off x="5239512" y="1901952"/>
-            <a:ext cx="2862072" cy="1490472"/>
+            <a:off x="5285232" y="2167128"/>
+            <a:ext cx="5742432" cy="1517904"/>
           </a:xfrm>
           <a:prstGeom prst="roundRect">
             <a:avLst>
@@ -8067,8 +6628,8 @@
         </p:nvSpPr>
         <p:spPr>
           <a:xfrm>
-            <a:off x="5440680" y="2084832"/>
-            <a:ext cx="2459736" cy="365760"/>
+            <a:off x="5486400" y="2350008"/>
+            <a:ext cx="5340096" cy="365760"/>
           </a:xfrm>
           <a:prstGeom prst="rect">
             <a:avLst/>
@@ -8106,8 +6667,8 @@
         </p:nvSpPr>
         <p:spPr>
           <a:xfrm>
-            <a:off x="5440680" y="2606040"/>
-            <a:ext cx="2459736" cy="713231"/>
+            <a:off x="5486400" y="2871216"/>
+            <a:ext cx="5340096" cy="740664"/>
           </a:xfrm>
           <a:prstGeom prst="rect">
             <a:avLst/>
@@ -8132,23 +6693,7 @@
               </a:defRPr>
             </a:pPr>
             <a:r>
-              <a:t>胸元から身体を覆う</a:t>
-            </a:r>
-          </a:p>
-          <a:p>
-            <a:pPr>
-              <a:spcAft>
-                <a:spcPts val="800"/>
-              </a:spcAft>
-              <a:defRPr sz="1400" b="0">
-                <a:solidFill>
-                  <a:srgbClr val="173E3C"/>
-                </a:solidFill>
-                <a:latin typeface="Noto Sans CJK JP"/>
-              </a:defRPr>
-            </a:pPr>
-            <a:r>
-              <a:t>脇・背面・裾も重点確認</a:t>
+              <a:t>胸元から身体を覆う、白い巻きタオル。</a:t>
             </a:r>
           </a:p>
         </p:txBody>
@@ -8161,8 +6706,8 @@
         </p:nvSpPr>
         <p:spPr>
           <a:xfrm>
-            <a:off x="8257031" y="1901952"/>
-            <a:ext cx="2862072" cy="1490472"/>
+            <a:off x="5285232" y="3913632"/>
+            <a:ext cx="5742432" cy="1517904"/>
           </a:xfrm>
           <a:prstGeom prst="roundRect">
             <a:avLst>
@@ -8206,8 +6751,8 @@
         </p:nvSpPr>
         <p:spPr>
           <a:xfrm>
-            <a:off x="8458200" y="2084832"/>
-            <a:ext cx="2459736" cy="365760"/>
+            <a:off x="5486400" y="4096512"/>
+            <a:ext cx="5340096" cy="365760"/>
           </a:xfrm>
           <a:prstGeom prst="rect">
             <a:avLst/>
@@ -8245,8 +6790,8 @@
         </p:nvSpPr>
         <p:spPr>
           <a:xfrm>
-            <a:off x="8458200" y="2606040"/>
-            <a:ext cx="2459736" cy="713231"/>
+            <a:off x="5486400" y="4617720"/>
+            <a:ext cx="5340096" cy="740664"/>
           </a:xfrm>
           <a:prstGeom prst="rect">
             <a:avLst/>
@@ -8271,23 +6816,7 @@
               </a:defRPr>
             </a:pPr>
             <a:r>
-              <a:t>腰から下を覆う</a:t>
-            </a:r>
-          </a:p>
-          <a:p>
-            <a:pPr>
-              <a:spcAft>
-                <a:spcPts val="800"/>
-              </a:spcAft>
-              <a:defRPr sz="1400" b="0">
-                <a:solidFill>
-                  <a:srgbClr val="173E3C"/>
-                </a:solidFill>
-                <a:latin typeface="Noto Sans CJK JP"/>
-              </a:defRPr>
-            </a:pPr>
-            <a:r>
-              <a:t>腰回り・重なり・裾を確認</a:t>
+              <a:t>腰から下を覆う、白い巻きタオル。</a:t>
             </a:r>
           </a:p>
         </p:txBody>
@@ -8300,25 +6829,25 @@
         </p:nvSpPr>
         <p:spPr>
           <a:xfrm>
-            <a:off x="5303520" y="3703320"/>
-            <a:ext cx="201168" cy="274320"/>
-          </a:xfrm>
-          <a:prstGeom prst="rect">
-            <a:avLst/>
-          </a:prstGeom>
-          <a:noFill/>
-        </p:spPr>
-        <p:txBody>
-          <a:bodyPr wrap="square" lIns="0" rIns="0" tIns="0" bIns="0">
-            <a:spAutoFit/>
-          </a:bodyPr>
-          <a:lstStyle/>
-          <a:p>
-            <a:pPr>
-              <a:spcAft>
-                <a:spcPts val="800"/>
-              </a:spcAft>
-              <a:defRPr sz="1600" b="1">
+            <a:off x="5349240" y="5824728"/>
+            <a:ext cx="5577840" cy="365760"/>
+          </a:xfrm>
+          <a:prstGeom prst="rect">
+            <a:avLst/>
+          </a:prstGeom>
+          <a:noFill/>
+        </p:spPr>
+        <p:txBody>
+          <a:bodyPr wrap="square" lIns="0" rIns="0" tIns="0" bIns="0">
+            <a:spAutoFit/>
+          </a:bodyPr>
+          <a:lstStyle/>
+          <a:p>
+            <a:pPr>
+              <a:spcAft>
+                <a:spcPts val="800"/>
+              </a:spcAft>
+              <a:defRPr sz="1400" b="1">
                 <a:solidFill>
                   <a:srgbClr val="24685E"/>
                 </a:solidFill>
@@ -8326,319 +6855,7 @@
               </a:defRPr>
             </a:pPr>
             <a:r>
-              <a:t>•</a:t>
-            </a:r>
-          </a:p>
-        </p:txBody>
-      </p:sp>
-      <p:sp>
-        <p:nvSpPr>
-          <p:cNvPr id="18" name="TextBox 17"/>
-          <p:cNvSpPr txBox="1"/>
-          <p:nvPr/>
-        </p:nvSpPr>
-        <p:spPr>
-          <a:xfrm>
-            <a:off x="5541264" y="3703320"/>
-            <a:ext cx="5477256" cy="484631"/>
-          </a:xfrm>
-          <a:prstGeom prst="rect">
-            <a:avLst/>
-          </a:prstGeom>
-          <a:noFill/>
-        </p:spPr>
-        <p:txBody>
-          <a:bodyPr wrap="square" lIns="0" rIns="0" tIns="0" bIns="0">
-            <a:spAutoFit/>
-          </a:bodyPr>
-          <a:lstStyle/>
-          <a:p>
-            <a:pPr>
-              <a:spcAft>
-                <a:spcPts val="800"/>
-              </a:spcAft>
-              <a:defRPr sz="1600" b="0">
-                <a:solidFill>
-                  <a:srgbClr val="173E3C"/>
-                </a:solidFill>
-                <a:latin typeface="Noto Sans CJK JP"/>
-              </a:defRPr>
-            </a:pPr>
-            <a:r>
-              <a:t>タオルの縁・厚み・巻き重なりを表現</a:t>
-            </a:r>
-          </a:p>
-        </p:txBody>
-      </p:sp>
-      <p:sp>
-        <p:nvSpPr>
-          <p:cNvPr id="19" name="TextBox 18"/>
-          <p:cNvSpPr txBox="1"/>
-          <p:nvPr/>
-        </p:nvSpPr>
-        <p:spPr>
-          <a:xfrm>
-            <a:off x="5303520" y="4224528"/>
-            <a:ext cx="201168" cy="274320"/>
-          </a:xfrm>
-          <a:prstGeom prst="rect">
-            <a:avLst/>
-          </a:prstGeom>
-          <a:noFill/>
-        </p:spPr>
-        <p:txBody>
-          <a:bodyPr wrap="square" lIns="0" rIns="0" tIns="0" bIns="0">
-            <a:spAutoFit/>
-          </a:bodyPr>
-          <a:lstStyle/>
-          <a:p>
-            <a:pPr>
-              <a:spcAft>
-                <a:spcPts val="800"/>
-              </a:spcAft>
-              <a:defRPr sz="1600" b="1">
-                <a:solidFill>
-                  <a:srgbClr val="24685E"/>
-                </a:solidFill>
-                <a:latin typeface="Noto Sans CJK JP"/>
-              </a:defRPr>
-            </a:pPr>
-            <a:r>
-              <a:t>•</a:t>
-            </a:r>
-          </a:p>
-        </p:txBody>
-      </p:sp>
-      <p:sp>
-        <p:nvSpPr>
-          <p:cNvPr id="20" name="TextBox 19"/>
-          <p:cNvSpPr txBox="1"/>
-          <p:nvPr/>
-        </p:nvSpPr>
-        <p:spPr>
-          <a:xfrm>
-            <a:off x="5541264" y="4224528"/>
-            <a:ext cx="5477256" cy="484631"/>
-          </a:xfrm>
-          <a:prstGeom prst="rect">
-            <a:avLst/>
-          </a:prstGeom>
-          <a:noFill/>
-        </p:spPr>
-        <p:txBody>
-          <a:bodyPr wrap="square" lIns="0" rIns="0" tIns="0" bIns="0">
-            <a:spAutoFit/>
-          </a:bodyPr>
-          <a:lstStyle/>
-          <a:p>
-            <a:pPr>
-              <a:spcAft>
-                <a:spcPts val="800"/>
-              </a:spcAft>
-              <a:defRPr sz="1600" b="0">
-                <a:solidFill>
-                  <a:srgbClr val="173E3C"/>
-                </a:solidFill>
-                <a:latin typeface="Noto Sans CJK JP"/>
-              </a:defRPr>
-            </a:pPr>
-            <a:r>
-              <a:t>身体の動きに追従するウェイト調整</a:t>
-            </a:r>
-          </a:p>
-        </p:txBody>
-      </p:sp>
-      <p:sp>
-        <p:nvSpPr>
-          <p:cNvPr id="21" name="TextBox 20"/>
-          <p:cNvSpPr txBox="1"/>
-          <p:nvPr/>
-        </p:nvSpPr>
-        <p:spPr>
-          <a:xfrm>
-            <a:off x="5303520" y="4745736"/>
-            <a:ext cx="201168" cy="274320"/>
-          </a:xfrm>
-          <a:prstGeom prst="rect">
-            <a:avLst/>
-          </a:prstGeom>
-          <a:noFill/>
-        </p:spPr>
-        <p:txBody>
-          <a:bodyPr wrap="square" lIns="0" rIns="0" tIns="0" bIns="0">
-            <a:spAutoFit/>
-          </a:bodyPr>
-          <a:lstStyle/>
-          <a:p>
-            <a:pPr>
-              <a:spcAft>
-                <a:spcPts val="800"/>
-              </a:spcAft>
-              <a:defRPr sz="1600" b="1">
-                <a:solidFill>
-                  <a:srgbClr val="24685E"/>
-                </a:solidFill>
-                <a:latin typeface="Noto Sans CJK JP"/>
-              </a:defRPr>
-            </a:pPr>
-            <a:r>
-              <a:t>•</a:t>
-            </a:r>
-          </a:p>
-        </p:txBody>
-      </p:sp>
-      <p:sp>
-        <p:nvSpPr>
-          <p:cNvPr id="22" name="TextBox 21"/>
-          <p:cNvSpPr txBox="1"/>
-          <p:nvPr/>
-        </p:nvSpPr>
-        <p:spPr>
-          <a:xfrm>
-            <a:off x="5541264" y="4745736"/>
-            <a:ext cx="5477256" cy="484631"/>
-          </a:xfrm>
-          <a:prstGeom prst="rect">
-            <a:avLst/>
-          </a:prstGeom>
-          <a:noFill/>
-        </p:spPr>
-        <p:txBody>
-          <a:bodyPr wrap="square" lIns="0" rIns="0" tIns="0" bIns="0">
-            <a:spAutoFit/>
-          </a:bodyPr>
-          <a:lstStyle/>
-          <a:p>
-            <a:pPr>
-              <a:spcAft>
-                <a:spcPts val="800"/>
-              </a:spcAft>
-              <a:defRPr sz="1600" b="0">
-                <a:solidFill>
-                  <a:srgbClr val="173E3C"/>
-                </a:solidFill>
-                <a:latin typeface="Noto Sans CJK JP"/>
-              </a:defRPr>
-            </a:pPr>
-            <a:r>
-              <a:t>透けない表現を基本とし、被覆を保つ</a:t>
-            </a:r>
-          </a:p>
-        </p:txBody>
-      </p:sp>
-      <p:sp>
-        <p:nvSpPr>
-          <p:cNvPr id="23" name="TextBox 22"/>
-          <p:cNvSpPr txBox="1"/>
-          <p:nvPr/>
-        </p:nvSpPr>
-        <p:spPr>
-          <a:xfrm>
-            <a:off x="5303520" y="5266944"/>
-            <a:ext cx="201168" cy="274320"/>
-          </a:xfrm>
-          <a:prstGeom prst="rect">
-            <a:avLst/>
-          </a:prstGeom>
-          <a:noFill/>
-        </p:spPr>
-        <p:txBody>
-          <a:bodyPr wrap="square" lIns="0" rIns="0" tIns="0" bIns="0">
-            <a:spAutoFit/>
-          </a:bodyPr>
-          <a:lstStyle/>
-          <a:p>
-            <a:pPr>
-              <a:spcAft>
-                <a:spcPts val="800"/>
-              </a:spcAft>
-              <a:defRPr sz="1600" b="1">
-                <a:solidFill>
-                  <a:srgbClr val="24685E"/>
-                </a:solidFill>
-                <a:latin typeface="Noto Sans CJK JP"/>
-              </a:defRPr>
-            </a:pPr>
-            <a:r>
-              <a:t>•</a:t>
-            </a:r>
-          </a:p>
-        </p:txBody>
-      </p:sp>
-      <p:sp>
-        <p:nvSpPr>
-          <p:cNvPr id="24" name="TextBox 23"/>
-          <p:cNvSpPr txBox="1"/>
-          <p:nvPr/>
-        </p:nvSpPr>
-        <p:spPr>
-          <a:xfrm>
-            <a:off x="5541264" y="5266944"/>
-            <a:ext cx="5477256" cy="484631"/>
-          </a:xfrm>
-          <a:prstGeom prst="rect">
-            <a:avLst/>
-          </a:prstGeom>
-          <a:noFill/>
-        </p:spPr>
-        <p:txBody>
-          <a:bodyPr wrap="square" lIns="0" rIns="0" tIns="0" bIns="0">
-            <a:spAutoFit/>
-          </a:bodyPr>
-          <a:lstStyle/>
-          <a:p>
-            <a:pPr>
-              <a:spcAft>
-                <a:spcPts val="800"/>
-              </a:spcAft>
-              <a:defRPr sz="1600" b="0">
-                <a:solidFill>
-                  <a:srgbClr val="173E3C"/>
-                </a:solidFill>
-                <a:latin typeface="Noto Sans CJK JP"/>
-              </a:defRPr>
-            </a:pPr>
-            <a:r>
-              <a:t>必要な素体の非表示設定を手順書に記載</a:t>
-            </a:r>
-          </a:p>
-        </p:txBody>
-      </p:sp>
-      <p:sp>
-        <p:nvSpPr>
-          <p:cNvPr id="25" name="TextBox 24"/>
-          <p:cNvSpPr txBox="1"/>
-          <p:nvPr/>
-        </p:nvSpPr>
-        <p:spPr>
-          <a:xfrm>
-            <a:off x="5330952" y="5971032"/>
-            <a:ext cx="5760720" cy="274320"/>
-          </a:xfrm>
-          <a:prstGeom prst="rect">
-            <a:avLst/>
-          </a:prstGeom>
-          <a:noFill/>
-        </p:spPr>
-        <p:txBody>
-          <a:bodyPr wrap="square" lIns="0" rIns="0" tIns="0" bIns="0">
-            <a:spAutoFit/>
-          </a:bodyPr>
-          <a:lstStyle/>
-          <a:p>
-            <a:pPr>
-              <a:spcAft>
-                <a:spcPts val="800"/>
-              </a:spcAft>
-              <a:defRPr sz="1200" b="1">
-                <a:solidFill>
-                  <a:srgbClr val="24685E"/>
-                </a:solidFill>
-                <a:latin typeface="Noto Sans CJK JP"/>
-              </a:defRPr>
-            </a:pPr>
-            <a:r>
-              <a:t>脱衣・ずれ落ち・透過演出は含めません。</a:t>
+              <a:t>以下の5アバターで着用できるように制作します。</a:t>
             </a:r>
           </a:p>
         </p:txBody>
@@ -8746,7 +6963,7 @@
               </a:defRPr>
             </a:pPr>
             <a:r>
-              <a:t>05 / AVATAR COMPATIBILITY</a:t>
+              <a:t>05 / AVATARS</a:t>
             </a:r>
           </a:p>
         </p:txBody>
@@ -8785,7 +7002,7 @@
               </a:defRPr>
             </a:pPr>
             <a:r>
-              <a:t>バスタオルの対応対象｜5アバター</a:t>
+              <a:t>バスタオルの対応アバター｜5種</a:t>
             </a:r>
           </a:p>
         </p:txBody>
@@ -8824,7 +7041,7 @@
               </a:defRPr>
             </a:pPr>
             <a:r>
-              <a:t>初期体型を必須とし、追加シェイプへの対応は項目・設定値を個別に合意します。</a:t>
+              <a:t>以下のアバターに合わせたバスタオルを制作します。</a:t>
             </a:r>
           </a:p>
         </p:txBody>
@@ -8906,7 +7123,7 @@
               </a:defRPr>
             </a:pPr>
             <a:r>
-              <a:t>アース製薬 企業ブース｜3Dお風呂セット 制作発注資料｜仕様確認用 v0.3</a:t>
+              <a:t>アース製薬 企業ブース｜3Dお風呂セット 制作発注資料｜制作内容 v0.4</a:t>
             </a:r>
           </a:p>
         </p:txBody>
@@ -8958,8 +7175,8 @@
         </p:nvSpPr>
         <p:spPr>
           <a:xfrm>
-            <a:off x="594360" y="1865376"/>
-            <a:ext cx="4572000" cy="640080"/>
+            <a:off x="658368" y="1901952"/>
+            <a:ext cx="5532120" cy="658368"/>
           </a:xfrm>
           <a:prstGeom prst="roundRect">
             <a:avLst>
@@ -9003,8 +7220,8 @@
         </p:nvSpPr>
         <p:spPr>
           <a:xfrm>
-            <a:off x="795528" y="1984248"/>
-            <a:ext cx="475488" cy="365760"/>
+            <a:off x="896112" y="2048256"/>
+            <a:ext cx="521207" cy="320040"/>
           </a:xfrm>
           <a:prstGeom prst="rect">
             <a:avLst/>
@@ -9042,25 +7259,25 @@
         </p:nvSpPr>
         <p:spPr>
           <a:xfrm>
-            <a:off x="1435608" y="1984248"/>
-            <a:ext cx="1691640" cy="365760"/>
-          </a:xfrm>
-          <a:prstGeom prst="rect">
-            <a:avLst/>
-          </a:prstGeom>
-          <a:noFill/>
-        </p:spPr>
-        <p:txBody>
-          <a:bodyPr wrap="square" lIns="0" rIns="0" tIns="0" bIns="0">
-            <a:spAutoFit/>
-          </a:bodyPr>
-          <a:lstStyle/>
-          <a:p>
-            <a:pPr>
-              <a:spcAft>
-                <a:spcPts val="800"/>
-              </a:spcAft>
-              <a:defRPr sz="2000" b="1">
+            <a:off x="1691640" y="2011680"/>
+            <a:ext cx="2560320" cy="411480"/>
+          </a:xfrm>
+          <a:prstGeom prst="rect">
+            <a:avLst/>
+          </a:prstGeom>
+          <a:noFill/>
+        </p:spPr>
+        <p:txBody>
+          <a:bodyPr wrap="square" lIns="0" rIns="0" tIns="0" bIns="0">
+            <a:spAutoFit/>
+          </a:bodyPr>
+          <a:lstStyle/>
+          <a:p>
+            <a:pPr>
+              <a:spcAft>
+                <a:spcPts val="800"/>
+              </a:spcAft>
+              <a:defRPr sz="2300" b="1">
                 <a:solidFill>
                   <a:srgbClr val="173E3C"/>
                 </a:solidFill>
@@ -9081,25 +7298,25 @@
         </p:nvSpPr>
         <p:spPr>
           <a:xfrm>
-            <a:off x="3200400" y="2039112"/>
-            <a:ext cx="1645920" cy="292608"/>
-          </a:xfrm>
-          <a:prstGeom prst="rect">
-            <a:avLst/>
-          </a:prstGeom>
-          <a:noFill/>
-        </p:spPr>
-        <p:txBody>
-          <a:bodyPr wrap="square" lIns="0" rIns="0" tIns="0" bIns="0">
-            <a:spAutoFit/>
-          </a:bodyPr>
-          <a:lstStyle/>
-          <a:p>
-            <a:pPr>
-              <a:spcAft>
-                <a:spcPts val="800"/>
-              </a:spcAft>
-              <a:defRPr sz="1300" b="0">
+            <a:off x="4352544" y="2084832"/>
+            <a:ext cx="1463040" cy="310896"/>
+          </a:xfrm>
+          <a:prstGeom prst="rect">
+            <a:avLst/>
+          </a:prstGeom>
+          <a:noFill/>
+        </p:spPr>
+        <p:txBody>
+          <a:bodyPr wrap="square" lIns="0" rIns="0" tIns="0" bIns="0">
+            <a:spAutoFit/>
+          </a:bodyPr>
+          <a:lstStyle/>
+          <a:p>
+            <a:pPr>
+              <a:spcAft>
+                <a:spcPts val="800"/>
+              </a:spcAft>
+              <a:defRPr sz="1400" b="0">
                 <a:solidFill>
                   <a:srgbClr val="61716B"/>
                 </a:solidFill>
@@ -9120,8 +7337,8 @@
         </p:nvSpPr>
         <p:spPr>
           <a:xfrm>
-            <a:off x="594360" y="2633472"/>
-            <a:ext cx="4572000" cy="640080"/>
+            <a:off x="658368" y="2688336"/>
+            <a:ext cx="5532120" cy="658368"/>
           </a:xfrm>
           <a:prstGeom prst="roundRect">
             <a:avLst>
@@ -9165,8 +7382,8 @@
         </p:nvSpPr>
         <p:spPr>
           <a:xfrm>
-            <a:off x="795528" y="2752344"/>
-            <a:ext cx="475488" cy="365760"/>
+            <a:off x="896112" y="2834640"/>
+            <a:ext cx="521207" cy="320040"/>
           </a:xfrm>
           <a:prstGeom prst="rect">
             <a:avLst/>
@@ -9204,25 +7421,25 @@
         </p:nvSpPr>
         <p:spPr>
           <a:xfrm>
-            <a:off x="1435608" y="2752344"/>
-            <a:ext cx="1691640" cy="365760"/>
-          </a:xfrm>
-          <a:prstGeom prst="rect">
-            <a:avLst/>
-          </a:prstGeom>
-          <a:noFill/>
-        </p:spPr>
-        <p:txBody>
-          <a:bodyPr wrap="square" lIns="0" rIns="0" tIns="0" bIns="0">
-            <a:spAutoFit/>
-          </a:bodyPr>
-          <a:lstStyle/>
-          <a:p>
-            <a:pPr>
-              <a:spcAft>
-                <a:spcPts val="800"/>
-              </a:spcAft>
-              <a:defRPr sz="2000" b="1">
+            <a:off x="1691640" y="2798064"/>
+            <a:ext cx="2560320" cy="411480"/>
+          </a:xfrm>
+          <a:prstGeom prst="rect">
+            <a:avLst/>
+          </a:prstGeom>
+          <a:noFill/>
+        </p:spPr>
+        <p:txBody>
+          <a:bodyPr wrap="square" lIns="0" rIns="0" tIns="0" bIns="0">
+            <a:spAutoFit/>
+          </a:bodyPr>
+          <a:lstStyle/>
+          <a:p>
+            <a:pPr>
+              <a:spcAft>
+                <a:spcPts val="800"/>
+              </a:spcAft>
+              <a:defRPr sz="2300" b="1">
                 <a:solidFill>
                   <a:srgbClr val="173E3C"/>
                 </a:solidFill>
@@ -9243,25 +7460,25 @@
         </p:nvSpPr>
         <p:spPr>
           <a:xfrm>
-            <a:off x="3200400" y="2807208"/>
-            <a:ext cx="1645920" cy="292608"/>
-          </a:xfrm>
-          <a:prstGeom prst="rect">
-            <a:avLst/>
-          </a:prstGeom>
-          <a:noFill/>
-        </p:spPr>
-        <p:txBody>
-          <a:bodyPr wrap="square" lIns="0" rIns="0" tIns="0" bIns="0">
-            <a:spAutoFit/>
-          </a:bodyPr>
-          <a:lstStyle/>
-          <a:p>
-            <a:pPr>
-              <a:spcAft>
-                <a:spcPts val="800"/>
-              </a:spcAft>
-              <a:defRPr sz="1300" b="0">
+            <a:off x="4352544" y="2871216"/>
+            <a:ext cx="1463040" cy="310896"/>
+          </a:xfrm>
+          <a:prstGeom prst="rect">
+            <a:avLst/>
+          </a:prstGeom>
+          <a:noFill/>
+        </p:spPr>
+        <p:txBody>
+          <a:bodyPr wrap="square" lIns="0" rIns="0" tIns="0" bIns="0">
+            <a:spAutoFit/>
+          </a:bodyPr>
+          <a:lstStyle/>
+          <a:p>
+            <a:pPr>
+              <a:spcAft>
+                <a:spcPts val="800"/>
+              </a:spcAft>
+              <a:defRPr sz="1400" b="0">
                 <a:solidFill>
                   <a:srgbClr val="61716B"/>
                 </a:solidFill>
@@ -9282,8 +7499,8 @@
         </p:nvSpPr>
         <p:spPr>
           <a:xfrm>
-            <a:off x="594360" y="3401568"/>
-            <a:ext cx="4572000" cy="640080"/>
+            <a:off x="658368" y="3474720"/>
+            <a:ext cx="5532120" cy="658368"/>
           </a:xfrm>
           <a:prstGeom prst="roundRect">
             <a:avLst>
@@ -9327,8 +7544,8 @@
         </p:nvSpPr>
         <p:spPr>
           <a:xfrm>
-            <a:off x="795528" y="3520439"/>
-            <a:ext cx="475488" cy="365760"/>
+            <a:off x="896112" y="3621024"/>
+            <a:ext cx="521207" cy="320040"/>
           </a:xfrm>
           <a:prstGeom prst="rect">
             <a:avLst/>
@@ -9366,25 +7583,25 @@
         </p:nvSpPr>
         <p:spPr>
           <a:xfrm>
-            <a:off x="1435608" y="3520439"/>
-            <a:ext cx="1691640" cy="365760"/>
-          </a:xfrm>
-          <a:prstGeom prst="rect">
-            <a:avLst/>
-          </a:prstGeom>
-          <a:noFill/>
-        </p:spPr>
-        <p:txBody>
-          <a:bodyPr wrap="square" lIns="0" rIns="0" tIns="0" bIns="0">
-            <a:spAutoFit/>
-          </a:bodyPr>
-          <a:lstStyle/>
-          <a:p>
-            <a:pPr>
-              <a:spcAft>
-                <a:spcPts val="800"/>
-              </a:spcAft>
-              <a:defRPr sz="2000" b="1">
+            <a:off x="1691640" y="3584448"/>
+            <a:ext cx="2560320" cy="411480"/>
+          </a:xfrm>
+          <a:prstGeom prst="rect">
+            <a:avLst/>
+          </a:prstGeom>
+          <a:noFill/>
+        </p:spPr>
+        <p:txBody>
+          <a:bodyPr wrap="square" lIns="0" rIns="0" tIns="0" bIns="0">
+            <a:spAutoFit/>
+          </a:bodyPr>
+          <a:lstStyle/>
+          <a:p>
+            <a:pPr>
+              <a:spcAft>
+                <a:spcPts val="800"/>
+              </a:spcAft>
+              <a:defRPr sz="2300" b="1">
                 <a:solidFill>
                   <a:srgbClr val="173E3C"/>
                 </a:solidFill>
@@ -9405,25 +7622,25 @@
         </p:nvSpPr>
         <p:spPr>
           <a:xfrm>
-            <a:off x="3200400" y="3575303"/>
-            <a:ext cx="1645920" cy="292608"/>
-          </a:xfrm>
-          <a:prstGeom prst="rect">
-            <a:avLst/>
-          </a:prstGeom>
-          <a:noFill/>
-        </p:spPr>
-        <p:txBody>
-          <a:bodyPr wrap="square" lIns="0" rIns="0" tIns="0" bIns="0">
-            <a:spAutoFit/>
-          </a:bodyPr>
-          <a:lstStyle/>
-          <a:p>
-            <a:pPr>
-              <a:spcAft>
-                <a:spcPts val="800"/>
-              </a:spcAft>
-              <a:defRPr sz="1300" b="0">
+            <a:off x="4352544" y="3657600"/>
+            <a:ext cx="1463040" cy="310896"/>
+          </a:xfrm>
+          <a:prstGeom prst="rect">
+            <a:avLst/>
+          </a:prstGeom>
+          <a:noFill/>
+        </p:spPr>
+        <p:txBody>
+          <a:bodyPr wrap="square" lIns="0" rIns="0" tIns="0" bIns="0">
+            <a:spAutoFit/>
+          </a:bodyPr>
+          <a:lstStyle/>
+          <a:p>
+            <a:pPr>
+              <a:spcAft>
+                <a:spcPts val="800"/>
+              </a:spcAft>
+              <a:defRPr sz="1400" b="0">
                 <a:solidFill>
                   <a:srgbClr val="61716B"/>
                 </a:solidFill>
@@ -9444,8 +7661,8 @@
         </p:nvSpPr>
         <p:spPr>
           <a:xfrm>
-            <a:off x="594360" y="4169664"/>
-            <a:ext cx="4572000" cy="640080"/>
+            <a:off x="658368" y="4261104"/>
+            <a:ext cx="5532120" cy="658368"/>
           </a:xfrm>
           <a:prstGeom prst="roundRect">
             <a:avLst>
@@ -9489,8 +7706,8 @@
         </p:nvSpPr>
         <p:spPr>
           <a:xfrm>
-            <a:off x="795528" y="4288536"/>
-            <a:ext cx="475488" cy="365760"/>
+            <a:off x="896112" y="4407408"/>
+            <a:ext cx="521207" cy="320040"/>
           </a:xfrm>
           <a:prstGeom prst="rect">
             <a:avLst/>
@@ -9528,25 +7745,25 @@
         </p:nvSpPr>
         <p:spPr>
           <a:xfrm>
-            <a:off x="1435608" y="4288536"/>
-            <a:ext cx="1691640" cy="365760"/>
-          </a:xfrm>
-          <a:prstGeom prst="rect">
-            <a:avLst/>
-          </a:prstGeom>
-          <a:noFill/>
-        </p:spPr>
-        <p:txBody>
-          <a:bodyPr wrap="square" lIns="0" rIns="0" tIns="0" bIns="0">
-            <a:spAutoFit/>
-          </a:bodyPr>
-          <a:lstStyle/>
-          <a:p>
-            <a:pPr>
-              <a:spcAft>
-                <a:spcPts val="800"/>
-              </a:spcAft>
-              <a:defRPr sz="2000" b="1">
+            <a:off x="1691640" y="4370832"/>
+            <a:ext cx="2560320" cy="411480"/>
+          </a:xfrm>
+          <a:prstGeom prst="rect">
+            <a:avLst/>
+          </a:prstGeom>
+          <a:noFill/>
+        </p:spPr>
+        <p:txBody>
+          <a:bodyPr wrap="square" lIns="0" rIns="0" tIns="0" bIns="0">
+            <a:spAutoFit/>
+          </a:bodyPr>
+          <a:lstStyle/>
+          <a:p>
+            <a:pPr>
+              <a:spcAft>
+                <a:spcPts val="800"/>
+              </a:spcAft>
+              <a:defRPr sz="2300" b="1">
                 <a:solidFill>
                   <a:srgbClr val="173E3C"/>
                 </a:solidFill>
@@ -9567,25 +7784,25 @@
         </p:nvSpPr>
         <p:spPr>
           <a:xfrm>
-            <a:off x="3200400" y="4343400"/>
-            <a:ext cx="1645920" cy="292608"/>
-          </a:xfrm>
-          <a:prstGeom prst="rect">
-            <a:avLst/>
-          </a:prstGeom>
-          <a:noFill/>
-        </p:spPr>
-        <p:txBody>
-          <a:bodyPr wrap="square" lIns="0" rIns="0" tIns="0" bIns="0">
-            <a:spAutoFit/>
-          </a:bodyPr>
-          <a:lstStyle/>
-          <a:p>
-            <a:pPr>
-              <a:spcAft>
-                <a:spcPts val="800"/>
-              </a:spcAft>
-              <a:defRPr sz="1300" b="0">
+            <a:off x="4352544" y="4443984"/>
+            <a:ext cx="1463040" cy="310896"/>
+          </a:xfrm>
+          <a:prstGeom prst="rect">
+            <a:avLst/>
+          </a:prstGeom>
+          <a:noFill/>
+        </p:spPr>
+        <p:txBody>
+          <a:bodyPr wrap="square" lIns="0" rIns="0" tIns="0" bIns="0">
+            <a:spAutoFit/>
+          </a:bodyPr>
+          <a:lstStyle/>
+          <a:p>
+            <a:pPr>
+              <a:spcAft>
+                <a:spcPts val="800"/>
+              </a:spcAft>
+              <a:defRPr sz="1400" b="0">
                 <a:solidFill>
                   <a:srgbClr val="61716B"/>
                 </a:solidFill>
@@ -9606,8 +7823,8 @@
         </p:nvSpPr>
         <p:spPr>
           <a:xfrm>
-            <a:off x="594360" y="4937760"/>
-            <a:ext cx="4572000" cy="640080"/>
+            <a:off x="658368" y="5047488"/>
+            <a:ext cx="5532120" cy="658368"/>
           </a:xfrm>
           <a:prstGeom prst="roundRect">
             <a:avLst>
@@ -9651,8 +7868,8 @@
         </p:nvSpPr>
         <p:spPr>
           <a:xfrm>
-            <a:off x="795528" y="5056632"/>
-            <a:ext cx="475488" cy="365760"/>
+            <a:off x="896112" y="5193792"/>
+            <a:ext cx="521207" cy="320040"/>
           </a:xfrm>
           <a:prstGeom prst="rect">
             <a:avLst/>
@@ -9690,25 +7907,25 @@
         </p:nvSpPr>
         <p:spPr>
           <a:xfrm>
-            <a:off x="1435608" y="5056632"/>
-            <a:ext cx="1691640" cy="365760"/>
-          </a:xfrm>
-          <a:prstGeom prst="rect">
-            <a:avLst/>
-          </a:prstGeom>
-          <a:noFill/>
-        </p:spPr>
-        <p:txBody>
-          <a:bodyPr wrap="square" lIns="0" rIns="0" tIns="0" bIns="0">
-            <a:spAutoFit/>
-          </a:bodyPr>
-          <a:lstStyle/>
-          <a:p>
-            <a:pPr>
-              <a:spcAft>
-                <a:spcPts val="800"/>
-              </a:spcAft>
-              <a:defRPr sz="2000" b="1">
+            <a:off x="1691640" y="5157216"/>
+            <a:ext cx="2560320" cy="411480"/>
+          </a:xfrm>
+          <a:prstGeom prst="rect">
+            <a:avLst/>
+          </a:prstGeom>
+          <a:noFill/>
+        </p:spPr>
+        <p:txBody>
+          <a:bodyPr wrap="square" lIns="0" rIns="0" tIns="0" bIns="0">
+            <a:spAutoFit/>
+          </a:bodyPr>
+          <a:lstStyle/>
+          <a:p>
+            <a:pPr>
+              <a:spcAft>
+                <a:spcPts val="800"/>
+              </a:spcAft>
+              <a:defRPr sz="2300" b="1">
                 <a:solidFill>
                   <a:srgbClr val="173E3C"/>
                 </a:solidFill>
@@ -9729,25 +7946,25 @@
         </p:nvSpPr>
         <p:spPr>
           <a:xfrm>
-            <a:off x="3200400" y="5111496"/>
-            <a:ext cx="1645920" cy="292608"/>
-          </a:xfrm>
-          <a:prstGeom prst="rect">
-            <a:avLst/>
-          </a:prstGeom>
-          <a:noFill/>
-        </p:spPr>
-        <p:txBody>
-          <a:bodyPr wrap="square" lIns="0" rIns="0" tIns="0" bIns="0">
-            <a:spAutoFit/>
-          </a:bodyPr>
-          <a:lstStyle/>
-          <a:p>
-            <a:pPr>
-              <a:spcAft>
-                <a:spcPts val="800"/>
-              </a:spcAft>
-              <a:defRPr sz="1300" b="0">
+            <a:off x="4352544" y="5230368"/>
+            <a:ext cx="1463040" cy="310896"/>
+          </a:xfrm>
+          <a:prstGeom prst="rect">
+            <a:avLst/>
+          </a:prstGeom>
+          <a:noFill/>
+        </p:spPr>
+        <p:txBody>
+          <a:bodyPr wrap="square" lIns="0" rIns="0" tIns="0" bIns="0">
+            <a:spAutoFit/>
+          </a:bodyPr>
+          <a:lstStyle/>
+          <a:p>
+            <a:pPr>
+              <a:spcAft>
+                <a:spcPts val="800"/>
+              </a:spcAft>
+              <a:defRPr sz="1400" b="0">
                 <a:solidFill>
                   <a:srgbClr val="61716B"/>
                 </a:solidFill>
@@ -9760,45 +7977,31 @@
           </a:p>
         </p:txBody>
       </p:sp>
-      <p:sp>
-        <p:nvSpPr>
-          <p:cNvPr id="29" name="TextBox 28"/>
-          <p:cNvSpPr txBox="1"/>
-          <p:nvPr/>
-        </p:nvSpPr>
-        <p:spPr>
-          <a:xfrm>
-            <a:off x="5632704" y="1938528"/>
-            <a:ext cx="5486400" cy="420624"/>
-          </a:xfrm>
-          <a:prstGeom prst="rect">
-            <a:avLst/>
-          </a:prstGeom>
-          <a:noFill/>
-        </p:spPr>
-        <p:txBody>
-          <a:bodyPr wrap="square" lIns="0" rIns="0" tIns="0" bIns="0">
-            <a:spAutoFit/>
-          </a:bodyPr>
-          <a:lstStyle/>
-          <a:p>
-            <a:pPr>
-              <a:spcAft>
-                <a:spcPts val="800"/>
-              </a:spcAft>
-              <a:defRPr sz="2100" b="1">
-                <a:solidFill>
-                  <a:srgbClr val="173E3C"/>
-                </a:solidFill>
-                <a:latin typeface="Noto Sans CJK JP"/>
-              </a:defRPr>
-            </a:pPr>
-            <a:r>
-              <a:t>「対応済み」に含める作業</a:t>
-            </a:r>
-          </a:p>
-        </p:txBody>
-      </p:sp>
+      <p:pic>
+        <p:nvPicPr>
+          <p:cNvPr id="29" name="Picture 28" descr="exec-871844d4-edbb-4a08-9d69-90132a8b8d7d.png"/>
+          <p:cNvPicPr>
+            <a:picLocks noChangeAspect="1"/>
+          </p:cNvPicPr>
+          <p:nvPr/>
+        </p:nvPicPr>
+        <p:blipFill>
+          <a:blip r:embed="rId2"/>
+          <a:srcRect l="50000" t="50000"/>
+          <a:stretch>
+            <a:fillRect/>
+          </a:stretch>
+        </p:blipFill>
+        <p:spPr>
+          <a:xfrm>
+            <a:off x="7114032" y="1929384"/>
+            <a:ext cx="4096512" cy="4096512"/>
+          </a:xfrm>
+          <a:prstGeom prst="rect">
+            <a:avLst/>
+          </a:prstGeom>
+        </p:spPr>
+      </p:pic>
       <p:sp>
         <p:nvSpPr>
           <p:cNvPr id="30" name="TextBox 29"/>
@@ -9807,421 +8010,25 @@
         </p:nvSpPr>
         <p:spPr>
           <a:xfrm>
-            <a:off x="5632704" y="2660904"/>
-            <a:ext cx="201168" cy="274320"/>
-          </a:xfrm>
-          <a:prstGeom prst="rect">
-            <a:avLst/>
-          </a:prstGeom>
-          <a:noFill/>
-        </p:spPr>
-        <p:txBody>
-          <a:bodyPr wrap="square" lIns="0" rIns="0" tIns="0" bIns="0">
-            <a:spAutoFit/>
-          </a:bodyPr>
-          <a:lstStyle/>
-          <a:p>
-            <a:pPr>
-              <a:spcAft>
-                <a:spcPts val="800"/>
-              </a:spcAft>
-              <a:defRPr sz="1600" b="1">
-                <a:solidFill>
-                  <a:srgbClr val="24685E"/>
-                </a:solidFill>
-                <a:latin typeface="Noto Sans CJK JP"/>
-              </a:defRPr>
-            </a:pPr>
-            <a:r>
-              <a:t>•</a:t>
-            </a:r>
-          </a:p>
-        </p:txBody>
-      </p:sp>
-      <p:sp>
-        <p:nvSpPr>
-          <p:cNvPr id="31" name="TextBox 30"/>
-          <p:cNvSpPr txBox="1"/>
-          <p:nvPr/>
-        </p:nvSpPr>
-        <p:spPr>
-          <a:xfrm>
-            <a:off x="5870448" y="2660904"/>
-            <a:ext cx="5248656" cy="548640"/>
-          </a:xfrm>
-          <a:prstGeom prst="rect">
-            <a:avLst/>
-          </a:prstGeom>
-          <a:noFill/>
-        </p:spPr>
-        <p:txBody>
-          <a:bodyPr wrap="square" lIns="0" rIns="0" tIns="0" bIns="0">
-            <a:spAutoFit/>
-          </a:bodyPr>
-          <a:lstStyle/>
-          <a:p>
-            <a:pPr>
-              <a:spcAft>
-                <a:spcPts val="800"/>
-              </a:spcAft>
-              <a:defRPr sz="1600" b="0">
-                <a:solidFill>
-                  <a:srgbClr val="173E3C"/>
-                </a:solidFill>
-                <a:latin typeface="Noto Sans CJK JP"/>
-              </a:defRPr>
-            </a:pPr>
-            <a:r>
-              <a:t>アバター別の形状・サイズ・ウェイト調整</a:t>
-            </a:r>
-          </a:p>
-        </p:txBody>
-      </p:sp>
-      <p:sp>
-        <p:nvSpPr>
-          <p:cNvPr id="32" name="TextBox 31"/>
-          <p:cNvSpPr txBox="1"/>
-          <p:nvPr/>
-        </p:nvSpPr>
-        <p:spPr>
-          <a:xfrm>
-            <a:off x="5632704" y="3246120"/>
-            <a:ext cx="201168" cy="274320"/>
-          </a:xfrm>
-          <a:prstGeom prst="rect">
-            <a:avLst/>
-          </a:prstGeom>
-          <a:noFill/>
-        </p:spPr>
-        <p:txBody>
-          <a:bodyPr wrap="square" lIns="0" rIns="0" tIns="0" bIns="0">
-            <a:spAutoFit/>
-          </a:bodyPr>
-          <a:lstStyle/>
-          <a:p>
-            <a:pPr>
-              <a:spcAft>
-                <a:spcPts val="800"/>
-              </a:spcAft>
-              <a:defRPr sz="1600" b="1">
-                <a:solidFill>
-                  <a:srgbClr val="24685E"/>
-                </a:solidFill>
-                <a:latin typeface="Noto Sans CJK JP"/>
-              </a:defRPr>
-            </a:pPr>
-            <a:r>
-              <a:t>•</a:t>
-            </a:r>
-          </a:p>
-        </p:txBody>
-      </p:sp>
-      <p:sp>
-        <p:nvSpPr>
-          <p:cNvPr id="33" name="TextBox 32"/>
-          <p:cNvSpPr txBox="1"/>
-          <p:nvPr/>
-        </p:nvSpPr>
-        <p:spPr>
-          <a:xfrm>
-            <a:off x="5870448" y="3246120"/>
-            <a:ext cx="5248656" cy="548640"/>
-          </a:xfrm>
-          <a:prstGeom prst="rect">
-            <a:avLst/>
-          </a:prstGeom>
-          <a:noFill/>
-        </p:spPr>
-        <p:txBody>
-          <a:bodyPr wrap="square" lIns="0" rIns="0" tIns="0" bIns="0">
-            <a:spAutoFit/>
-          </a:bodyPr>
-          <a:lstStyle/>
-          <a:p>
-            <a:pPr>
-              <a:spcAft>
-                <a:spcPts val="800"/>
-              </a:spcAft>
-              <a:defRPr sz="1600" b="0">
-                <a:solidFill>
-                  <a:srgbClr val="173E3C"/>
-                </a:solidFill>
-                <a:latin typeface="Noto Sans CJK JP"/>
-              </a:defRPr>
-            </a:pPr>
-            <a:r>
-              <a:t>対象別Prefab、または同等の導入設定</a:t>
-            </a:r>
-          </a:p>
-        </p:txBody>
-      </p:sp>
-      <p:sp>
-        <p:nvSpPr>
-          <p:cNvPr id="34" name="TextBox 33"/>
-          <p:cNvSpPr txBox="1"/>
-          <p:nvPr/>
-        </p:nvSpPr>
-        <p:spPr>
-          <a:xfrm>
-            <a:off x="5632704" y="3831336"/>
-            <a:ext cx="201168" cy="274320"/>
-          </a:xfrm>
-          <a:prstGeom prst="rect">
-            <a:avLst/>
-          </a:prstGeom>
-          <a:noFill/>
-        </p:spPr>
-        <p:txBody>
-          <a:bodyPr wrap="square" lIns="0" rIns="0" tIns="0" bIns="0">
-            <a:spAutoFit/>
-          </a:bodyPr>
-          <a:lstStyle/>
-          <a:p>
-            <a:pPr>
-              <a:spcAft>
-                <a:spcPts val="800"/>
-              </a:spcAft>
-              <a:defRPr sz="1600" b="1">
-                <a:solidFill>
-                  <a:srgbClr val="24685E"/>
-                </a:solidFill>
-                <a:latin typeface="Noto Sans CJK JP"/>
-              </a:defRPr>
-            </a:pPr>
-            <a:r>
-              <a:t>•</a:t>
-            </a:r>
-          </a:p>
-        </p:txBody>
-      </p:sp>
-      <p:sp>
-        <p:nvSpPr>
-          <p:cNvPr id="35" name="TextBox 34"/>
-          <p:cNvSpPr txBox="1"/>
-          <p:nvPr/>
-        </p:nvSpPr>
-        <p:spPr>
-          <a:xfrm>
-            <a:off x="5870448" y="3831336"/>
-            <a:ext cx="5248656" cy="548640"/>
-          </a:xfrm>
-          <a:prstGeom prst="rect">
-            <a:avLst/>
-          </a:prstGeom>
-          <a:noFill/>
-        </p:spPr>
-        <p:txBody>
-          <a:bodyPr wrap="square" lIns="0" rIns="0" tIns="0" bIns="0">
-            <a:spAutoFit/>
-          </a:bodyPr>
-          <a:lstStyle/>
-          <a:p>
-            <a:pPr>
-              <a:spcAft>
-                <a:spcPts val="800"/>
-              </a:spcAft>
-              <a:defRPr sz="1600" b="0">
-                <a:solidFill>
-                  <a:srgbClr val="173E3C"/>
-                </a:solidFill>
-                <a:latin typeface="Noto Sans CJK JP"/>
-              </a:defRPr>
-            </a:pPr>
-            <a:r>
-              <a:t>指定ポーズでの着用・貫通・被覆の確認</a:t>
-            </a:r>
-          </a:p>
-        </p:txBody>
-      </p:sp>
-      <p:sp>
-        <p:nvSpPr>
-          <p:cNvPr id="36" name="TextBox 35"/>
-          <p:cNvSpPr txBox="1"/>
-          <p:nvPr/>
-        </p:nvSpPr>
-        <p:spPr>
-          <a:xfrm>
-            <a:off x="5632704" y="4416552"/>
-            <a:ext cx="201168" cy="274320"/>
-          </a:xfrm>
-          <a:prstGeom prst="rect">
-            <a:avLst/>
-          </a:prstGeom>
-          <a:noFill/>
-        </p:spPr>
-        <p:txBody>
-          <a:bodyPr wrap="square" lIns="0" rIns="0" tIns="0" bIns="0">
-            <a:spAutoFit/>
-          </a:bodyPr>
-          <a:lstStyle/>
-          <a:p>
-            <a:pPr>
-              <a:spcAft>
-                <a:spcPts val="800"/>
-              </a:spcAft>
-              <a:defRPr sz="1600" b="1">
-                <a:solidFill>
-                  <a:srgbClr val="24685E"/>
-                </a:solidFill>
-                <a:latin typeface="Noto Sans CJK JP"/>
-              </a:defRPr>
-            </a:pPr>
-            <a:r>
-              <a:t>•</a:t>
-            </a:r>
-          </a:p>
-        </p:txBody>
-      </p:sp>
-      <p:sp>
-        <p:nvSpPr>
-          <p:cNvPr id="37" name="TextBox 36"/>
-          <p:cNvSpPr txBox="1"/>
-          <p:nvPr/>
-        </p:nvSpPr>
-        <p:spPr>
-          <a:xfrm>
-            <a:off x="5870448" y="4416552"/>
-            <a:ext cx="5248656" cy="548640"/>
-          </a:xfrm>
-          <a:prstGeom prst="rect">
-            <a:avLst/>
-          </a:prstGeom>
-          <a:noFill/>
-        </p:spPr>
-        <p:txBody>
-          <a:bodyPr wrap="square" lIns="0" rIns="0" tIns="0" bIns="0">
-            <a:spAutoFit/>
-          </a:bodyPr>
-          <a:lstStyle/>
-          <a:p>
-            <a:pPr>
-              <a:spcAft>
-                <a:spcPts val="800"/>
-              </a:spcAft>
-              <a:defRPr sz="1600" b="0">
-                <a:solidFill>
-                  <a:srgbClr val="173E3C"/>
-                </a:solidFill>
-                <a:latin typeface="Noto Sans CJK JP"/>
-              </a:defRPr>
-            </a:pPr>
-            <a:r>
-              <a:t>必要な素体非表示設定と制約の記録</a:t>
-            </a:r>
-          </a:p>
-        </p:txBody>
-      </p:sp>
-      <p:sp>
-        <p:nvSpPr>
-          <p:cNvPr id="38" name="Rounded Rectangle 37"/>
-          <p:cNvSpPr/>
-          <p:nvPr/>
-        </p:nvSpPr>
-        <p:spPr>
-          <a:xfrm>
-            <a:off x="5623560" y="5257800"/>
-            <a:ext cx="5486400" cy="658368"/>
-          </a:xfrm>
-          <a:prstGeom prst="roundRect">
-            <a:avLst>
-              <a:gd name="adj" fmla="val 10000"/>
-            </a:avLst>
-          </a:prstGeom>
-          <a:solidFill>
-            <a:srgbClr val="E4F0E8"/>
-          </a:solidFill>
-          <a:ln>
-            <a:noFill/>
-          </a:ln>
-        </p:spPr>
-        <p:style>
-          <a:lnRef idx="1">
-            <a:schemeClr val="accent1"/>
-          </a:lnRef>
-          <a:fillRef idx="3">
-            <a:schemeClr val="accent1"/>
-          </a:fillRef>
-          <a:effectRef idx="2">
-            <a:schemeClr val="accent1"/>
-          </a:effectRef>
-          <a:fontRef idx="minor">
-            <a:schemeClr val="lt1"/>
-          </a:fontRef>
-        </p:style>
-        <p:txBody>
-          <a:bodyPr rtlCol="0" anchor="ctr"/>
-          <a:lstStyle/>
-          <a:p>
-            <a:pPr algn="ctr"/>
-          </a:p>
-        </p:txBody>
-      </p:sp>
-      <p:sp>
-        <p:nvSpPr>
-          <p:cNvPr id="39" name="TextBox 38"/>
-          <p:cNvSpPr txBox="1"/>
-          <p:nvPr/>
-        </p:nvSpPr>
-        <p:spPr>
-          <a:xfrm>
-            <a:off x="5815584" y="5413248"/>
-            <a:ext cx="5120640" cy="365760"/>
-          </a:xfrm>
-          <a:prstGeom prst="rect">
-            <a:avLst/>
-          </a:prstGeom>
-          <a:noFill/>
-        </p:spPr>
-        <p:txBody>
-          <a:bodyPr wrap="square" lIns="0" rIns="0" tIns="0" bIns="0">
-            <a:spAutoFit/>
-          </a:bodyPr>
-          <a:lstStyle/>
-          <a:p>
-            <a:pPr>
-              <a:spcAft>
-                <a:spcPts val="800"/>
-              </a:spcAft>
-              <a:defRPr sz="1400" b="1">
-                <a:solidFill>
-                  <a:srgbClr val="24685E"/>
-                </a:solidFill>
-                <a:latin typeface="Noto Sans CJK JP"/>
-              </a:defRPr>
-            </a:pPr>
-            <a:r>
-              <a:t>2タイプ採用時：5種 × 2タイプ ＝ 10通りを検証</a:t>
-            </a:r>
-          </a:p>
-        </p:txBody>
-      </p:sp>
-      <p:sp>
-        <p:nvSpPr>
-          <p:cNvPr id="40" name="TextBox 39"/>
-          <p:cNvSpPr txBox="1"/>
-          <p:nvPr/>
-        </p:nvSpPr>
-        <p:spPr>
-          <a:xfrm>
-            <a:off x="630936" y="5989320"/>
-            <a:ext cx="10607040" cy="301752"/>
-          </a:xfrm>
-          <a:prstGeom prst="rect">
-            <a:avLst/>
-          </a:prstGeom>
-          <a:noFill/>
-        </p:spPr>
-        <p:txBody>
-          <a:bodyPr wrap="square" lIns="0" rIns="0" tIns="0" bIns="0">
-            <a:spAutoFit/>
-          </a:bodyPr>
-          <a:lstStyle/>
-          <a:p>
-            <a:pPr>
-              <a:spcAft>
-                <a:spcPts val="800"/>
-              </a:spcAft>
-              <a:defRPr sz="1000" b="0">
+            <a:off x="7114032" y="6099048"/>
+            <a:ext cx="4096512" cy="274320"/>
+          </a:xfrm>
+          <a:prstGeom prst="rect">
+            <a:avLst/>
+          </a:prstGeom>
+          <a:noFill/>
+        </p:spPr>
+        <p:txBody>
+          <a:bodyPr wrap="square" lIns="0" rIns="0" tIns="0" bIns="0">
+            <a:spAutoFit/>
+          </a:bodyPr>
+          <a:lstStyle/>
+          <a:p>
+            <a:pPr>
+              <a:spcAft>
+                <a:spcPts val="800"/>
+              </a:spcAft>
+              <a:defRPr sz="800" b="0">
                 <a:solidFill>
                   <a:srgbClr val="61716B"/>
                 </a:solidFill>
@@ -10229,7 +8036,7 @@
               </a:defRPr>
             </a:pPr>
             <a:r>
-              <a:t>採用版は制作開始前に固定。男性アバターの個別対応は別途指定。5種の選定根拠・調査範囲は最終ページに記載。</a:t>
+              <a:t>参考イメージ（AI生成）</a:t>
             </a:r>
           </a:p>
         </p:txBody>
@@ -10337,7 +8144,7 @@
               </a:defRPr>
             </a:pPr>
             <a:r>
-              <a:t>06 / DELIVERY</a:t>
+              <a:t>06 / DELIVERABLES</a:t>
             </a:r>
           </a:p>
         </p:txBody>
@@ -10376,7 +8183,7 @@
               </a:defRPr>
             </a:pPr>
             <a:r>
-              <a:t>納品物と、制作開始前に固定する技術条件</a:t>
+              <a:t>納品物｜2点</a:t>
             </a:r>
           </a:p>
         </p:txBody>
@@ -10415,7 +8222,7 @@
               </a:defRPr>
             </a:pPr>
             <a:r>
-              <a:t>特定の制作ツールや追加アセットを必要とする場合は、事前に提示してください。</a:t>
+              <a:t>制作した4アイテムについて、以下を納品してください。</a:t>
             </a:r>
           </a:p>
         </p:txBody>
@@ -10497,7 +8304,7 @@
               </a:defRPr>
             </a:pPr>
             <a:r>
-              <a:t>アース製薬 企業ブース｜3Dお風呂セット 制作発注資料｜仕様確認用 v0.3</a:t>
+              <a:t>アース製薬 企業ブース｜3Dお風呂セット 制作発注資料｜制作内容 v0.4</a:t>
             </a:r>
           </a:p>
         </p:txBody>
@@ -10549,8 +8356,8 @@
         </p:nvSpPr>
         <p:spPr>
           <a:xfrm>
-            <a:off x="576072" y="1929384"/>
-            <a:ext cx="5486400" cy="4096512"/>
+            <a:off x="630936" y="2048256"/>
+            <a:ext cx="5285232" cy="3867912"/>
           </a:xfrm>
           <a:prstGeom prst="roundRect">
             <a:avLst>
@@ -10594,25 +8401,25 @@
         </p:nvSpPr>
         <p:spPr>
           <a:xfrm>
-            <a:off x="777240" y="2112264"/>
-            <a:ext cx="5084064" cy="365760"/>
-          </a:xfrm>
-          <a:prstGeom prst="rect">
-            <a:avLst/>
-          </a:prstGeom>
-          <a:noFill/>
-        </p:spPr>
-        <p:txBody>
-          <a:bodyPr wrap="square" lIns="0" rIns="0" tIns="0" bIns="0">
-            <a:spAutoFit/>
-          </a:bodyPr>
-          <a:lstStyle/>
-          <a:p>
-            <a:pPr>
-              <a:spcAft>
-                <a:spcPts val="800"/>
-              </a:spcAft>
-              <a:defRPr sz="1700" b="1">
+            <a:off x="923544" y="2386584"/>
+            <a:ext cx="1371600" cy="685800"/>
+          </a:xfrm>
+          <a:prstGeom prst="rect">
+            <a:avLst/>
+          </a:prstGeom>
+          <a:noFill/>
+        </p:spPr>
+        <p:txBody>
+          <a:bodyPr wrap="square" lIns="0" rIns="0" tIns="0" bIns="0">
+            <a:spAutoFit/>
+          </a:bodyPr>
+          <a:lstStyle/>
+          <a:p>
+            <a:pPr>
+              <a:spcAft>
+                <a:spcPts val="800"/>
+              </a:spcAft>
+              <a:defRPr sz="3600" b="1">
                 <a:solidFill>
                   <a:srgbClr val="24685E"/>
                 </a:solidFill>
@@ -10620,7 +8427,7 @@
               </a:defRPr>
             </a:pPr>
             <a:r>
-              <a:t>納品物</a:t>
+              <a:t>01</a:t>
             </a:r>
           </a:p>
         </p:txBody>
@@ -10633,25 +8440,25 @@
         </p:nvSpPr>
         <p:spPr>
           <a:xfrm>
-            <a:off x="777240" y="2633472"/>
-            <a:ext cx="5084064" cy="3319272"/>
-          </a:xfrm>
-          <a:prstGeom prst="rect">
-            <a:avLst/>
-          </a:prstGeom>
-          <a:noFill/>
-        </p:spPr>
-        <p:txBody>
-          <a:bodyPr wrap="square" lIns="0" rIns="0" tIns="0" bIns="0">
-            <a:spAutoFit/>
-          </a:bodyPr>
-          <a:lstStyle/>
-          <a:p>
-            <a:pPr>
-              <a:spcAft>
-                <a:spcPts val="800"/>
-              </a:spcAft>
-              <a:defRPr sz="1400" b="0">
+            <a:off x="923544" y="3346704"/>
+            <a:ext cx="4663440" cy="548640"/>
+          </a:xfrm>
+          <a:prstGeom prst="rect">
+            <a:avLst/>
+          </a:prstGeom>
+          <a:noFill/>
+        </p:spPr>
+        <p:txBody>
+          <a:bodyPr wrap="square" lIns="0" rIns="0" tIns="0" bIns="0">
+            <a:spAutoFit/>
+          </a:bodyPr>
+          <a:lstStyle/>
+          <a:p>
+            <a:pPr>
+              <a:spcAft>
+                <a:spcPts val="800"/>
+              </a:spcAft>
+              <a:defRPr sz="2400" b="1">
                 <a:solidFill>
                   <a:srgbClr val="173E3C"/>
                 </a:solidFill>
@@ -10659,101 +8466,76 @@
               </a:defRPr>
             </a:pPr>
             <a:r>
-              <a:t>01  完成モデル（FBX等）・テクスチャ</a:t>
-            </a:r>
-          </a:p>
-          <a:p>
-            <a:pPr>
-              <a:spcAft>
-                <a:spcPts val="800"/>
-              </a:spcAft>
-              <a:defRPr sz="1400" b="0">
-                <a:solidFill>
-                  <a:srgbClr val="173E3C"/>
-                </a:solidFill>
-                <a:latin typeface="Noto Sans CJK JP"/>
-              </a:defRPr>
-            </a:pPr>
-            <a:r>
-              <a:t>02  Unity用データ・Prefab・マテリアル</a:t>
-            </a:r>
-          </a:p>
-          <a:p>
-            <a:pPr>
-              <a:spcAft>
-                <a:spcPts val="800"/>
-              </a:spcAft>
-              <a:defRPr sz="1400" b="0">
-                <a:solidFill>
-                  <a:srgbClr val="173E3C"/>
-                </a:solidFill>
-                <a:latin typeface="Noto Sans CJK JP"/>
-              </a:defRPr>
-            </a:pPr>
-            <a:r>
-              <a:t>03  対応アバター別の導入データ</a:t>
-            </a:r>
-          </a:p>
-          <a:p>
-            <a:pPr>
-              <a:spcAft>
-                <a:spcPts val="800"/>
-              </a:spcAft>
-              <a:defRPr sz="1400" b="0">
-                <a:solidFill>
-                  <a:srgbClr val="173E3C"/>
-                </a:solidFill>
-                <a:latin typeface="Noto Sans CJK JP"/>
-              </a:defRPr>
-            </a:pPr>
-            <a:r>
-              <a:t>04  編集可能な制作元データ ※範囲合意</a:t>
-            </a:r>
-          </a:p>
-          <a:p>
-            <a:pPr>
-              <a:spcAft>
-                <a:spcPts val="800"/>
-              </a:spcAft>
-              <a:defRPr sz="1400" b="0">
-                <a:solidFill>
-                  <a:srgbClr val="173E3C"/>
-                </a:solidFill>
-                <a:latin typeface="Noto Sans CJK JP"/>
-              </a:defRPr>
-            </a:pPr>
-            <a:r>
-              <a:t>05  日本語の導入手順・検証結果</a:t>
-            </a:r>
-          </a:p>
-          <a:p>
-            <a:pPr>
-              <a:spcAft>
-                <a:spcPts val="800"/>
-              </a:spcAft>
-              <a:defRPr sz="1400" b="0">
-                <a:solidFill>
-                  <a:srgbClr val="173E3C"/>
-                </a:solidFill>
-                <a:latin typeface="Noto Sans CJK JP"/>
-              </a:defRPr>
-            </a:pPr>
-            <a:r>
-              <a:t>06  依存素材・ツール・ライセンス一覧</a:t>
-            </a:r>
-          </a:p>
-        </p:txBody>
-      </p:sp>
-      <p:sp>
-        <p:nvSpPr>
-          <p:cNvPr id="12" name="Rounded Rectangle 11"/>
+              <a:t>完成モデルデータ</a:t>
+            </a:r>
+          </a:p>
+        </p:txBody>
+      </p:sp>
+      <p:sp>
+        <p:nvSpPr>
+          <p:cNvPr id="12" name="TextBox 11"/>
+          <p:cNvSpPr txBox="1"/>
+          <p:nvPr/>
+        </p:nvSpPr>
+        <p:spPr>
+          <a:xfrm>
+            <a:off x="941832" y="4325112"/>
+            <a:ext cx="4645152" cy="914400"/>
+          </a:xfrm>
+          <a:prstGeom prst="rect">
+            <a:avLst/>
+          </a:prstGeom>
+          <a:noFill/>
+        </p:spPr>
+        <p:txBody>
+          <a:bodyPr wrap="square" lIns="0" rIns="0" tIns="0" bIns="0">
+            <a:spAutoFit/>
+          </a:bodyPr>
+          <a:lstStyle/>
+          <a:p>
+            <a:pPr>
+              <a:spcAft>
+                <a:spcPts val="800"/>
+              </a:spcAft>
+              <a:defRPr sz="2200" b="0">
+                <a:solidFill>
+                  <a:srgbClr val="61716B"/>
+                </a:solidFill>
+                <a:latin typeface="Noto Sans CJK JP"/>
+              </a:defRPr>
+            </a:pPr>
+            <a:r>
+              <a:t>FBX等のモデルデータ</a:t>
+            </a:r>
+          </a:p>
+          <a:p>
+            <a:pPr>
+              <a:spcAft>
+                <a:spcPts val="800"/>
+              </a:spcAft>
+              <a:defRPr sz="2200" b="0">
+                <a:solidFill>
+                  <a:srgbClr val="61716B"/>
+                </a:solidFill>
+                <a:latin typeface="Noto Sans CJK JP"/>
+              </a:defRPr>
+            </a:pPr>
+            <a:r>
+              <a:t>テクスチャ</a:t>
+            </a:r>
+          </a:p>
+        </p:txBody>
+      </p:sp>
+      <p:sp>
+        <p:nvSpPr>
+          <p:cNvPr id="13" name="Rounded Rectangle 12"/>
           <p:cNvSpPr/>
           <p:nvPr/>
         </p:nvSpPr>
         <p:spPr>
           <a:xfrm>
-            <a:off x="6254496" y="1929384"/>
-            <a:ext cx="5367528" cy="4096512"/>
+            <a:off x="6272784" y="2048256"/>
+            <a:ext cx="5285232" cy="3867912"/>
           </a:xfrm>
           <a:prstGeom prst="roundRect">
             <a:avLst>
@@ -10791,31 +8573,31 @@
       </p:sp>
       <p:sp>
         <p:nvSpPr>
-          <p:cNvPr id="13" name="TextBox 12"/>
-          <p:cNvSpPr txBox="1"/>
-          <p:nvPr/>
-        </p:nvSpPr>
-        <p:spPr>
-          <a:xfrm>
-            <a:off x="6455664" y="2112264"/>
-            <a:ext cx="4965192" cy="365760"/>
-          </a:xfrm>
-          <a:prstGeom prst="rect">
-            <a:avLst/>
-          </a:prstGeom>
-          <a:noFill/>
-        </p:spPr>
-        <p:txBody>
-          <a:bodyPr wrap="square" lIns="0" rIns="0" tIns="0" bIns="0">
-            <a:spAutoFit/>
-          </a:bodyPr>
-          <a:lstStyle/>
-          <a:p>
-            <a:pPr>
-              <a:spcAft>
-                <a:spcPts val="800"/>
-              </a:spcAft>
-              <a:defRPr sz="1700" b="1">
+          <p:cNvPr id="14" name="TextBox 13"/>
+          <p:cNvSpPr txBox="1"/>
+          <p:nvPr/>
+        </p:nvSpPr>
+        <p:spPr>
+          <a:xfrm>
+            <a:off x="6565392" y="2386584"/>
+            <a:ext cx="1371600" cy="685800"/>
+          </a:xfrm>
+          <a:prstGeom prst="rect">
+            <a:avLst/>
+          </a:prstGeom>
+          <a:noFill/>
+        </p:spPr>
+        <p:txBody>
+          <a:bodyPr wrap="square" lIns="0" rIns="0" tIns="0" bIns="0">
+            <a:spAutoFit/>
+          </a:bodyPr>
+          <a:lstStyle/>
+          <a:p>
+            <a:pPr>
+              <a:spcAft>
+                <a:spcPts val="800"/>
+              </a:spcAft>
+              <a:defRPr sz="3600" b="1">
                 <a:solidFill>
                   <a:srgbClr val="24685E"/>
                 </a:solidFill>
@@ -10823,38 +8605,38 @@
               </a:defRPr>
             </a:pPr>
             <a:r>
-              <a:t>技術条件｜制作前に合意</a:t>
-            </a:r>
-          </a:p>
-        </p:txBody>
-      </p:sp>
-      <p:sp>
-        <p:nvSpPr>
-          <p:cNvPr id="14" name="TextBox 13"/>
-          <p:cNvSpPr txBox="1"/>
-          <p:nvPr/>
-        </p:nvSpPr>
-        <p:spPr>
-          <a:xfrm>
-            <a:off x="6455664" y="2633472"/>
-            <a:ext cx="4965192" cy="3319272"/>
-          </a:xfrm>
-          <a:prstGeom prst="rect">
-            <a:avLst/>
-          </a:prstGeom>
-          <a:noFill/>
-        </p:spPr>
-        <p:txBody>
-          <a:bodyPr wrap="square" lIns="0" rIns="0" tIns="0" bIns="0">
-            <a:spAutoFit/>
-          </a:bodyPr>
-          <a:lstStyle/>
-          <a:p>
-            <a:pPr>
-              <a:spcAft>
-                <a:spcPts val="800"/>
-              </a:spcAft>
-              <a:defRPr sz="1400" b="0">
+              <a:t>02</a:t>
+            </a:r>
+          </a:p>
+        </p:txBody>
+      </p:sp>
+      <p:sp>
+        <p:nvSpPr>
+          <p:cNvPr id="15" name="TextBox 14"/>
+          <p:cNvSpPr txBox="1"/>
+          <p:nvPr/>
+        </p:nvSpPr>
+        <p:spPr>
+          <a:xfrm>
+            <a:off x="6565392" y="3346704"/>
+            <a:ext cx="4663440" cy="548640"/>
+          </a:xfrm>
+          <a:prstGeom prst="rect">
+            <a:avLst/>
+          </a:prstGeom>
+          <a:noFill/>
+        </p:spPr>
+        <p:txBody>
+          <a:bodyPr wrap="square" lIns="0" rIns="0" tIns="0" bIns="0">
+            <a:spAutoFit/>
+          </a:bodyPr>
+          <a:lstStyle/>
+          <a:p>
+            <a:pPr>
+              <a:spcAft>
+                <a:spcPts val="800"/>
+              </a:spcAft>
+              <a:defRPr sz="2400" b="1">
                 <a:solidFill>
                   <a:srgbClr val="173E3C"/>
                 </a:solidFill>
@@ -10862,126 +8644,62 @@
               </a:defRPr>
             </a:pPr>
             <a:r>
-              <a:t>対象環境：VRChat PC向けを基本案</a:t>
-            </a:r>
-          </a:p>
-          <a:p>
-            <a:pPr>
-              <a:spcAft>
-                <a:spcPts val="800"/>
-              </a:spcAft>
-              <a:defRPr sz="1400" b="0">
-                <a:solidFill>
-                  <a:srgbClr val="173E3C"/>
-                </a:solidFill>
-                <a:latin typeface="Noto Sans CJK JP"/>
-              </a:defRPr>
-            </a:pPr>
-            <a:r>
-              <a:t>Unity／SDK：対応版を固定</a:t>
-            </a:r>
-          </a:p>
-          <a:p>
-            <a:pPr>
-              <a:spcAft>
-                <a:spcPts val="800"/>
-              </a:spcAft>
-              <a:defRPr sz="1400" b="0">
-                <a:solidFill>
-                  <a:srgbClr val="173E3C"/>
-                </a:solidFill>
-                <a:latin typeface="Noto Sans CJK JP"/>
-              </a:defRPr>
-            </a:pPr>
-            <a:r>
-              <a:t>シェーダー／導入補助ツール：事前合意</a:t>
-            </a:r>
-          </a:p>
-          <a:p>
-            <a:pPr>
-              <a:spcAft>
-                <a:spcPts val="800"/>
-              </a:spcAft>
-              <a:defRPr sz="1400" b="0">
-                <a:solidFill>
-                  <a:srgbClr val="173E3C"/>
-                </a:solidFill>
-                <a:latin typeface="Noto Sans CJK JP"/>
-              </a:defRPr>
-            </a:pPr>
-            <a:r>
-              <a:t>負荷上限：三角形数・素材数・容量等を提示</a:t>
-            </a:r>
-          </a:p>
-          <a:p>
-            <a:pPr>
-              <a:spcAft>
-                <a:spcPts val="800"/>
-              </a:spcAft>
-              <a:defRPr sz="1400" b="0">
-                <a:solidFill>
-                  <a:srgbClr val="173E3C"/>
-                </a:solidFill>
-                <a:latin typeface="Noto Sans CJK JP"/>
-              </a:defRPr>
-            </a:pPr>
-            <a:r>
-              <a:t>Quest対応／着脱／物理挙動：要確認</a:t>
-            </a:r>
-          </a:p>
-          <a:p>
-            <a:pPr>
-              <a:spcAft>
-                <a:spcPts val="800"/>
-              </a:spcAft>
-              <a:defRPr sz="1400" b="0">
-                <a:solidFill>
-                  <a:srgbClr val="173E3C"/>
-                </a:solidFill>
-                <a:latin typeface="Noto Sans CJK JP"/>
-              </a:defRPr>
-            </a:pPr>
-            <a:r>
-              <a:t>ロゴ：正式支給データと承認に従う</a:t>
-            </a:r>
-          </a:p>
-        </p:txBody>
-      </p:sp>
-      <p:sp>
-        <p:nvSpPr>
-          <p:cNvPr id="15" name="TextBox 14"/>
-          <p:cNvSpPr txBox="1"/>
-          <p:nvPr/>
-        </p:nvSpPr>
-        <p:spPr>
-          <a:xfrm>
-            <a:off x="658368" y="6144768"/>
-            <a:ext cx="10972800" cy="201168"/>
-          </a:xfrm>
-          <a:prstGeom prst="rect">
-            <a:avLst/>
-          </a:prstGeom>
-          <a:noFill/>
-        </p:spPr>
-        <p:txBody>
-          <a:bodyPr wrap="square" lIns="0" rIns="0" tIns="0" bIns="0">
-            <a:spAutoFit/>
-          </a:bodyPr>
-          <a:lstStyle/>
-          <a:p>
-            <a:pPr>
-              <a:spcAft>
-                <a:spcPts val="800"/>
-              </a:spcAft>
-              <a:defRPr sz="1100" b="1">
-                <a:solidFill>
-                  <a:srgbClr val="24685E"/>
-                </a:solidFill>
-                <a:latin typeface="Noto Sans CJK JP"/>
-              </a:defRPr>
-            </a:pPr>
-            <a:r>
-              <a:t>配布パッケージに第三者のアバター本体・素体・テクスチャ等を含めないこと。</a:t>
+              <a:t>Unity用データ</a:t>
+            </a:r>
+          </a:p>
+        </p:txBody>
+      </p:sp>
+      <p:sp>
+        <p:nvSpPr>
+          <p:cNvPr id="16" name="TextBox 15"/>
+          <p:cNvSpPr txBox="1"/>
+          <p:nvPr/>
+        </p:nvSpPr>
+        <p:spPr>
+          <a:xfrm>
+            <a:off x="6583680" y="4325112"/>
+            <a:ext cx="4645152" cy="914400"/>
+          </a:xfrm>
+          <a:prstGeom prst="rect">
+            <a:avLst/>
+          </a:prstGeom>
+          <a:noFill/>
+        </p:spPr>
+        <p:txBody>
+          <a:bodyPr wrap="square" lIns="0" rIns="0" tIns="0" bIns="0">
+            <a:spAutoFit/>
+          </a:bodyPr>
+          <a:lstStyle/>
+          <a:p>
+            <a:pPr>
+              <a:spcAft>
+                <a:spcPts val="800"/>
+              </a:spcAft>
+              <a:defRPr sz="2200" b="0">
+                <a:solidFill>
+                  <a:srgbClr val="61716B"/>
+                </a:solidFill>
+                <a:latin typeface="Noto Sans CJK JP"/>
+              </a:defRPr>
+            </a:pPr>
+            <a:r>
+              <a:t>Prefab</a:t>
+            </a:r>
+          </a:p>
+          <a:p>
+            <a:pPr>
+              <a:spcAft>
+                <a:spcPts val="800"/>
+              </a:spcAft>
+              <a:defRPr sz="2200" b="0">
+                <a:solidFill>
+                  <a:srgbClr val="61716B"/>
+                </a:solidFill>
+                <a:latin typeface="Noto Sans CJK JP"/>
+              </a:defRPr>
+            </a:pPr>
+            <a:r>
+              <a:t>マテリアル</a:t>
             </a:r>
           </a:p>
         </p:txBody>
@@ -11089,7 +8807,7 @@
               </a:defRPr>
             </a:pPr>
             <a:r>
-              <a:t>07 / REVIEW &amp; ACCEPTANCE</a:t>
+              <a:t>07 / NEXT STEPS</a:t>
             </a:r>
           </a:p>
         </p:txBody>
@@ -11128,7 +8846,7 @@
               </a:defRPr>
             </a:pPr>
             <a:r>
-              <a:t>段階確認で、見た目と着用時の品質を揃える</a:t>
+              <a:t>制作の進め方</a:t>
             </a:r>
           </a:p>
         </p:txBody>
@@ -11167,7 +8885,7 @@
               </a:defRPr>
             </a:pPr>
             <a:r>
-              <a:t>代表アバター1体でフィットを確認し、承認後に残り4種へ展開します。</a:t>
+              <a:t>イメージを確認してから制作し、完成後に納品いただきます。</a:t>
             </a:r>
           </a:p>
         </p:txBody>
@@ -11249,7 +8967,7 @@
               </a:defRPr>
             </a:pPr>
             <a:r>
-              <a:t>アース製薬 企業ブース｜3Dお風呂セット 制作発注資料｜仕様確認用 v0.3</a:t>
+              <a:t>アース製薬 企業ブース｜3Dお風呂セット 制作発注資料｜制作内容 v0.4</a:t>
             </a:r>
           </a:p>
         </p:txBody>
@@ -11293,592 +9011,79 @@
           </a:p>
         </p:txBody>
       </p:sp>
-      <p:sp>
-        <p:nvSpPr>
-          <p:cNvPr id="9" name="Rounded Rectangle 8"/>
+      <p:pic>
+        <p:nvPicPr>
+          <p:cNvPr id="9" name="Picture 8" descr="exec-871844d4-edbb-4a08-9d69-90132a8b8d7d.png"/>
+          <p:cNvPicPr>
+            <a:picLocks noChangeAspect="1"/>
+          </p:cNvPicPr>
+          <p:nvPr/>
+        </p:nvPicPr>
+        <p:blipFill>
+          <a:blip r:embed="rId2"/>
+          <a:stretch>
+            <a:fillRect/>
+          </a:stretch>
+        </p:blipFill>
+        <p:spPr>
+          <a:xfrm>
+            <a:off x="640080" y="1920240"/>
+            <a:ext cx="4069080" cy="4069080"/>
+          </a:xfrm>
+          <a:prstGeom prst="rect">
+            <a:avLst/>
+          </a:prstGeom>
+        </p:spPr>
+      </p:pic>
+      <p:sp>
+        <p:nvSpPr>
+          <p:cNvPr id="10" name="TextBox 9"/>
+          <p:cNvSpPr txBox="1"/>
+          <p:nvPr/>
+        </p:nvSpPr>
+        <p:spPr>
+          <a:xfrm>
+            <a:off x="640080" y="6089904"/>
+            <a:ext cx="4114800" cy="274320"/>
+          </a:xfrm>
+          <a:prstGeom prst="rect">
+            <a:avLst/>
+          </a:prstGeom>
+          <a:noFill/>
+        </p:spPr>
+        <p:txBody>
+          <a:bodyPr wrap="square" lIns="0" rIns="0" tIns="0" bIns="0">
+            <a:spAutoFit/>
+          </a:bodyPr>
+          <a:lstStyle/>
+          <a:p>
+            <a:pPr>
+              <a:spcAft>
+                <a:spcPts val="800"/>
+              </a:spcAft>
+              <a:defRPr sz="800" b="0">
+                <a:solidFill>
+                  <a:srgbClr val="61716B"/>
+                </a:solidFill>
+                <a:latin typeface="Noto Sans CJK JP"/>
+              </a:defRPr>
+            </a:pPr>
+            <a:r>
+              <a:t>参考イメージ（AI生成）</a:t>
+            </a:r>
+          </a:p>
+        </p:txBody>
+      </p:sp>
+      <p:sp>
+        <p:nvSpPr>
+          <p:cNvPr id="11" name="Rounded Rectangle 10"/>
           <p:cNvSpPr/>
           <p:nvPr/>
         </p:nvSpPr>
         <p:spPr>
           <a:xfrm>
-            <a:off x="612648" y="1975104"/>
-            <a:ext cx="2112264" cy="676656"/>
-          </a:xfrm>
-          <a:prstGeom prst="roundRect">
-            <a:avLst>
-              <a:gd name="adj" fmla="val 10000"/>
-            </a:avLst>
-          </a:prstGeom>
-          <a:solidFill>
-            <a:srgbClr val="24685E"/>
-          </a:solidFill>
-          <a:ln>
-            <a:noFill/>
-          </a:ln>
-        </p:spPr>
-        <p:style>
-          <a:lnRef idx="1">
-            <a:schemeClr val="accent1"/>
-          </a:lnRef>
-          <a:fillRef idx="3">
-            <a:schemeClr val="accent1"/>
-          </a:fillRef>
-          <a:effectRef idx="2">
-            <a:schemeClr val="accent1"/>
-          </a:effectRef>
-          <a:fontRef idx="minor">
-            <a:schemeClr val="lt1"/>
-          </a:fontRef>
-        </p:style>
-        <p:txBody>
-          <a:bodyPr rtlCol="0" anchor="ctr"/>
-          <a:lstStyle/>
-          <a:p>
-            <a:pPr algn="ctr"/>
-          </a:p>
-        </p:txBody>
-      </p:sp>
-      <p:sp>
-        <p:nvSpPr>
-          <p:cNvPr id="10" name="TextBox 9"/>
-          <p:cNvSpPr txBox="1"/>
-          <p:nvPr/>
-        </p:nvSpPr>
-        <p:spPr>
-          <a:xfrm>
-            <a:off x="722376" y="2176272"/>
-            <a:ext cx="1901952" cy="283464"/>
-          </a:xfrm>
-          <a:prstGeom prst="rect">
-            <a:avLst/>
-          </a:prstGeom>
-          <a:noFill/>
-        </p:spPr>
-        <p:txBody>
-          <a:bodyPr wrap="square" lIns="0" rIns="0" tIns="0" bIns="0">
-            <a:spAutoFit/>
-          </a:bodyPr>
-          <a:lstStyle/>
-          <a:p>
-            <a:pPr>
-              <a:spcAft>
-                <a:spcPts val="800"/>
-              </a:spcAft>
-              <a:defRPr sz="1500" b="1">
-                <a:solidFill>
-                  <a:srgbClr val="FFFFFF"/>
-                </a:solidFill>
-                <a:latin typeface="Noto Sans CJK JP"/>
-              </a:defRPr>
-            </a:pPr>
-            <a:r>
-              <a:t>仕様合意</a:t>
-            </a:r>
-          </a:p>
-        </p:txBody>
-      </p:sp>
-      <p:sp>
-        <p:nvSpPr>
-          <p:cNvPr id="11" name="TextBox 10"/>
-          <p:cNvSpPr txBox="1"/>
-          <p:nvPr/>
-        </p:nvSpPr>
-        <p:spPr>
-          <a:xfrm>
-            <a:off x="2734056" y="2121408"/>
-            <a:ext cx="164592" cy="274320"/>
-          </a:xfrm>
-          <a:prstGeom prst="rect">
-            <a:avLst/>
-          </a:prstGeom>
-          <a:noFill/>
-        </p:spPr>
-        <p:txBody>
-          <a:bodyPr wrap="square" lIns="0" rIns="0" tIns="0" bIns="0">
-            <a:spAutoFit/>
-          </a:bodyPr>
-          <a:lstStyle/>
-          <a:p>
-            <a:pPr>
-              <a:spcAft>
-                <a:spcPts val="800"/>
-              </a:spcAft>
-              <a:defRPr sz="2000" b="1">
-                <a:solidFill>
-                  <a:srgbClr val="24685E"/>
-                </a:solidFill>
-                <a:latin typeface="Noto Sans CJK JP"/>
-              </a:defRPr>
-            </a:pPr>
-            <a:r>
-              <a:t>›</a:t>
-            </a:r>
-          </a:p>
-        </p:txBody>
-      </p:sp>
-      <p:sp>
-        <p:nvSpPr>
-          <p:cNvPr id="12" name="Rounded Rectangle 11"/>
-          <p:cNvSpPr/>
-          <p:nvPr/>
-        </p:nvSpPr>
-        <p:spPr>
-          <a:xfrm>
-            <a:off x="2889504" y="1975104"/>
-            <a:ext cx="2112264" cy="676656"/>
-          </a:xfrm>
-          <a:prstGeom prst="roundRect">
-            <a:avLst>
-              <a:gd name="adj" fmla="val 10000"/>
-            </a:avLst>
-          </a:prstGeom>
-          <a:solidFill>
-            <a:srgbClr val="24685E"/>
-          </a:solidFill>
-          <a:ln>
-            <a:noFill/>
-          </a:ln>
-        </p:spPr>
-        <p:style>
-          <a:lnRef idx="1">
-            <a:schemeClr val="accent1"/>
-          </a:lnRef>
-          <a:fillRef idx="3">
-            <a:schemeClr val="accent1"/>
-          </a:fillRef>
-          <a:effectRef idx="2">
-            <a:schemeClr val="accent1"/>
-          </a:effectRef>
-          <a:fontRef idx="minor">
-            <a:schemeClr val="lt1"/>
-          </a:fontRef>
-        </p:style>
-        <p:txBody>
-          <a:bodyPr rtlCol="0" anchor="ctr"/>
-          <a:lstStyle/>
-          <a:p>
-            <a:pPr algn="ctr"/>
-          </a:p>
-        </p:txBody>
-      </p:sp>
-      <p:sp>
-        <p:nvSpPr>
-          <p:cNvPr id="13" name="TextBox 12"/>
-          <p:cNvSpPr txBox="1"/>
-          <p:nvPr/>
-        </p:nvSpPr>
-        <p:spPr>
-          <a:xfrm>
-            <a:off x="2999232" y="2176272"/>
-            <a:ext cx="1901952" cy="283464"/>
-          </a:xfrm>
-          <a:prstGeom prst="rect">
-            <a:avLst/>
-          </a:prstGeom>
-          <a:noFill/>
-        </p:spPr>
-        <p:txBody>
-          <a:bodyPr wrap="square" lIns="0" rIns="0" tIns="0" bIns="0">
-            <a:spAutoFit/>
-          </a:bodyPr>
-          <a:lstStyle/>
-          <a:p>
-            <a:pPr>
-              <a:spcAft>
-                <a:spcPts val="800"/>
-              </a:spcAft>
-              <a:defRPr sz="1500" b="1">
-                <a:solidFill>
-                  <a:srgbClr val="FFFFFF"/>
-                </a:solidFill>
-                <a:latin typeface="Noto Sans CJK JP"/>
-              </a:defRPr>
-            </a:pPr>
-            <a:r>
-              <a:t>ラフ承認</a:t>
-            </a:r>
-          </a:p>
-        </p:txBody>
-      </p:sp>
-      <p:sp>
-        <p:nvSpPr>
-          <p:cNvPr id="14" name="TextBox 13"/>
-          <p:cNvSpPr txBox="1"/>
-          <p:nvPr/>
-        </p:nvSpPr>
-        <p:spPr>
-          <a:xfrm>
-            <a:off x="5010912" y="2121408"/>
-            <a:ext cx="164592" cy="274320"/>
-          </a:xfrm>
-          <a:prstGeom prst="rect">
-            <a:avLst/>
-          </a:prstGeom>
-          <a:noFill/>
-        </p:spPr>
-        <p:txBody>
-          <a:bodyPr wrap="square" lIns="0" rIns="0" tIns="0" bIns="0">
-            <a:spAutoFit/>
-          </a:bodyPr>
-          <a:lstStyle/>
-          <a:p>
-            <a:pPr>
-              <a:spcAft>
-                <a:spcPts val="800"/>
-              </a:spcAft>
-              <a:defRPr sz="2000" b="1">
-                <a:solidFill>
-                  <a:srgbClr val="24685E"/>
-                </a:solidFill>
-                <a:latin typeface="Noto Sans CJK JP"/>
-              </a:defRPr>
-            </a:pPr>
-            <a:r>
-              <a:t>›</a:t>
-            </a:r>
-          </a:p>
-        </p:txBody>
-      </p:sp>
-      <p:sp>
-        <p:nvSpPr>
-          <p:cNvPr id="15" name="Rounded Rectangle 14"/>
-          <p:cNvSpPr/>
-          <p:nvPr/>
-        </p:nvSpPr>
-        <p:spPr>
-          <a:xfrm>
-            <a:off x="5166360" y="1975104"/>
-            <a:ext cx="2112264" cy="676656"/>
-          </a:xfrm>
-          <a:prstGeom prst="roundRect">
-            <a:avLst>
-              <a:gd name="adj" fmla="val 10000"/>
-            </a:avLst>
-          </a:prstGeom>
-          <a:solidFill>
-            <a:srgbClr val="24685E"/>
-          </a:solidFill>
-          <a:ln>
-            <a:noFill/>
-          </a:ln>
-        </p:spPr>
-        <p:style>
-          <a:lnRef idx="1">
-            <a:schemeClr val="accent1"/>
-          </a:lnRef>
-          <a:fillRef idx="3">
-            <a:schemeClr val="accent1"/>
-          </a:fillRef>
-          <a:effectRef idx="2">
-            <a:schemeClr val="accent1"/>
-          </a:effectRef>
-          <a:fontRef idx="minor">
-            <a:schemeClr val="lt1"/>
-          </a:fontRef>
-        </p:style>
-        <p:txBody>
-          <a:bodyPr rtlCol="0" anchor="ctr"/>
-          <a:lstStyle/>
-          <a:p>
-            <a:pPr algn="ctr"/>
-          </a:p>
-        </p:txBody>
-      </p:sp>
-      <p:sp>
-        <p:nvSpPr>
-          <p:cNvPr id="16" name="TextBox 15"/>
-          <p:cNvSpPr txBox="1"/>
-          <p:nvPr/>
-        </p:nvSpPr>
-        <p:spPr>
-          <a:xfrm>
-            <a:off x="5276088" y="2176272"/>
-            <a:ext cx="1901952" cy="283464"/>
-          </a:xfrm>
-          <a:prstGeom prst="rect">
-            <a:avLst/>
-          </a:prstGeom>
-          <a:noFill/>
-        </p:spPr>
-        <p:txBody>
-          <a:bodyPr wrap="square" lIns="0" rIns="0" tIns="0" bIns="0">
-            <a:spAutoFit/>
-          </a:bodyPr>
-          <a:lstStyle/>
-          <a:p>
-            <a:pPr>
-              <a:spcAft>
-                <a:spcPts val="800"/>
-              </a:spcAft>
-              <a:defRPr sz="1500" b="1">
-                <a:solidFill>
-                  <a:srgbClr val="FFFFFF"/>
-                </a:solidFill>
-                <a:latin typeface="Noto Sans CJK JP"/>
-              </a:defRPr>
-            </a:pPr>
-            <a:r>
-              <a:t>代表1体で検証</a:t>
-            </a:r>
-          </a:p>
-        </p:txBody>
-      </p:sp>
-      <p:sp>
-        <p:nvSpPr>
-          <p:cNvPr id="17" name="TextBox 16"/>
-          <p:cNvSpPr txBox="1"/>
-          <p:nvPr/>
-        </p:nvSpPr>
-        <p:spPr>
-          <a:xfrm>
-            <a:off x="7287768" y="2121408"/>
-            <a:ext cx="164592" cy="274320"/>
-          </a:xfrm>
-          <a:prstGeom prst="rect">
-            <a:avLst/>
-          </a:prstGeom>
-          <a:noFill/>
-        </p:spPr>
-        <p:txBody>
-          <a:bodyPr wrap="square" lIns="0" rIns="0" tIns="0" bIns="0">
-            <a:spAutoFit/>
-          </a:bodyPr>
-          <a:lstStyle/>
-          <a:p>
-            <a:pPr>
-              <a:spcAft>
-                <a:spcPts val="800"/>
-              </a:spcAft>
-              <a:defRPr sz="2000" b="1">
-                <a:solidFill>
-                  <a:srgbClr val="24685E"/>
-                </a:solidFill>
-                <a:latin typeface="Noto Sans CJK JP"/>
-              </a:defRPr>
-            </a:pPr>
-            <a:r>
-              <a:t>›</a:t>
-            </a:r>
-          </a:p>
-        </p:txBody>
-      </p:sp>
-      <p:sp>
-        <p:nvSpPr>
-          <p:cNvPr id="18" name="Rounded Rectangle 17"/>
-          <p:cNvSpPr/>
-          <p:nvPr/>
-        </p:nvSpPr>
-        <p:spPr>
-          <a:xfrm>
-            <a:off x="7443216" y="1975104"/>
-            <a:ext cx="2112264" cy="676656"/>
-          </a:xfrm>
-          <a:prstGeom prst="roundRect">
-            <a:avLst>
-              <a:gd name="adj" fmla="val 10000"/>
-            </a:avLst>
-          </a:prstGeom>
-          <a:solidFill>
-            <a:srgbClr val="24685E"/>
-          </a:solidFill>
-          <a:ln>
-            <a:noFill/>
-          </a:ln>
-        </p:spPr>
-        <p:style>
-          <a:lnRef idx="1">
-            <a:schemeClr val="accent1"/>
-          </a:lnRef>
-          <a:fillRef idx="3">
-            <a:schemeClr val="accent1"/>
-          </a:fillRef>
-          <a:effectRef idx="2">
-            <a:schemeClr val="accent1"/>
-          </a:effectRef>
-          <a:fontRef idx="minor">
-            <a:schemeClr val="lt1"/>
-          </a:fontRef>
-        </p:style>
-        <p:txBody>
-          <a:bodyPr rtlCol="0" anchor="ctr"/>
-          <a:lstStyle/>
-          <a:p>
-            <a:pPr algn="ctr"/>
-          </a:p>
-        </p:txBody>
-      </p:sp>
-      <p:sp>
-        <p:nvSpPr>
-          <p:cNvPr id="19" name="TextBox 18"/>
-          <p:cNvSpPr txBox="1"/>
-          <p:nvPr/>
-        </p:nvSpPr>
-        <p:spPr>
-          <a:xfrm>
-            <a:off x="7552944" y="2176272"/>
-            <a:ext cx="1901952" cy="283464"/>
-          </a:xfrm>
-          <a:prstGeom prst="rect">
-            <a:avLst/>
-          </a:prstGeom>
-          <a:noFill/>
-        </p:spPr>
-        <p:txBody>
-          <a:bodyPr wrap="square" lIns="0" rIns="0" tIns="0" bIns="0">
-            <a:spAutoFit/>
-          </a:bodyPr>
-          <a:lstStyle/>
-          <a:p>
-            <a:pPr>
-              <a:spcAft>
-                <a:spcPts val="800"/>
-              </a:spcAft>
-              <a:defRPr sz="1500" b="1">
-                <a:solidFill>
-                  <a:srgbClr val="FFFFFF"/>
-                </a:solidFill>
-                <a:latin typeface="Noto Sans CJK JP"/>
-              </a:defRPr>
-            </a:pPr>
-            <a:r>
-              <a:t>5種へ展開</a:t>
-            </a:r>
-          </a:p>
-        </p:txBody>
-      </p:sp>
-      <p:sp>
-        <p:nvSpPr>
-          <p:cNvPr id="20" name="TextBox 19"/>
-          <p:cNvSpPr txBox="1"/>
-          <p:nvPr/>
-        </p:nvSpPr>
-        <p:spPr>
-          <a:xfrm>
-            <a:off x="9564624" y="2121408"/>
-            <a:ext cx="164592" cy="274320"/>
-          </a:xfrm>
-          <a:prstGeom prst="rect">
-            <a:avLst/>
-          </a:prstGeom>
-          <a:noFill/>
-        </p:spPr>
-        <p:txBody>
-          <a:bodyPr wrap="square" lIns="0" rIns="0" tIns="0" bIns="0">
-            <a:spAutoFit/>
-          </a:bodyPr>
-          <a:lstStyle/>
-          <a:p>
-            <a:pPr>
-              <a:spcAft>
-                <a:spcPts val="800"/>
-              </a:spcAft>
-              <a:defRPr sz="2000" b="1">
-                <a:solidFill>
-                  <a:srgbClr val="24685E"/>
-                </a:solidFill>
-                <a:latin typeface="Noto Sans CJK JP"/>
-              </a:defRPr>
-            </a:pPr>
-            <a:r>
-              <a:t>›</a:t>
-            </a:r>
-          </a:p>
-        </p:txBody>
-      </p:sp>
-      <p:sp>
-        <p:nvSpPr>
-          <p:cNvPr id="21" name="Rounded Rectangle 20"/>
-          <p:cNvSpPr/>
-          <p:nvPr/>
-        </p:nvSpPr>
-        <p:spPr>
-          <a:xfrm>
-            <a:off x="9720072" y="1975104"/>
-            <a:ext cx="2112264" cy="676656"/>
-          </a:xfrm>
-          <a:prstGeom prst="roundRect">
-            <a:avLst>
-              <a:gd name="adj" fmla="val 10000"/>
-            </a:avLst>
-          </a:prstGeom>
-          <a:solidFill>
-            <a:srgbClr val="24685E"/>
-          </a:solidFill>
-          <a:ln>
-            <a:noFill/>
-          </a:ln>
-        </p:spPr>
-        <p:style>
-          <a:lnRef idx="1">
-            <a:schemeClr val="accent1"/>
-          </a:lnRef>
-          <a:fillRef idx="3">
-            <a:schemeClr val="accent1"/>
-          </a:fillRef>
-          <a:effectRef idx="2">
-            <a:schemeClr val="accent1"/>
-          </a:effectRef>
-          <a:fontRef idx="minor">
-            <a:schemeClr val="lt1"/>
-          </a:fontRef>
-        </p:style>
-        <p:txBody>
-          <a:bodyPr rtlCol="0" anchor="ctr"/>
-          <a:lstStyle/>
-          <a:p>
-            <a:pPr algn="ctr"/>
-          </a:p>
-        </p:txBody>
-      </p:sp>
-      <p:sp>
-        <p:nvSpPr>
-          <p:cNvPr id="22" name="TextBox 21"/>
-          <p:cNvSpPr txBox="1"/>
-          <p:nvPr/>
-        </p:nvSpPr>
-        <p:spPr>
-          <a:xfrm>
-            <a:off x="9829800" y="2176272"/>
-            <a:ext cx="1901952" cy="283464"/>
-          </a:xfrm>
-          <a:prstGeom prst="rect">
-            <a:avLst/>
-          </a:prstGeom>
-          <a:noFill/>
-        </p:spPr>
-        <p:txBody>
-          <a:bodyPr wrap="square" lIns="0" rIns="0" tIns="0" bIns="0">
-            <a:spAutoFit/>
-          </a:bodyPr>
-          <a:lstStyle/>
-          <a:p>
-            <a:pPr>
-              <a:spcAft>
-                <a:spcPts val="800"/>
-              </a:spcAft>
-              <a:defRPr sz="1500" b="1">
-                <a:solidFill>
-                  <a:srgbClr val="FFFFFF"/>
-                </a:solidFill>
-                <a:latin typeface="Noto Sans CJK JP"/>
-              </a:defRPr>
-            </a:pPr>
-            <a:r>
-              <a:t>配布確認・納品</a:t>
-            </a:r>
-          </a:p>
-        </p:txBody>
-      </p:sp>
-      <p:sp>
-        <p:nvSpPr>
-          <p:cNvPr id="23" name="Rounded Rectangle 22"/>
-          <p:cNvSpPr/>
-          <p:nvPr/>
-        </p:nvSpPr>
-        <p:spPr>
-          <a:xfrm>
-            <a:off x="603504" y="2999232"/>
-            <a:ext cx="5458968" cy="1188720"/>
+            <a:off x="5248656" y="2011680"/>
+            <a:ext cx="5788152" cy="1060704"/>
           </a:xfrm>
           <a:prstGeom prst="roundRect">
             <a:avLst>
@@ -11916,31 +9121,31 @@
       </p:sp>
       <p:sp>
         <p:nvSpPr>
-          <p:cNvPr id="24" name="TextBox 23"/>
-          <p:cNvSpPr txBox="1"/>
-          <p:nvPr/>
-        </p:nvSpPr>
-        <p:spPr>
-          <a:xfrm>
-            <a:off x="804672" y="3182112"/>
-            <a:ext cx="5056631" cy="365760"/>
-          </a:xfrm>
-          <a:prstGeom prst="rect">
-            <a:avLst/>
-          </a:prstGeom>
-          <a:noFill/>
-        </p:spPr>
-        <p:txBody>
-          <a:bodyPr wrap="square" lIns="0" rIns="0" tIns="0" bIns="0">
-            <a:spAutoFit/>
-          </a:bodyPr>
-          <a:lstStyle/>
-          <a:p>
-            <a:pPr>
-              <a:spcAft>
-                <a:spcPts val="800"/>
-              </a:spcAft>
-              <a:defRPr sz="1700" b="1">
+          <p:cNvPr id="12" name="TextBox 11"/>
+          <p:cNvSpPr txBox="1"/>
+          <p:nvPr/>
+        </p:nvSpPr>
+        <p:spPr>
+          <a:xfrm>
+            <a:off x="5486400" y="2194560"/>
+            <a:ext cx="548640" cy="457200"/>
+          </a:xfrm>
+          <a:prstGeom prst="rect">
+            <a:avLst/>
+          </a:prstGeom>
+          <a:noFill/>
+        </p:spPr>
+        <p:txBody>
+          <a:bodyPr wrap="square" lIns="0" rIns="0" tIns="0" bIns="0">
+            <a:spAutoFit/>
+          </a:bodyPr>
+          <a:lstStyle/>
+          <a:p>
+            <a:pPr>
+              <a:spcAft>
+                <a:spcPts val="800"/>
+              </a:spcAft>
+              <a:defRPr sz="2400" b="1">
                 <a:solidFill>
                   <a:srgbClr val="24685E"/>
                 </a:solidFill>
@@ -11948,21 +9153,60 @@
               </a:defRPr>
             </a:pPr>
             <a:r>
-              <a:t>外観・導入</a:t>
-            </a:r>
-          </a:p>
-        </p:txBody>
-      </p:sp>
-      <p:sp>
-        <p:nvSpPr>
-          <p:cNvPr id="25" name="TextBox 24"/>
-          <p:cNvSpPr txBox="1"/>
-          <p:nvPr/>
-        </p:nvSpPr>
-        <p:spPr>
-          <a:xfrm>
-            <a:off x="804672" y="3703320"/>
-            <a:ext cx="5056631" cy="411480"/>
+              <a:t>01</a:t>
+            </a:r>
+          </a:p>
+        </p:txBody>
+      </p:sp>
+      <p:sp>
+        <p:nvSpPr>
+          <p:cNvPr id="13" name="TextBox 12"/>
+          <p:cNvSpPr txBox="1"/>
+          <p:nvPr/>
+        </p:nvSpPr>
+        <p:spPr>
+          <a:xfrm>
+            <a:off x="6336792" y="2157984"/>
+            <a:ext cx="4480560" cy="365760"/>
+          </a:xfrm>
+          <a:prstGeom prst="rect">
+            <a:avLst/>
+          </a:prstGeom>
+          <a:noFill/>
+        </p:spPr>
+        <p:txBody>
+          <a:bodyPr wrap="square" lIns="0" rIns="0" tIns="0" bIns="0">
+            <a:spAutoFit/>
+          </a:bodyPr>
+          <a:lstStyle/>
+          <a:p>
+            <a:pPr>
+              <a:spcAft>
+                <a:spcPts val="800"/>
+              </a:spcAft>
+              <a:defRPr sz="2000" b="1">
+                <a:solidFill>
+                  <a:srgbClr val="173E3C"/>
+                </a:solidFill>
+                <a:latin typeface="Noto Sans CJK JP"/>
+              </a:defRPr>
+            </a:pPr>
+            <a:r>
+              <a:t>イメージ確認</a:t>
+            </a:r>
+          </a:p>
+        </p:txBody>
+      </p:sp>
+      <p:sp>
+        <p:nvSpPr>
+          <p:cNvPr id="14" name="TextBox 13"/>
+          <p:cNvSpPr txBox="1"/>
+          <p:nvPr/>
+        </p:nvSpPr>
+        <p:spPr>
+          <a:xfrm>
+            <a:off x="6355080" y="2642616"/>
+            <a:ext cx="4453128" cy="274320"/>
           </a:xfrm>
           <a:prstGeom prst="rect">
             <a:avLst/>
@@ -11981,27 +9225,27 @@
               </a:spcAft>
               <a:defRPr sz="1400" b="0">
                 <a:solidFill>
-                  <a:srgbClr val="173E3C"/>
-                </a:solidFill>
-                <a:latin typeface="Noto Sans CJK JP"/>
-              </a:defRPr>
-            </a:pPr>
-            <a:r>
-              <a:t>承認ラフとの一致／素材欠落・エラーなし／手順どおりに導入可能</a:t>
-            </a:r>
-          </a:p>
-        </p:txBody>
-      </p:sp>
-      <p:sp>
-        <p:nvSpPr>
-          <p:cNvPr id="26" name="Rounded Rectangle 25"/>
+                  <a:srgbClr val="61716B"/>
+                </a:solidFill>
+                <a:latin typeface="Noto Sans CJK JP"/>
+              </a:defRPr>
+            </a:pPr>
+            <a:r>
+              <a:t>作るものの見た目を確認</a:t>
+            </a:r>
+          </a:p>
+        </p:txBody>
+      </p:sp>
+      <p:sp>
+        <p:nvSpPr>
+          <p:cNvPr id="15" name="Rounded Rectangle 14"/>
           <p:cNvSpPr/>
           <p:nvPr/>
         </p:nvSpPr>
         <p:spPr>
           <a:xfrm>
-            <a:off x="6254496" y="2999232"/>
-            <a:ext cx="5367528" cy="1188720"/>
+            <a:off x="5248656" y="3319272"/>
+            <a:ext cx="5788152" cy="1060704"/>
           </a:xfrm>
           <a:prstGeom prst="roundRect">
             <a:avLst>
@@ -12039,31 +9283,31 @@
       </p:sp>
       <p:sp>
         <p:nvSpPr>
-          <p:cNvPr id="27" name="TextBox 26"/>
-          <p:cNvSpPr txBox="1"/>
-          <p:nvPr/>
-        </p:nvSpPr>
-        <p:spPr>
-          <a:xfrm>
-            <a:off x="6455664" y="3182112"/>
-            <a:ext cx="4965192" cy="365760"/>
-          </a:xfrm>
-          <a:prstGeom prst="rect">
-            <a:avLst/>
-          </a:prstGeom>
-          <a:noFill/>
-        </p:spPr>
-        <p:txBody>
-          <a:bodyPr wrap="square" lIns="0" rIns="0" tIns="0" bIns="0">
-            <a:spAutoFit/>
-          </a:bodyPr>
-          <a:lstStyle/>
-          <a:p>
-            <a:pPr>
-              <a:spcAft>
-                <a:spcPts val="800"/>
-              </a:spcAft>
-              <a:defRPr sz="1700" b="1">
+          <p:cNvPr id="16" name="TextBox 15"/>
+          <p:cNvSpPr txBox="1"/>
+          <p:nvPr/>
+        </p:nvSpPr>
+        <p:spPr>
+          <a:xfrm>
+            <a:off x="5486400" y="3502152"/>
+            <a:ext cx="548640" cy="457200"/>
+          </a:xfrm>
+          <a:prstGeom prst="rect">
+            <a:avLst/>
+          </a:prstGeom>
+          <a:noFill/>
+        </p:spPr>
+        <p:txBody>
+          <a:bodyPr wrap="square" lIns="0" rIns="0" tIns="0" bIns="0">
+            <a:spAutoFit/>
+          </a:bodyPr>
+          <a:lstStyle/>
+          <a:p>
+            <a:pPr>
+              <a:spcAft>
+                <a:spcPts val="800"/>
+              </a:spcAft>
+              <a:defRPr sz="2400" b="1">
                 <a:solidFill>
                   <a:srgbClr val="24685E"/>
                 </a:solidFill>
@@ -12071,21 +9315,60 @@
               </a:defRPr>
             </a:pPr>
             <a:r>
-              <a:t>静止時の着用</a:t>
-            </a:r>
-          </a:p>
-        </p:txBody>
-      </p:sp>
-      <p:sp>
-        <p:nvSpPr>
-          <p:cNvPr id="28" name="TextBox 27"/>
-          <p:cNvSpPr txBox="1"/>
-          <p:nvPr/>
-        </p:nvSpPr>
-        <p:spPr>
-          <a:xfrm>
-            <a:off x="6455664" y="3703320"/>
-            <a:ext cx="4965192" cy="411480"/>
+              <a:t>02</a:t>
+            </a:r>
+          </a:p>
+        </p:txBody>
+      </p:sp>
+      <p:sp>
+        <p:nvSpPr>
+          <p:cNvPr id="17" name="TextBox 16"/>
+          <p:cNvSpPr txBox="1"/>
+          <p:nvPr/>
+        </p:nvSpPr>
+        <p:spPr>
+          <a:xfrm>
+            <a:off x="6336792" y="3465576"/>
+            <a:ext cx="4480560" cy="365760"/>
+          </a:xfrm>
+          <a:prstGeom prst="rect">
+            <a:avLst/>
+          </a:prstGeom>
+          <a:noFill/>
+        </p:spPr>
+        <p:txBody>
+          <a:bodyPr wrap="square" lIns="0" rIns="0" tIns="0" bIns="0">
+            <a:spAutoFit/>
+          </a:bodyPr>
+          <a:lstStyle/>
+          <a:p>
+            <a:pPr>
+              <a:spcAft>
+                <a:spcPts val="800"/>
+              </a:spcAft>
+              <a:defRPr sz="2000" b="1">
+                <a:solidFill>
+                  <a:srgbClr val="173E3C"/>
+                </a:solidFill>
+                <a:latin typeface="Noto Sans CJK JP"/>
+              </a:defRPr>
+            </a:pPr>
+            <a:r>
+              <a:t>モデル制作</a:t>
+            </a:r>
+          </a:p>
+        </p:txBody>
+      </p:sp>
+      <p:sp>
+        <p:nvSpPr>
+          <p:cNvPr id="18" name="TextBox 17"/>
+          <p:cNvSpPr txBox="1"/>
+          <p:nvPr/>
+        </p:nvSpPr>
+        <p:spPr>
+          <a:xfrm>
+            <a:off x="6355080" y="3950208"/>
+            <a:ext cx="4453128" cy="274320"/>
           </a:xfrm>
           <a:prstGeom prst="rect">
             <a:avLst/>
@@ -12104,27 +9387,27 @@
               </a:spcAft>
               <a:defRPr sz="1400" b="0">
                 <a:solidFill>
-                  <a:srgbClr val="173E3C"/>
-                </a:solidFill>
-                <a:latin typeface="Noto Sans CJK JP"/>
-              </a:defRPr>
-            </a:pPr>
-            <a:r>
-              <a:t>正面・側面・背面／被覆範囲／胸元・脇・背面・裾の隙間</a:t>
-            </a:r>
-          </a:p>
-        </p:txBody>
-      </p:sp>
-      <p:sp>
-        <p:nvSpPr>
-          <p:cNvPr id="29" name="Rounded Rectangle 28"/>
+                  <a:srgbClr val="61716B"/>
+                </a:solidFill>
+                <a:latin typeface="Noto Sans CJK JP"/>
+              </a:defRPr>
+            </a:pPr>
+            <a:r>
+              <a:t>4アイテムと対応版を制作</a:t>
+            </a:r>
+          </a:p>
+        </p:txBody>
+      </p:sp>
+      <p:sp>
+        <p:nvSpPr>
+          <p:cNvPr id="19" name="Rounded Rectangle 18"/>
           <p:cNvSpPr/>
           <p:nvPr/>
         </p:nvSpPr>
         <p:spPr>
           <a:xfrm>
-            <a:off x="603504" y="4379976"/>
-            <a:ext cx="5458968" cy="1188720"/>
+            <a:off x="5248656" y="4626864"/>
+            <a:ext cx="5788152" cy="1060704"/>
           </a:xfrm>
           <a:prstGeom prst="roundRect">
             <a:avLst>
@@ -12162,31 +9445,31 @@
       </p:sp>
       <p:sp>
         <p:nvSpPr>
-          <p:cNvPr id="30" name="TextBox 29"/>
-          <p:cNvSpPr txBox="1"/>
-          <p:nvPr/>
-        </p:nvSpPr>
-        <p:spPr>
-          <a:xfrm>
-            <a:off x="804672" y="4562856"/>
-            <a:ext cx="5056631" cy="365760"/>
-          </a:xfrm>
-          <a:prstGeom prst="rect">
-            <a:avLst/>
-          </a:prstGeom>
-          <a:noFill/>
-        </p:spPr>
-        <p:txBody>
-          <a:bodyPr wrap="square" lIns="0" rIns="0" tIns="0" bIns="0">
-            <a:spAutoFit/>
-          </a:bodyPr>
-          <a:lstStyle/>
-          <a:p>
-            <a:pPr>
-              <a:spcAft>
-                <a:spcPts val="800"/>
-              </a:spcAft>
-              <a:defRPr sz="1700" b="1">
+          <p:cNvPr id="20" name="TextBox 19"/>
+          <p:cNvSpPr txBox="1"/>
+          <p:nvPr/>
+        </p:nvSpPr>
+        <p:spPr>
+          <a:xfrm>
+            <a:off x="5486400" y="4809744"/>
+            <a:ext cx="548640" cy="457200"/>
+          </a:xfrm>
+          <a:prstGeom prst="rect">
+            <a:avLst/>
+          </a:prstGeom>
+          <a:noFill/>
+        </p:spPr>
+        <p:txBody>
+          <a:bodyPr wrap="square" lIns="0" rIns="0" tIns="0" bIns="0">
+            <a:spAutoFit/>
+          </a:bodyPr>
+          <a:lstStyle/>
+          <a:p>
+            <a:pPr>
+              <a:spcAft>
+                <a:spcPts val="800"/>
+              </a:spcAft>
+              <a:defRPr sz="2400" b="1">
                 <a:solidFill>
                   <a:srgbClr val="24685E"/>
                 </a:solidFill>
@@ -12194,21 +9477,60 @@
               </a:defRPr>
             </a:pPr>
             <a:r>
-              <a:t>動作時の着用</a:t>
-            </a:r>
-          </a:p>
-        </p:txBody>
-      </p:sp>
-      <p:sp>
-        <p:nvSpPr>
-          <p:cNvPr id="31" name="TextBox 30"/>
-          <p:cNvSpPr txBox="1"/>
-          <p:nvPr/>
-        </p:nvSpPr>
-        <p:spPr>
-          <a:xfrm>
-            <a:off x="804672" y="5084064"/>
-            <a:ext cx="5056631" cy="411480"/>
+              <a:t>03</a:t>
+            </a:r>
+          </a:p>
+        </p:txBody>
+      </p:sp>
+      <p:sp>
+        <p:nvSpPr>
+          <p:cNvPr id="21" name="TextBox 20"/>
+          <p:cNvSpPr txBox="1"/>
+          <p:nvPr/>
+        </p:nvSpPr>
+        <p:spPr>
+          <a:xfrm>
+            <a:off x="6336792" y="4773168"/>
+            <a:ext cx="4480560" cy="365760"/>
+          </a:xfrm>
+          <a:prstGeom prst="rect">
+            <a:avLst/>
+          </a:prstGeom>
+          <a:noFill/>
+        </p:spPr>
+        <p:txBody>
+          <a:bodyPr wrap="square" lIns="0" rIns="0" tIns="0" bIns="0">
+            <a:spAutoFit/>
+          </a:bodyPr>
+          <a:lstStyle/>
+          <a:p>
+            <a:pPr>
+              <a:spcAft>
+                <a:spcPts val="800"/>
+              </a:spcAft>
+              <a:defRPr sz="2000" b="1">
+                <a:solidFill>
+                  <a:srgbClr val="173E3C"/>
+                </a:solidFill>
+                <a:latin typeface="Noto Sans CJK JP"/>
+              </a:defRPr>
+            </a:pPr>
+            <a:r>
+              <a:t>完成確認・納品</a:t>
+            </a:r>
+          </a:p>
+        </p:txBody>
+      </p:sp>
+      <p:sp>
+        <p:nvSpPr>
+          <p:cNvPr id="22" name="TextBox 21"/>
+          <p:cNvSpPr txBox="1"/>
+          <p:nvPr/>
+        </p:nvSpPr>
+        <p:spPr>
+          <a:xfrm>
+            <a:off x="6355080" y="5257800"/>
+            <a:ext cx="4453128" cy="274320"/>
           </a:xfrm>
           <a:prstGeom prst="rect">
             <a:avLst/>
@@ -12227,1216 +9549,13 @@
               </a:spcAft>
               <a:defRPr sz="1400" b="0">
                 <a:solidFill>
-                  <a:srgbClr val="173E3C"/>
-                </a:solidFill>
-                <a:latin typeface="Noto Sans CJK JP"/>
-              </a:defRPr>
-            </a:pPr>
-            <a:r>
-              <a:t>歩行・腕上げ・着座・しゃがみ・脚上げで、目立つ破綻がない</a:t>
-            </a:r>
-          </a:p>
-        </p:txBody>
-      </p:sp>
-      <p:sp>
-        <p:nvSpPr>
-          <p:cNvPr id="32" name="Rounded Rectangle 31"/>
-          <p:cNvSpPr/>
-          <p:nvPr/>
-        </p:nvSpPr>
-        <p:spPr>
-          <a:xfrm>
-            <a:off x="6254496" y="4379976"/>
-            <a:ext cx="5367528" cy="1188720"/>
-          </a:xfrm>
-          <a:prstGeom prst="roundRect">
-            <a:avLst>
-              <a:gd name="adj" fmla="val 10000"/>
-            </a:avLst>
-          </a:prstGeom>
-          <a:solidFill>
-            <a:srgbClr val="FFFFFF"/>
-          </a:solidFill>
-          <a:ln>
-            <a:noFill/>
-          </a:ln>
-        </p:spPr>
-        <p:style>
-          <a:lnRef idx="1">
-            <a:schemeClr val="accent1"/>
-          </a:lnRef>
-          <a:fillRef idx="3">
-            <a:schemeClr val="accent1"/>
-          </a:fillRef>
-          <a:effectRef idx="2">
-            <a:schemeClr val="accent1"/>
-          </a:effectRef>
-          <a:fontRef idx="minor">
-            <a:schemeClr val="lt1"/>
-          </a:fontRef>
-        </p:style>
-        <p:txBody>
-          <a:bodyPr rtlCol="0" anchor="ctr"/>
-          <a:lstStyle/>
-          <a:p>
-            <a:pPr algn="ctr"/>
-          </a:p>
-        </p:txBody>
-      </p:sp>
-      <p:sp>
-        <p:nvSpPr>
-          <p:cNvPr id="33" name="TextBox 32"/>
-          <p:cNvSpPr txBox="1"/>
-          <p:nvPr/>
-        </p:nvSpPr>
-        <p:spPr>
-          <a:xfrm>
-            <a:off x="6455664" y="4562856"/>
-            <a:ext cx="4965192" cy="365760"/>
-          </a:xfrm>
-          <a:prstGeom prst="rect">
-            <a:avLst/>
-          </a:prstGeom>
-          <a:noFill/>
-        </p:spPr>
-        <p:txBody>
-          <a:bodyPr wrap="square" lIns="0" rIns="0" tIns="0" bIns="0">
-            <a:spAutoFit/>
-          </a:bodyPr>
-          <a:lstStyle/>
-          <a:p>
-            <a:pPr>
-              <a:spcAft>
-                <a:spcPts val="800"/>
-              </a:spcAft>
-              <a:defRPr sz="1700" b="1">
-                <a:solidFill>
-                  <a:srgbClr val="24685E"/>
-                </a:solidFill>
-                <a:latin typeface="Noto Sans CJK JP"/>
-              </a:defRPr>
-            </a:pPr>
-            <a:r>
-              <a:t>負荷・配布内容</a:t>
-            </a:r>
-          </a:p>
-        </p:txBody>
-      </p:sp>
-      <p:sp>
-        <p:nvSpPr>
-          <p:cNvPr id="34" name="TextBox 33"/>
-          <p:cNvSpPr txBox="1"/>
-          <p:nvPr/>
-        </p:nvSpPr>
-        <p:spPr>
-          <a:xfrm>
-            <a:off x="6455664" y="5084064"/>
-            <a:ext cx="4965192" cy="411480"/>
-          </a:xfrm>
-          <a:prstGeom prst="rect">
-            <a:avLst/>
-          </a:prstGeom>
-          <a:noFill/>
-        </p:spPr>
-        <p:txBody>
-          <a:bodyPr wrap="square" lIns="0" rIns="0" tIns="0" bIns="0">
-            <a:spAutoFit/>
-          </a:bodyPr>
-          <a:lstStyle/>
-          <a:p>
-            <a:pPr>
-              <a:spcAft>
-                <a:spcPts val="800"/>
-              </a:spcAft>
-              <a:defRPr sz="1400" b="0">
-                <a:solidFill>
-                  <a:srgbClr val="173E3C"/>
-                </a:solidFill>
-                <a:latin typeface="Noto Sans CJK JP"/>
-              </a:defRPr>
-            </a:pPr>
-            <a:r>
-              <a:t>合意した上限を満たす／依存条件・既知の制約・権利表記を明記</a:t>
-            </a:r>
-          </a:p>
-        </p:txBody>
-      </p:sp>
-      <p:sp>
-        <p:nvSpPr>
-          <p:cNvPr id="35" name="TextBox 34"/>
-          <p:cNvSpPr txBox="1"/>
-          <p:nvPr/>
-        </p:nvSpPr>
-        <p:spPr>
-          <a:xfrm>
-            <a:off x="658368" y="5897880"/>
-            <a:ext cx="10881360" cy="365760"/>
-          </a:xfrm>
-          <a:prstGeom prst="rect">
-            <a:avLst/>
-          </a:prstGeom>
-          <a:noFill/>
-        </p:spPr>
-        <p:txBody>
-          <a:bodyPr wrap="square" lIns="0" rIns="0" tIns="0" bIns="0">
-            <a:spAutoFit/>
-          </a:bodyPr>
-          <a:lstStyle/>
-          <a:p>
-            <a:pPr>
-              <a:spcAft>
-                <a:spcPts val="800"/>
-              </a:spcAft>
-              <a:defRPr sz="1100" b="0">
-                <a:solidFill>
                   <a:srgbClr val="61716B"/>
                 </a:solidFill>
                 <a:latin typeface="Noto Sans CJK JP"/>
               </a:defRPr>
             </a:pPr>
             <a:r>
-              <a:t>検証ポーズ・体型値・修正回数は事前合意。全ポーズ・全改変に対する貫通ゼロを保証するものではありません。</a:t>
-            </a:r>
-          </a:p>
-        </p:txBody>
-      </p:sp>
-    </p:spTree>
-  </p:cSld>
-  <p:clrMapOvr>
-    <a:masterClrMapping/>
-  </p:clrMapOvr>
-</p:sld>
-</file>
-
-<file path=ppt/slides/slide9.xml><?xml version="1.0" encoding="utf-8"?>
-<p:sld xmlns:a="http://schemas.openxmlformats.org/drawingml/2006/main" xmlns:p="http://schemas.openxmlformats.org/presentationml/2006/main" xmlns:r="http://schemas.openxmlformats.org/officeDocument/2006/relationships">
-  <p:cSld>
-    <p:bg>
-      <p:bgPr>
-        <a:solidFill>
-          <a:srgbClr val="F7FAF8"/>
-        </a:solidFill>
-        <a:effectLst/>
-      </p:bgPr>
-    </p:bg>
-    <p:spTree>
-      <p:nvGrpSpPr>
-        <p:cNvPr id="1" name=""/>
-        <p:cNvGrpSpPr/>
-        <p:nvPr/>
-      </p:nvGrpSpPr>
-      <p:grpSpPr/>
-      <p:sp>
-        <p:nvSpPr>
-          <p:cNvPr id="2" name="Rectangle 1"/>
-          <p:cNvSpPr/>
-          <p:nvPr/>
-        </p:nvSpPr>
-        <p:spPr>
-          <a:xfrm>
-            <a:off x="0" y="0"/>
-            <a:ext cx="128016" cy="6858000"/>
-          </a:xfrm>
-          <a:prstGeom prst="rect">
-            <a:avLst/>
-          </a:prstGeom>
-          <a:solidFill>
-            <a:srgbClr val="24685E"/>
-          </a:solidFill>
-          <a:ln>
-            <a:noFill/>
-          </a:ln>
-        </p:spPr>
-        <p:style>
-          <a:lnRef idx="1">
-            <a:schemeClr val="accent1"/>
-          </a:lnRef>
-          <a:fillRef idx="3">
-            <a:schemeClr val="accent1"/>
-          </a:fillRef>
-          <a:effectRef idx="2">
-            <a:schemeClr val="accent1"/>
-          </a:effectRef>
-          <a:fontRef idx="minor">
-            <a:schemeClr val="lt1"/>
-          </a:fontRef>
-        </p:style>
-        <p:txBody>
-          <a:bodyPr rtlCol="0" anchor="ctr"/>
-          <a:lstStyle/>
-          <a:p>
-            <a:pPr algn="ctr"/>
-          </a:p>
-        </p:txBody>
-      </p:sp>
-      <p:sp>
-        <p:nvSpPr>
-          <p:cNvPr id="3" name="TextBox 2"/>
-          <p:cNvSpPr txBox="1"/>
-          <p:nvPr/>
-        </p:nvSpPr>
-        <p:spPr>
-          <a:xfrm>
-            <a:off x="502920" y="256032"/>
-            <a:ext cx="9144000" cy="274320"/>
-          </a:xfrm>
-          <a:prstGeom prst="rect">
-            <a:avLst/>
-          </a:prstGeom>
-          <a:noFill/>
-        </p:spPr>
-        <p:txBody>
-          <a:bodyPr wrap="square" lIns="0" rIns="0" tIns="0" bIns="0">
-            <a:spAutoFit/>
-          </a:bodyPr>
-          <a:lstStyle/>
-          <a:p>
-            <a:pPr>
-              <a:spcAft>
-                <a:spcPts val="800"/>
-              </a:spcAft>
-              <a:defRPr sz="1100" b="1">
-                <a:solidFill>
-                  <a:srgbClr val="24685E"/>
-                </a:solidFill>
-                <a:latin typeface="Noto Sans CJK JP"/>
-              </a:defRPr>
-            </a:pPr>
-            <a:r>
-              <a:t>08 / SCHEDULE &amp; AGREEMENTS</a:t>
-            </a:r>
-          </a:p>
-        </p:txBody>
-      </p:sp>
-      <p:sp>
-        <p:nvSpPr>
-          <p:cNvPr id="4" name="TextBox 3"/>
-          <p:cNvSpPr txBox="1"/>
-          <p:nvPr/>
-        </p:nvSpPr>
-        <p:spPr>
-          <a:xfrm>
-            <a:off x="502920" y="694944"/>
-            <a:ext cx="11155680" cy="594360"/>
-          </a:xfrm>
-          <a:prstGeom prst="rect">
-            <a:avLst/>
-          </a:prstGeom>
-          <a:noFill/>
-        </p:spPr>
-        <p:txBody>
-          <a:bodyPr wrap="square" lIns="0" rIns="0" tIns="0" bIns="0">
-            <a:spAutoFit/>
-          </a:bodyPr>
-          <a:lstStyle/>
-          <a:p>
-            <a:pPr>
-              <a:spcAft>
-                <a:spcPts val="800"/>
-              </a:spcAft>
-              <a:defRPr sz="2800" b="1">
-                <a:solidFill>
-                  <a:srgbClr val="173E3C"/>
-                </a:solidFill>
-                <a:latin typeface="Noto Sans CJK JP"/>
-              </a:defRPr>
-            </a:pPr>
-            <a:r>
-              <a:t>日程と、正式発注前の確認事項</a:t>
-            </a:r>
-          </a:p>
-        </p:txBody>
-      </p:sp>
-      <p:sp>
-        <p:nvSpPr>
-          <p:cNvPr id="5" name="TextBox 4"/>
-          <p:cNvSpPr txBox="1"/>
-          <p:nvPr/>
-        </p:nvSpPr>
-        <p:spPr>
-          <a:xfrm>
-            <a:off x="521207" y="1344168"/>
-            <a:ext cx="11064240" cy="457200"/>
-          </a:xfrm>
-          <a:prstGeom prst="rect">
-            <a:avLst/>
-          </a:prstGeom>
-          <a:noFill/>
-        </p:spPr>
-        <p:txBody>
-          <a:bodyPr wrap="square" lIns="0" rIns="0" tIns="0" bIns="0">
-            <a:spAutoFit/>
-          </a:bodyPr>
-          <a:lstStyle/>
-          <a:p>
-            <a:pPr>
-              <a:spcAft>
-                <a:spcPts val="800"/>
-              </a:spcAft>
-              <a:defRPr sz="1200" b="0">
-                <a:solidFill>
-                  <a:srgbClr val="61716B"/>
-                </a:solidFill>
-                <a:latin typeface="Noto Sans CJK JP"/>
-              </a:defRPr>
-            </a:pPr>
-            <a:r>
-              <a:t>日程は未記入。決定後に追記します。</a:t>
-            </a:r>
-          </a:p>
-        </p:txBody>
-      </p:sp>
-      <p:sp>
-        <p:nvSpPr>
-          <p:cNvPr id="6" name="Rectangle 5"/>
-          <p:cNvSpPr/>
-          <p:nvPr/>
-        </p:nvSpPr>
-        <p:spPr>
-          <a:xfrm>
-            <a:off x="502920" y="6419088"/>
-            <a:ext cx="11155680" cy="10972"/>
-          </a:xfrm>
-          <a:prstGeom prst="rect">
-            <a:avLst/>
-          </a:prstGeom>
-          <a:solidFill>
-            <a:srgbClr val="CEDFD4"/>
-          </a:solidFill>
-          <a:ln>
-            <a:noFill/>
-          </a:ln>
-        </p:spPr>
-        <p:style>
-          <a:lnRef idx="1">
-            <a:schemeClr val="accent1"/>
-          </a:lnRef>
-          <a:fillRef idx="3">
-            <a:schemeClr val="accent1"/>
-          </a:fillRef>
-          <a:effectRef idx="2">
-            <a:schemeClr val="accent1"/>
-          </a:effectRef>
-          <a:fontRef idx="minor">
-            <a:schemeClr val="lt1"/>
-          </a:fontRef>
-        </p:style>
-        <p:txBody>
-          <a:bodyPr rtlCol="0" anchor="ctr"/>
-          <a:lstStyle/>
-          <a:p>
-            <a:pPr algn="ctr"/>
-          </a:p>
-        </p:txBody>
-      </p:sp>
-      <p:sp>
-        <p:nvSpPr>
-          <p:cNvPr id="7" name="TextBox 6"/>
-          <p:cNvSpPr txBox="1"/>
-          <p:nvPr/>
-        </p:nvSpPr>
-        <p:spPr>
-          <a:xfrm>
-            <a:off x="512064" y="6519672"/>
-            <a:ext cx="9601200" cy="182880"/>
-          </a:xfrm>
-          <a:prstGeom prst="rect">
-            <a:avLst/>
-          </a:prstGeom>
-          <a:noFill/>
-        </p:spPr>
-        <p:txBody>
-          <a:bodyPr wrap="square" lIns="0" rIns="0" tIns="0" bIns="0">
-            <a:spAutoFit/>
-          </a:bodyPr>
-          <a:lstStyle/>
-          <a:p>
-            <a:pPr>
-              <a:spcAft>
-                <a:spcPts val="800"/>
-              </a:spcAft>
-              <a:defRPr sz="800" b="0">
-                <a:solidFill>
-                  <a:srgbClr val="61716B"/>
-                </a:solidFill>
-                <a:latin typeface="Noto Sans CJK JP"/>
-              </a:defRPr>
-            </a:pPr>
-            <a:r>
-              <a:t>アース製薬 企業ブース｜3Dお風呂セット 制作発注資料｜仕様確認用 v0.3</a:t>
-            </a:r>
-          </a:p>
-        </p:txBody>
-      </p:sp>
-      <p:sp>
-        <p:nvSpPr>
-          <p:cNvPr id="8" name="TextBox 7"/>
-          <p:cNvSpPr txBox="1"/>
-          <p:nvPr/>
-        </p:nvSpPr>
-        <p:spPr>
-          <a:xfrm>
-            <a:off x="11128248" y="6473952"/>
-            <a:ext cx="548640" cy="274320"/>
-          </a:xfrm>
-          <a:prstGeom prst="rect">
-            <a:avLst/>
-          </a:prstGeom>
-          <a:noFill/>
-        </p:spPr>
-        <p:txBody>
-          <a:bodyPr wrap="square" lIns="0" rIns="0" tIns="0" bIns="0">
-            <a:spAutoFit/>
-          </a:bodyPr>
-          <a:lstStyle/>
-          <a:p>
-            <a:pPr>
-              <a:spcAft>
-                <a:spcPts val="800"/>
-              </a:spcAft>
-              <a:defRPr sz="1200" b="1">
-                <a:solidFill>
-                  <a:srgbClr val="24685E"/>
-                </a:solidFill>
-                <a:latin typeface="Noto Sans CJK JP"/>
-              </a:defRPr>
-            </a:pPr>
-            <a:r>
-              <a:t>09</a:t>
-            </a:r>
-          </a:p>
-        </p:txBody>
-      </p:sp>
-      <p:sp>
-        <p:nvSpPr>
-          <p:cNvPr id="9" name="TextBox 8"/>
-          <p:cNvSpPr txBox="1"/>
-          <p:nvPr/>
-        </p:nvSpPr>
-        <p:spPr>
-          <a:xfrm>
-            <a:off x="621792" y="1920240"/>
-            <a:ext cx="5303520" cy="365760"/>
-          </a:xfrm>
-          <a:prstGeom prst="rect">
-            <a:avLst/>
-          </a:prstGeom>
-          <a:noFill/>
-        </p:spPr>
-        <p:txBody>
-          <a:bodyPr wrap="square" lIns="0" rIns="0" tIns="0" bIns="0">
-            <a:spAutoFit/>
-          </a:bodyPr>
-          <a:lstStyle/>
-          <a:p>
-            <a:pPr>
-              <a:spcAft>
-                <a:spcPts val="800"/>
-              </a:spcAft>
-              <a:defRPr sz="2100" b="1">
-                <a:solidFill>
-                  <a:srgbClr val="173E3C"/>
-                </a:solidFill>
-                <a:latin typeface="Noto Sans CJK JP"/>
-              </a:defRPr>
-            </a:pPr>
-            <a:r>
-              <a:t>スケジュール</a:t>
-            </a:r>
-          </a:p>
-        </p:txBody>
-      </p:sp>
-      <p:sp>
-        <p:nvSpPr>
-          <p:cNvPr id="10" name="TextBox 9"/>
-          <p:cNvSpPr txBox="1"/>
-          <p:nvPr/>
-        </p:nvSpPr>
-        <p:spPr>
-          <a:xfrm>
-            <a:off x="640080" y="2578608"/>
-            <a:ext cx="2560320" cy="274320"/>
-          </a:xfrm>
-          <a:prstGeom prst="rect">
-            <a:avLst/>
-          </a:prstGeom>
-          <a:noFill/>
-        </p:spPr>
-        <p:txBody>
-          <a:bodyPr wrap="square" lIns="0" rIns="0" tIns="0" bIns="0">
-            <a:spAutoFit/>
-          </a:bodyPr>
-          <a:lstStyle/>
-          <a:p>
-            <a:pPr>
-              <a:spcAft>
-                <a:spcPts val="800"/>
-              </a:spcAft>
-              <a:defRPr sz="1500" b="0">
-                <a:solidFill>
-                  <a:srgbClr val="173E3C"/>
-                </a:solidFill>
-                <a:latin typeface="Noto Sans CJK JP"/>
-              </a:defRPr>
-            </a:pPr>
-            <a:r>
-              <a:t>制作開始日</a:t>
-            </a:r>
-          </a:p>
-        </p:txBody>
-      </p:sp>
-      <p:sp>
-        <p:nvSpPr>
-          <p:cNvPr id="11" name="Rectangle 10"/>
-          <p:cNvSpPr/>
-          <p:nvPr/>
-        </p:nvSpPr>
-        <p:spPr>
-          <a:xfrm>
-            <a:off x="3072384" y="2916936"/>
-            <a:ext cx="2295144" cy="10972"/>
-          </a:xfrm>
-          <a:prstGeom prst="rect">
-            <a:avLst/>
-          </a:prstGeom>
-          <a:solidFill>
-            <a:srgbClr val="CEDFD4"/>
-          </a:solidFill>
-          <a:ln>
-            <a:noFill/>
-          </a:ln>
-        </p:spPr>
-        <p:style>
-          <a:lnRef idx="1">
-            <a:schemeClr val="accent1"/>
-          </a:lnRef>
-          <a:fillRef idx="3">
-            <a:schemeClr val="accent1"/>
-          </a:fillRef>
-          <a:effectRef idx="2">
-            <a:schemeClr val="accent1"/>
-          </a:effectRef>
-          <a:fontRef idx="minor">
-            <a:schemeClr val="lt1"/>
-          </a:fontRef>
-        </p:style>
-        <p:txBody>
-          <a:bodyPr rtlCol="0" anchor="ctr"/>
-          <a:lstStyle/>
-          <a:p>
-            <a:pPr algn="ctr"/>
-          </a:p>
-        </p:txBody>
-      </p:sp>
-      <p:sp>
-        <p:nvSpPr>
-          <p:cNvPr id="12" name="TextBox 11"/>
-          <p:cNvSpPr txBox="1"/>
-          <p:nvPr/>
-        </p:nvSpPr>
-        <p:spPr>
-          <a:xfrm>
-            <a:off x="640080" y="3099815"/>
-            <a:ext cx="2560320" cy="274320"/>
-          </a:xfrm>
-          <a:prstGeom prst="rect">
-            <a:avLst/>
-          </a:prstGeom>
-          <a:noFill/>
-        </p:spPr>
-        <p:txBody>
-          <a:bodyPr wrap="square" lIns="0" rIns="0" tIns="0" bIns="0">
-            <a:spAutoFit/>
-          </a:bodyPr>
-          <a:lstStyle/>
-          <a:p>
-            <a:pPr>
-              <a:spcAft>
-                <a:spcPts val="800"/>
-              </a:spcAft>
-              <a:defRPr sz="1500" b="0">
-                <a:solidFill>
-                  <a:srgbClr val="173E3C"/>
-                </a:solidFill>
-                <a:latin typeface="Noto Sans CJK JP"/>
-              </a:defRPr>
-            </a:pPr>
-            <a:r>
-              <a:t>ラフ確認日</a:t>
-            </a:r>
-          </a:p>
-        </p:txBody>
-      </p:sp>
-      <p:sp>
-        <p:nvSpPr>
-          <p:cNvPr id="13" name="Rectangle 12"/>
-          <p:cNvSpPr/>
-          <p:nvPr/>
-        </p:nvSpPr>
-        <p:spPr>
-          <a:xfrm>
-            <a:off x="3072384" y="3438144"/>
-            <a:ext cx="2295144" cy="10972"/>
-          </a:xfrm>
-          <a:prstGeom prst="rect">
-            <a:avLst/>
-          </a:prstGeom>
-          <a:solidFill>
-            <a:srgbClr val="CEDFD4"/>
-          </a:solidFill>
-          <a:ln>
-            <a:noFill/>
-          </a:ln>
-        </p:spPr>
-        <p:style>
-          <a:lnRef idx="1">
-            <a:schemeClr val="accent1"/>
-          </a:lnRef>
-          <a:fillRef idx="3">
-            <a:schemeClr val="accent1"/>
-          </a:fillRef>
-          <a:effectRef idx="2">
-            <a:schemeClr val="accent1"/>
-          </a:effectRef>
-          <a:fontRef idx="minor">
-            <a:schemeClr val="lt1"/>
-          </a:fontRef>
-        </p:style>
-        <p:txBody>
-          <a:bodyPr rtlCol="0" anchor="ctr"/>
-          <a:lstStyle/>
-          <a:p>
-            <a:pPr algn="ctr"/>
-          </a:p>
-        </p:txBody>
-      </p:sp>
-      <p:sp>
-        <p:nvSpPr>
-          <p:cNvPr id="14" name="TextBox 13"/>
-          <p:cNvSpPr txBox="1"/>
-          <p:nvPr/>
-        </p:nvSpPr>
-        <p:spPr>
-          <a:xfrm>
-            <a:off x="640080" y="3621024"/>
-            <a:ext cx="2560320" cy="274320"/>
-          </a:xfrm>
-          <a:prstGeom prst="rect">
-            <a:avLst/>
-          </a:prstGeom>
-          <a:noFill/>
-        </p:spPr>
-        <p:txBody>
-          <a:bodyPr wrap="square" lIns="0" rIns="0" tIns="0" bIns="0">
-            <a:spAutoFit/>
-          </a:bodyPr>
-          <a:lstStyle/>
-          <a:p>
-            <a:pPr>
-              <a:spcAft>
-                <a:spcPts val="800"/>
-              </a:spcAft>
-              <a:defRPr sz="1500" b="0">
-                <a:solidFill>
-                  <a:srgbClr val="173E3C"/>
-                </a:solidFill>
-                <a:latin typeface="Noto Sans CJK JP"/>
-              </a:defRPr>
-            </a:pPr>
-            <a:r>
-              <a:t>動作確認版 提出日</a:t>
-            </a:r>
-          </a:p>
-        </p:txBody>
-      </p:sp>
-      <p:sp>
-        <p:nvSpPr>
-          <p:cNvPr id="15" name="Rectangle 14"/>
-          <p:cNvSpPr/>
-          <p:nvPr/>
-        </p:nvSpPr>
-        <p:spPr>
-          <a:xfrm>
-            <a:off x="3072384" y="3959352"/>
-            <a:ext cx="2295144" cy="10972"/>
-          </a:xfrm>
-          <a:prstGeom prst="rect">
-            <a:avLst/>
-          </a:prstGeom>
-          <a:solidFill>
-            <a:srgbClr val="CEDFD4"/>
-          </a:solidFill>
-          <a:ln>
-            <a:noFill/>
-          </a:ln>
-        </p:spPr>
-        <p:style>
-          <a:lnRef idx="1">
-            <a:schemeClr val="accent1"/>
-          </a:lnRef>
-          <a:fillRef idx="3">
-            <a:schemeClr val="accent1"/>
-          </a:fillRef>
-          <a:effectRef idx="2">
-            <a:schemeClr val="accent1"/>
-          </a:effectRef>
-          <a:fontRef idx="minor">
-            <a:schemeClr val="lt1"/>
-          </a:fontRef>
-        </p:style>
-        <p:txBody>
-          <a:bodyPr rtlCol="0" anchor="ctr"/>
-          <a:lstStyle/>
-          <a:p>
-            <a:pPr algn="ctr"/>
-          </a:p>
-        </p:txBody>
-      </p:sp>
-      <p:sp>
-        <p:nvSpPr>
-          <p:cNvPr id="16" name="TextBox 15"/>
-          <p:cNvSpPr txBox="1"/>
-          <p:nvPr/>
-        </p:nvSpPr>
-        <p:spPr>
-          <a:xfrm>
-            <a:off x="640080" y="4142231"/>
-            <a:ext cx="2560320" cy="274320"/>
-          </a:xfrm>
-          <a:prstGeom prst="rect">
-            <a:avLst/>
-          </a:prstGeom>
-          <a:noFill/>
-        </p:spPr>
-        <p:txBody>
-          <a:bodyPr wrap="square" lIns="0" rIns="0" tIns="0" bIns="0">
-            <a:spAutoFit/>
-          </a:bodyPr>
-          <a:lstStyle/>
-          <a:p>
-            <a:pPr>
-              <a:spcAft>
-                <a:spcPts val="800"/>
-              </a:spcAft>
-              <a:defRPr sz="1500" b="0">
-                <a:solidFill>
-                  <a:srgbClr val="173E3C"/>
-                </a:solidFill>
-                <a:latin typeface="Noto Sans CJK JP"/>
-              </a:defRPr>
-            </a:pPr>
-            <a:r>
-              <a:t>先行配布用 納品日</a:t>
-            </a:r>
-          </a:p>
-        </p:txBody>
-      </p:sp>
-      <p:sp>
-        <p:nvSpPr>
-          <p:cNvPr id="17" name="Rectangle 16"/>
-          <p:cNvSpPr/>
-          <p:nvPr/>
-        </p:nvSpPr>
-        <p:spPr>
-          <a:xfrm>
-            <a:off x="3072384" y="4480559"/>
-            <a:ext cx="2295144" cy="10972"/>
-          </a:xfrm>
-          <a:prstGeom prst="rect">
-            <a:avLst/>
-          </a:prstGeom>
-          <a:solidFill>
-            <a:srgbClr val="CEDFD4"/>
-          </a:solidFill>
-          <a:ln>
-            <a:noFill/>
-          </a:ln>
-        </p:spPr>
-        <p:style>
-          <a:lnRef idx="1">
-            <a:schemeClr val="accent1"/>
-          </a:lnRef>
-          <a:fillRef idx="3">
-            <a:schemeClr val="accent1"/>
-          </a:fillRef>
-          <a:effectRef idx="2">
-            <a:schemeClr val="accent1"/>
-          </a:effectRef>
-          <a:fontRef idx="minor">
-            <a:schemeClr val="lt1"/>
-          </a:fontRef>
-        </p:style>
-        <p:txBody>
-          <a:bodyPr rtlCol="0" anchor="ctr"/>
-          <a:lstStyle/>
-          <a:p>
-            <a:pPr algn="ctr"/>
-          </a:p>
-        </p:txBody>
-      </p:sp>
-      <p:sp>
-        <p:nvSpPr>
-          <p:cNvPr id="18" name="TextBox 17"/>
-          <p:cNvSpPr txBox="1"/>
-          <p:nvPr/>
-        </p:nvSpPr>
-        <p:spPr>
-          <a:xfrm>
-            <a:off x="640080" y="4663440"/>
-            <a:ext cx="2560320" cy="274320"/>
-          </a:xfrm>
-          <a:prstGeom prst="rect">
-            <a:avLst/>
-          </a:prstGeom>
-          <a:noFill/>
-        </p:spPr>
-        <p:txBody>
-          <a:bodyPr wrap="square" lIns="0" rIns="0" tIns="0" bIns="0">
-            <a:spAutoFit/>
-          </a:bodyPr>
-          <a:lstStyle/>
-          <a:p>
-            <a:pPr>
-              <a:spcAft>
-                <a:spcPts val="800"/>
-              </a:spcAft>
-              <a:defRPr sz="1500" b="0">
-                <a:solidFill>
-                  <a:srgbClr val="173E3C"/>
-                </a:solidFill>
-                <a:latin typeface="Noto Sans CJK JP"/>
-              </a:defRPr>
-            </a:pPr>
-            <a:r>
-              <a:t>最終納品日</a:t>
-            </a:r>
-          </a:p>
-        </p:txBody>
-      </p:sp>
-      <p:sp>
-        <p:nvSpPr>
-          <p:cNvPr id="19" name="Rectangle 18"/>
-          <p:cNvSpPr/>
-          <p:nvPr/>
-        </p:nvSpPr>
-        <p:spPr>
-          <a:xfrm>
-            <a:off x="3072384" y="5001768"/>
-            <a:ext cx="2295144" cy="10972"/>
-          </a:xfrm>
-          <a:prstGeom prst="rect">
-            <a:avLst/>
-          </a:prstGeom>
-          <a:solidFill>
-            <a:srgbClr val="CEDFD4"/>
-          </a:solidFill>
-          <a:ln>
-            <a:noFill/>
-          </a:ln>
-        </p:spPr>
-        <p:style>
-          <a:lnRef idx="1">
-            <a:schemeClr val="accent1"/>
-          </a:lnRef>
-          <a:fillRef idx="3">
-            <a:schemeClr val="accent1"/>
-          </a:fillRef>
-          <a:effectRef idx="2">
-            <a:schemeClr val="accent1"/>
-          </a:effectRef>
-          <a:fontRef idx="minor">
-            <a:schemeClr val="lt1"/>
-          </a:fontRef>
-        </p:style>
-        <p:txBody>
-          <a:bodyPr rtlCol="0" anchor="ctr"/>
-          <a:lstStyle/>
-          <a:p>
-            <a:pPr algn="ctr"/>
-          </a:p>
-        </p:txBody>
-      </p:sp>
-      <p:sp>
-        <p:nvSpPr>
-          <p:cNvPr id="20" name="TextBox 19"/>
-          <p:cNvSpPr txBox="1"/>
-          <p:nvPr/>
-        </p:nvSpPr>
-        <p:spPr>
-          <a:xfrm>
-            <a:off x="640080" y="5184648"/>
-            <a:ext cx="2560320" cy="274320"/>
-          </a:xfrm>
-          <a:prstGeom prst="rect">
-            <a:avLst/>
-          </a:prstGeom>
-          <a:noFill/>
-        </p:spPr>
-        <p:txBody>
-          <a:bodyPr wrap="square" lIns="0" rIns="0" tIns="0" bIns="0">
-            <a:spAutoFit/>
-          </a:bodyPr>
-          <a:lstStyle/>
-          <a:p>
-            <a:pPr>
-              <a:spcAft>
-                <a:spcPts val="800"/>
-              </a:spcAft>
-              <a:defRPr sz="1500" b="0">
-                <a:solidFill>
-                  <a:srgbClr val="173E3C"/>
-                </a:solidFill>
-                <a:latin typeface="Noto Sans CJK JP"/>
-              </a:defRPr>
-            </a:pPr>
-            <a:r>
-              <a:t>検収期間</a:t>
-            </a:r>
-          </a:p>
-        </p:txBody>
-      </p:sp>
-      <p:sp>
-        <p:nvSpPr>
-          <p:cNvPr id="21" name="Rectangle 20"/>
-          <p:cNvSpPr/>
-          <p:nvPr/>
-        </p:nvSpPr>
-        <p:spPr>
-          <a:xfrm>
-            <a:off x="3072384" y="5522976"/>
-            <a:ext cx="2295144" cy="10972"/>
-          </a:xfrm>
-          <a:prstGeom prst="rect">
-            <a:avLst/>
-          </a:prstGeom>
-          <a:solidFill>
-            <a:srgbClr val="CEDFD4"/>
-          </a:solidFill>
-          <a:ln>
-            <a:noFill/>
-          </a:ln>
-        </p:spPr>
-        <p:style>
-          <a:lnRef idx="1">
-            <a:schemeClr val="accent1"/>
-          </a:lnRef>
-          <a:fillRef idx="3">
-            <a:schemeClr val="accent1"/>
-          </a:fillRef>
-          <a:effectRef idx="2">
-            <a:schemeClr val="accent1"/>
-          </a:effectRef>
-          <a:fontRef idx="minor">
-            <a:schemeClr val="lt1"/>
-          </a:fontRef>
-        </p:style>
-        <p:txBody>
-          <a:bodyPr rtlCol="0" anchor="ctr"/>
-          <a:lstStyle/>
-          <a:p>
-            <a:pPr algn="ctr"/>
-          </a:p>
-        </p:txBody>
-      </p:sp>
-      <p:sp>
-        <p:nvSpPr>
-          <p:cNvPr id="22" name="Rounded Rectangle 21"/>
-          <p:cNvSpPr/>
-          <p:nvPr/>
-        </p:nvSpPr>
-        <p:spPr>
-          <a:xfrm>
-            <a:off x="5760720" y="1938528"/>
-            <a:ext cx="5843016" cy="4096512"/>
-          </a:xfrm>
-          <a:prstGeom prst="roundRect">
-            <a:avLst>
-              <a:gd name="adj" fmla="val 10000"/>
-            </a:avLst>
-          </a:prstGeom>
-          <a:solidFill>
-            <a:srgbClr val="FFFFFF"/>
-          </a:solidFill>
-          <a:ln>
-            <a:noFill/>
-          </a:ln>
-        </p:spPr>
-        <p:style>
-          <a:lnRef idx="1">
-            <a:schemeClr val="accent1"/>
-          </a:lnRef>
-          <a:fillRef idx="3">
-            <a:schemeClr val="accent1"/>
-          </a:fillRef>
-          <a:effectRef idx="2">
-            <a:schemeClr val="accent1"/>
-          </a:effectRef>
-          <a:fontRef idx="minor">
-            <a:schemeClr val="lt1"/>
-          </a:fontRef>
-        </p:style>
-        <p:txBody>
-          <a:bodyPr rtlCol="0" anchor="ctr"/>
-          <a:lstStyle/>
-          <a:p>
-            <a:pPr algn="ctr"/>
-          </a:p>
-        </p:txBody>
-      </p:sp>
-      <p:sp>
-        <p:nvSpPr>
-          <p:cNvPr id="23" name="TextBox 22"/>
-          <p:cNvSpPr txBox="1"/>
-          <p:nvPr/>
-        </p:nvSpPr>
-        <p:spPr>
-          <a:xfrm>
-            <a:off x="5961888" y="2121408"/>
-            <a:ext cx="5440679" cy="365760"/>
-          </a:xfrm>
-          <a:prstGeom prst="rect">
-            <a:avLst/>
-          </a:prstGeom>
-          <a:noFill/>
-        </p:spPr>
-        <p:txBody>
-          <a:bodyPr wrap="square" lIns="0" rIns="0" tIns="0" bIns="0">
-            <a:spAutoFit/>
-          </a:bodyPr>
-          <a:lstStyle/>
-          <a:p>
-            <a:pPr>
-              <a:spcAft>
-                <a:spcPts val="800"/>
-              </a:spcAft>
-              <a:defRPr sz="1700" b="1">
-                <a:solidFill>
-                  <a:srgbClr val="24685E"/>
-                </a:solidFill>
-                <a:latin typeface="Noto Sans CJK JP"/>
-              </a:defRPr>
-            </a:pPr>
-            <a:r>
-              <a:t>制作前の確認事項</a:t>
-            </a:r>
-          </a:p>
-        </p:txBody>
-      </p:sp>
-      <p:sp>
-        <p:nvSpPr>
-          <p:cNvPr id="24" name="TextBox 23"/>
-          <p:cNvSpPr txBox="1"/>
-          <p:nvPr/>
-        </p:nvSpPr>
-        <p:spPr>
-          <a:xfrm>
-            <a:off x="5961888" y="2642616"/>
-            <a:ext cx="5440679" cy="3319272"/>
-          </a:xfrm>
-          <a:prstGeom prst="rect">
-            <a:avLst/>
-          </a:prstGeom>
-          <a:noFill/>
-        </p:spPr>
-        <p:txBody>
-          <a:bodyPr wrap="square" lIns="0" rIns="0" tIns="0" bIns="0">
-            <a:spAutoFit/>
-          </a:bodyPr>
-          <a:lstStyle/>
-          <a:p>
-            <a:pPr>
-              <a:spcAft>
-                <a:spcPts val="800"/>
-              </a:spcAft>
-              <a:defRPr sz="1400" b="0">
-                <a:solidFill>
-                  <a:srgbClr val="173E3C"/>
-                </a:solidFill>
-                <a:latin typeface="Noto Sans CJK JP"/>
-              </a:defRPr>
-            </a:pPr>
-            <a:r>
-              <a:t>着用タイプ2種の採否・被覆範囲</a:t>
-            </a:r>
-          </a:p>
-          <a:p>
-            <a:pPr>
-              <a:spcAft>
-                <a:spcPts val="800"/>
-              </a:spcAft>
-              <a:defRPr sz="1400" b="0">
-                <a:solidFill>
-                  <a:srgbClr val="173E3C"/>
-                </a:solidFill>
-                <a:latin typeface="Noto Sans CJK JP"/>
-              </a:defRPr>
-            </a:pPr>
-            <a:r>
-              <a:t>アバターの採用版・対応シェイプ値</a:t>
-            </a:r>
-          </a:p>
-          <a:p>
-            <a:pPr>
-              <a:spcAft>
-                <a:spcPts val="800"/>
-              </a:spcAft>
-              <a:defRPr sz="1400" b="0">
-                <a:solidFill>
-                  <a:srgbClr val="173E3C"/>
-                </a:solidFill>
-                <a:latin typeface="Noto Sans CJK JP"/>
-              </a:defRPr>
-            </a:pPr>
-            <a:r>
-              <a:t>頭部小物3点の個別調整範囲</a:t>
-            </a:r>
-          </a:p>
-          <a:p>
-            <a:pPr>
-              <a:spcAft>
-                <a:spcPts val="800"/>
-              </a:spcAft>
-              <a:defRPr sz="1400" b="0">
-                <a:solidFill>
-                  <a:srgbClr val="173E3C"/>
-                </a:solidFill>
-                <a:latin typeface="Noto Sans CJK JP"/>
-              </a:defRPr>
-            </a:pPr>
-            <a:r>
-              <a:t>ロゴ・装飾・色の指定と承認フロー</a:t>
-            </a:r>
-          </a:p>
-          <a:p>
-            <a:pPr>
-              <a:spcAft>
-                <a:spcPts val="800"/>
-              </a:spcAft>
-              <a:defRPr sz="1400" b="0">
-                <a:solidFill>
-                  <a:srgbClr val="173E3C"/>
-                </a:solidFill>
-                <a:latin typeface="Noto Sans CJK JP"/>
-              </a:defRPr>
-            </a:pPr>
-            <a:r>
-              <a:t>配布方式・先行配布の実施有無</a:t>
-            </a:r>
-          </a:p>
-          <a:p>
-            <a:pPr>
-              <a:spcAft>
-                <a:spcPts val="800"/>
-              </a:spcAft>
-              <a:defRPr sz="1400" b="0">
-                <a:solidFill>
-                  <a:srgbClr val="173E3C"/>
-                </a:solidFill>
-                <a:latin typeface="Noto Sans CJK JP"/>
-              </a:defRPr>
-            </a:pPr>
-            <a:r>
-              <a:t>利用許諾・改変・実績公開・不具合対応</a:t>
+              <a:t>完成したモデルを確認して受領</a:t>
             </a:r>
           </a:p>
         </p:txBody>

--- a/documents/slides/bath-set-production-slides.pptx
+++ b/documents/slides/bath-set-production-slides.pptx
@@ -3340,7 +3340,7 @@
               </a:defRPr>
             </a:pPr>
             <a:r>
-              <a:t>アース製薬 企業ブース｜3Dお風呂セット 制作発注資料｜制作内容 v0.4</a:t>
+              <a:t>アース製薬 企業ブース｜3Dお風呂セット 制作発注資料｜制作内容 v0.5</a:t>
             </a:r>
           </a:p>
         </p:txBody>
@@ -3587,7 +3587,7 @@
         <p:spPr>
           <a:xfrm>
             <a:off x="2258568" y="5056632"/>
-            <a:ext cx="1828800" cy="292608"/>
+            <a:ext cx="2011680" cy="292608"/>
           </a:xfrm>
           <a:prstGeom prst="roundRect">
             <a:avLst>
@@ -3632,7 +3632,7 @@
         <p:spPr>
           <a:xfrm>
             <a:off x="2350008" y="5097780"/>
-            <a:ext cx="1664208" cy="228600"/>
+            <a:ext cx="1847088" cy="228600"/>
           </a:xfrm>
           <a:prstGeom prst="rect">
             <a:avLst/>
@@ -3657,7 +3657,7 @@
               </a:defRPr>
             </a:pPr>
             <a:r>
-              <a:t>対応アバター 5種</a:t>
+              <a:t>女性4種・男性3種</a:t>
             </a:r>
           </a:p>
         </p:txBody>
@@ -3748,7 +3748,7 @@
       </p:sp>
       <p:pic>
         <p:nvPicPr>
-          <p:cNvPr id="17" name="Picture 16" descr="exec-871844d4-edbb-4a08-9d69-90132a8b8d7d.png"/>
+          <p:cNvPr id="17" name="Picture 16" descr="exec-c7a9a72c-5423-4325-bae1-c7d3b8f836c6.png"/>
           <p:cNvPicPr>
             <a:picLocks noChangeAspect="1"/>
           </p:cNvPicPr>
@@ -3756,6 +3756,7 @@
         </p:nvPicPr>
         <p:blipFill>
           <a:blip r:embed="rId2"/>
+          <a:srcRect r="50000" b="50000"/>
           <a:stretch>
             <a:fillRect/>
           </a:stretch>
@@ -3763,16 +3764,91 @@
         <p:spPr>
           <a:xfrm>
             <a:off x="6601968" y="1627632"/>
-            <a:ext cx="4526280" cy="4526280"/>
+            <a:ext cx="2263140" cy="2263140"/>
           </a:xfrm>
           <a:prstGeom prst="rect">
             <a:avLst/>
           </a:prstGeom>
         </p:spPr>
       </p:pic>
-      <p:sp>
-        <p:nvSpPr>
-          <p:cNvPr id="18" name="TextBox 17"/>
+      <p:pic>
+        <p:nvPicPr>
+          <p:cNvPr id="18" name="Picture 17" descr="exec-c7a9a72c-5423-4325-bae1-c7d3b8f836c6.png"/>
+          <p:cNvPicPr>
+            <a:picLocks noChangeAspect="1"/>
+          </p:cNvPicPr>
+          <p:nvPr/>
+        </p:nvPicPr>
+        <p:blipFill>
+          <a:blip r:embed="rId2"/>
+          <a:srcRect l="50000" b="50000"/>
+          <a:stretch>
+            <a:fillRect/>
+          </a:stretch>
+        </p:blipFill>
+        <p:spPr>
+          <a:xfrm>
+            <a:off x="8865108" y="1627632"/>
+            <a:ext cx="2263140" cy="2263140"/>
+          </a:xfrm>
+          <a:prstGeom prst="rect">
+            <a:avLst/>
+          </a:prstGeom>
+        </p:spPr>
+      </p:pic>
+      <p:pic>
+        <p:nvPicPr>
+          <p:cNvPr id="19" name="Picture 18" descr="exec-871844d4-edbb-4a08-9d69-90132a8b8d7d.png"/>
+          <p:cNvPicPr>
+            <a:picLocks noChangeAspect="1"/>
+          </p:cNvPicPr>
+          <p:nvPr/>
+        </p:nvPicPr>
+        <p:blipFill>
+          <a:blip r:embed="rId3"/>
+          <a:srcRect r="50000" t="50000"/>
+          <a:stretch>
+            <a:fillRect/>
+          </a:stretch>
+        </p:blipFill>
+        <p:spPr>
+          <a:xfrm>
+            <a:off x="6601968" y="3890772"/>
+            <a:ext cx="2263140" cy="2263140"/>
+          </a:xfrm>
+          <a:prstGeom prst="rect">
+            <a:avLst/>
+          </a:prstGeom>
+        </p:spPr>
+      </p:pic>
+      <p:pic>
+        <p:nvPicPr>
+          <p:cNvPr id="20" name="Picture 19" descr="exec-871844d4-edbb-4a08-9d69-90132a8b8d7d.png"/>
+          <p:cNvPicPr>
+            <a:picLocks noChangeAspect="1"/>
+          </p:cNvPicPr>
+          <p:nvPr/>
+        </p:nvPicPr>
+        <p:blipFill>
+          <a:blip r:embed="rId3"/>
+          <a:srcRect l="50000" t="50000"/>
+          <a:stretch>
+            <a:fillRect/>
+          </a:stretch>
+        </p:blipFill>
+        <p:spPr>
+          <a:xfrm>
+            <a:off x="8865108" y="3890772"/>
+            <a:ext cx="2263140" cy="2263140"/>
+          </a:xfrm>
+          <a:prstGeom prst="rect">
+            <a:avLst/>
+          </a:prstGeom>
+        </p:spPr>
+      </p:pic>
+      <p:sp>
+        <p:nvSpPr>
+          <p:cNvPr id="21" name="TextBox 20"/>
           <p:cNvSpPr txBox="1"/>
           <p:nvPr/>
         </p:nvSpPr>
@@ -4072,7 +4148,7 @@
               </a:defRPr>
             </a:pPr>
             <a:r>
-              <a:t>アース製薬 企業ブース｜3Dお風呂セット 制作発注資料｜制作内容 v0.4</a:t>
+              <a:t>アース製薬 企業ブース｜3Dお風呂セット 制作発注資料｜制作内容 v0.5</a:t>
             </a:r>
           </a:p>
         </p:txBody>
@@ -4163,7 +4239,7 @@
       </p:sp>
       <p:pic>
         <p:nvPicPr>
-          <p:cNvPr id="10" name="Picture 9" descr="exec-871844d4-edbb-4a08-9d69-90132a8b8d7d.png"/>
+          <p:cNvPr id="10" name="Picture 9" descr="exec-c7a9a72c-5423-4325-bae1-c7d3b8f836c6.png"/>
           <p:cNvPicPr>
             <a:picLocks noChangeAspect="1"/>
           </p:cNvPicPr>
@@ -4350,7 +4426,7 @@
       </p:sp>
       <p:pic>
         <p:nvPicPr>
-          <p:cNvPr id="15" name="Picture 14" descr="exec-871844d4-edbb-4a08-9d69-90132a8b8d7d.png"/>
+          <p:cNvPr id="15" name="Picture 14" descr="exec-c7a9a72c-5423-4325-bae1-c7d3b8f836c6.png"/>
           <p:cNvPicPr>
             <a:picLocks noChangeAspect="1"/>
           </p:cNvPicPr>
@@ -4446,7 +4522,7 @@
               </a:defRPr>
             </a:pPr>
             <a:r>
-              <a:t>もこもこターバン</a:t>
+              <a:t>もこもこ泡ターバン</a:t>
             </a:r>
           </a:p>
         </p:txBody>
@@ -4485,7 +4561,7 @@
               </a:defRPr>
             </a:pPr>
             <a:r>
-              <a:t>頭に巻く、ふわふわのターバン</a:t>
+              <a:t>頭に載せる、白いもこもこの泡</a:t>
             </a:r>
           </a:p>
         </p:txBody>
@@ -4544,7 +4620,7 @@
           <p:nvPr/>
         </p:nvPicPr>
         <p:blipFill>
-          <a:blip r:embed="rId2"/>
+          <a:blip r:embed="rId3"/>
           <a:srcRect r="50000" t="50000"/>
           <a:stretch>
             <a:fillRect/>
@@ -4731,7 +4807,7 @@
           <p:nvPr/>
         </p:nvPicPr>
         <p:blipFill>
-          <a:blip r:embed="rId2"/>
+          <a:blip r:embed="rId3"/>
           <a:srcRect l="50000" t="50000"/>
           <a:stretch>
             <a:fillRect/>
@@ -5084,7 +5160,7 @@
               </a:defRPr>
             </a:pPr>
             <a:r>
-              <a:t>頭部小物｜タオルとターバン</a:t>
+              <a:t>頭部小物｜薄いタオルと、もこもこの泡</a:t>
             </a:r>
           </a:p>
         </p:txBody>
@@ -5123,7 +5199,7 @@
               </a:defRPr>
             </a:pPr>
             <a:r>
-              <a:t>どちらも、頭に装着して使うアイテムです。</a:t>
+              <a:t>タオルは薄く、ターバンは布ではなく泡として制作します。</a:t>
             </a:r>
           </a:p>
         </p:txBody>
@@ -5205,7 +5281,7 @@
               </a:defRPr>
             </a:pPr>
             <a:r>
-              <a:t>アース製薬 企業ブース｜3Dお風呂セット 制作発注資料｜制作内容 v0.4</a:t>
+              <a:t>アース製薬 企業ブース｜3Dお風呂セット 制作発注資料｜制作内容 v0.5</a:t>
             </a:r>
           </a:p>
         </p:txBody>
@@ -5296,7 +5372,7 @@
       </p:sp>
       <p:pic>
         <p:nvPicPr>
-          <p:cNvPr id="10" name="Picture 9" descr="exec-871844d4-edbb-4a08-9d69-90132a8b8d7d.png"/>
+          <p:cNvPr id="10" name="Picture 9" descr="exec-c7a9a72c-5423-4325-bae1-c7d3b8f836c6.png"/>
           <p:cNvPicPr>
             <a:picLocks noChangeAspect="1"/>
           </p:cNvPicPr>
@@ -5392,7 +5468,7 @@
               </a:defRPr>
             </a:pPr>
             <a:r>
-              <a:t>折り畳んだ白いタオルの上に、</a:t>
+              <a:t>薄い白いタオルの上に、</a:t>
             </a:r>
           </a:p>
           <a:p>
@@ -5499,7 +5575,7 @@
       </p:sp>
       <p:pic>
         <p:nvPicPr>
-          <p:cNvPr id="15" name="Picture 14" descr="exec-871844d4-edbb-4a08-9d69-90132a8b8d7d.png"/>
+          <p:cNvPr id="15" name="Picture 14" descr="exec-c7a9a72c-5423-4325-bae1-c7d3b8f836c6.png"/>
           <p:cNvPicPr>
             <a:picLocks noChangeAspect="1"/>
           </p:cNvPicPr>
@@ -5556,7 +5632,7 @@
               </a:defRPr>
             </a:pPr>
             <a:r>
-              <a:t>もこもこターバン</a:t>
+              <a:t>もこもこ泡ターバン</a:t>
             </a:r>
           </a:p>
         </p:txBody>
@@ -5595,7 +5671,7 @@
               </a:defRPr>
             </a:pPr>
             <a:r>
-              <a:t>白く、ふんわりした質感の</a:t>
+              <a:t>白いもこもこの泡に、</a:t>
             </a:r>
           </a:p>
           <a:p>
@@ -5611,7 +5687,23 @@
               </a:defRPr>
             </a:pPr>
             <a:r>
-              <a:t>頭に巻くターバン。</a:t>
+              <a:t>透明なシャボン玉を添える。</a:t>
+            </a:r>
+          </a:p>
+          <a:p>
+            <a:pPr>
+              <a:spcAft>
+                <a:spcPts val="800"/>
+              </a:spcAft>
+              <a:defRPr sz="1700" b="0">
+                <a:solidFill>
+                  <a:srgbClr val="173E3C"/>
+                </a:solidFill>
+                <a:latin typeface="Noto Sans CJK JP"/>
+              </a:defRPr>
+            </a:pPr>
+            <a:r>
+              <a:t>布のターバンではありません。</a:t>
             </a:r>
           </a:p>
         </p:txBody>
@@ -5918,7 +6010,7 @@
               </a:defRPr>
             </a:pPr>
             <a:r>
-              <a:t>アース製薬 企業ブース｜3Dお風呂セット 制作発注資料｜制作内容 v0.4</a:t>
+              <a:t>アース製薬 企業ブース｜3Dお風呂セット 制作発注資料｜制作内容 v0.5</a:t>
             </a:r>
           </a:p>
         </p:txBody>
@@ -6467,7 +6559,7 @@
               </a:defRPr>
             </a:pPr>
             <a:r>
-              <a:t>アース製薬 企業ブース｜3Dお風呂セット 制作発注資料｜制作内容 v0.4</a:t>
+              <a:t>アース製薬 企業ブース｜3Dお風呂セット 制作発注資料｜制作内容 v0.5</a:t>
             </a:r>
           </a:p>
         </p:txBody>
@@ -6855,7 +6947,7 @@
               </a:defRPr>
             </a:pPr>
             <a:r>
-              <a:t>以下の5アバターで着用できるように制作します。</a:t>
+              <a:t>女性4種・男性3種で着用できるように制作します。</a:t>
             </a:r>
           </a:p>
         </p:txBody>
@@ -7002,7 +7094,7 @@
               </a:defRPr>
             </a:pPr>
             <a:r>
-              <a:t>バスタオルの対応アバター｜5種</a:t>
+              <a:t>バスタオルの対応アバター｜女性4種・男性3種</a:t>
             </a:r>
           </a:p>
         </p:txBody>
@@ -7041,7 +7133,7 @@
               </a:defRPr>
             </a:pPr>
             <a:r>
-              <a:t>以下のアバターに合わせたバスタオルを制作します。</a:t>
+              <a:t>以下の7種で着用できるバスタオルを制作します。</a:t>
             </a:r>
           </a:p>
         </p:txBody>
@@ -7123,7 +7215,7 @@
               </a:defRPr>
             </a:pPr>
             <a:r>
-              <a:t>アース製薬 企業ブース｜3Dお風呂セット 制作発注資料｜制作内容 v0.4</a:t>
+              <a:t>アース製薬 企業ブース｜3Dお風呂セット 制作発注資料｜制作内容 v0.5</a:t>
             </a:r>
           </a:p>
         </p:txBody>
@@ -7169,14 +7261,92 @@
       </p:sp>
       <p:sp>
         <p:nvSpPr>
-          <p:cNvPr id="9" name="Rounded Rectangle 8"/>
+          <p:cNvPr id="9" name="TextBox 8"/>
+          <p:cNvSpPr txBox="1"/>
+          <p:nvPr/>
+        </p:nvSpPr>
+        <p:spPr>
+          <a:xfrm>
+            <a:off x="676656" y="1682496"/>
+            <a:ext cx="1828800" cy="274320"/>
+          </a:xfrm>
+          <a:prstGeom prst="rect">
+            <a:avLst/>
+          </a:prstGeom>
+          <a:noFill/>
+        </p:spPr>
+        <p:txBody>
+          <a:bodyPr wrap="square" lIns="0" rIns="0" tIns="0" bIns="0">
+            <a:spAutoFit/>
+          </a:bodyPr>
+          <a:lstStyle/>
+          <a:p>
+            <a:pPr>
+              <a:spcAft>
+                <a:spcPts val="800"/>
+              </a:spcAft>
+              <a:defRPr sz="1500" b="1">
+                <a:solidFill>
+                  <a:srgbClr val="24685E"/>
+                </a:solidFill>
+                <a:latin typeface="Noto Sans CJK JP"/>
+              </a:defRPr>
+            </a:pPr>
+            <a:r>
+              <a:t>女性 4種</a:t>
+            </a:r>
+          </a:p>
+        </p:txBody>
+      </p:sp>
+      <p:sp>
+        <p:nvSpPr>
+          <p:cNvPr id="10" name="TextBox 9"/>
+          <p:cNvSpPr txBox="1"/>
+          <p:nvPr/>
+        </p:nvSpPr>
+        <p:spPr>
+          <a:xfrm>
+            <a:off x="676656" y="4050791"/>
+            <a:ext cx="1828800" cy="274320"/>
+          </a:xfrm>
+          <a:prstGeom prst="rect">
+            <a:avLst/>
+          </a:prstGeom>
+          <a:noFill/>
+        </p:spPr>
+        <p:txBody>
+          <a:bodyPr wrap="square" lIns="0" rIns="0" tIns="0" bIns="0">
+            <a:spAutoFit/>
+          </a:bodyPr>
+          <a:lstStyle/>
+          <a:p>
+            <a:pPr>
+              <a:spcAft>
+                <a:spcPts val="800"/>
+              </a:spcAft>
+              <a:defRPr sz="1500" b="1">
+                <a:solidFill>
+                  <a:srgbClr val="24685E"/>
+                </a:solidFill>
+                <a:latin typeface="Noto Sans CJK JP"/>
+              </a:defRPr>
+            </a:pPr>
+            <a:r>
+              <a:t>男性 3種</a:t>
+            </a:r>
+          </a:p>
+        </p:txBody>
+      </p:sp>
+      <p:sp>
+        <p:nvSpPr>
+          <p:cNvPr id="11" name="Rounded Rectangle 10"/>
           <p:cNvSpPr/>
           <p:nvPr/>
         </p:nvSpPr>
         <p:spPr>
           <a:xfrm>
-            <a:off x="658368" y="1901952"/>
-            <a:ext cx="5532120" cy="658368"/>
+            <a:off x="658368" y="1984248"/>
+            <a:ext cx="2596896" cy="1920240"/>
           </a:xfrm>
           <a:prstGeom prst="roundRect">
             <a:avLst>
@@ -7212,73 +7382,60 @@
           </a:p>
         </p:txBody>
       </p:sp>
-      <p:sp>
-        <p:nvSpPr>
-          <p:cNvPr id="10" name="TextBox 9"/>
-          <p:cNvSpPr txBox="1"/>
-          <p:nvPr/>
-        </p:nvSpPr>
-        <p:spPr>
-          <a:xfrm>
-            <a:off x="896112" y="2048256"/>
-            <a:ext cx="521207" cy="320040"/>
-          </a:xfrm>
-          <a:prstGeom prst="rect">
-            <a:avLst/>
-          </a:prstGeom>
-          <a:noFill/>
-        </p:spPr>
-        <p:txBody>
-          <a:bodyPr wrap="square" lIns="0" rIns="0" tIns="0" bIns="0">
-            <a:spAutoFit/>
-          </a:bodyPr>
-          <a:lstStyle/>
-          <a:p>
-            <a:pPr>
+      <p:pic>
+        <p:nvPicPr>
+          <p:cNvPr id="12" name="Picture 11" descr="shinano.jpg">
+            <a:hlinkClick r:id="rId3"/>
+          </p:cNvPr>
+          <p:cNvPicPr>
+            <a:picLocks noChangeAspect="1"/>
+          </p:cNvPicPr>
+          <p:nvPr/>
+        </p:nvPicPr>
+        <p:blipFill>
+          <a:blip r:embed="rId2"/>
+          <a:stretch>
+            <a:fillRect/>
+          </a:stretch>
+        </p:blipFill>
+        <p:spPr>
+          <a:xfrm>
+            <a:off x="1225295" y="2075688"/>
+            <a:ext cx="1463040" cy="1463040"/>
+          </a:xfrm>
+          <a:prstGeom prst="rect">
+            <a:avLst/>
+          </a:prstGeom>
+        </p:spPr>
+      </p:pic>
+      <p:sp>
+        <p:nvSpPr>
+          <p:cNvPr id="13" name="TextBox 12"/>
+          <p:cNvSpPr txBox="1"/>
+          <p:nvPr/>
+        </p:nvSpPr>
+        <p:spPr>
+          <a:xfrm>
+            <a:off x="813816" y="3602736"/>
+            <a:ext cx="2286000" cy="274320"/>
+          </a:xfrm>
+          <a:prstGeom prst="rect">
+            <a:avLst/>
+          </a:prstGeom>
+          <a:noFill/>
+        </p:spPr>
+        <p:txBody>
+          <a:bodyPr wrap="square" lIns="0" rIns="0" tIns="0" bIns="0">
+            <a:spAutoFit/>
+          </a:bodyPr>
+          <a:lstStyle/>
+          <a:p>
+            <a:pPr algn="ctr">
               <a:spcAft>
                 <a:spcPts val="800"/>
               </a:spcAft>
               <a:defRPr sz="1600" b="1">
                 <a:solidFill>
-                  <a:srgbClr val="24685E"/>
-                </a:solidFill>
-                <a:latin typeface="Noto Sans CJK JP"/>
-              </a:defRPr>
-            </a:pPr>
-            <a:r>
-              <a:t>01</a:t>
-            </a:r>
-          </a:p>
-        </p:txBody>
-      </p:sp>
-      <p:sp>
-        <p:nvSpPr>
-          <p:cNvPr id="11" name="TextBox 10"/>
-          <p:cNvSpPr txBox="1"/>
-          <p:nvPr/>
-        </p:nvSpPr>
-        <p:spPr>
-          <a:xfrm>
-            <a:off x="1691640" y="2011680"/>
-            <a:ext cx="2560320" cy="411480"/>
-          </a:xfrm>
-          <a:prstGeom prst="rect">
-            <a:avLst/>
-          </a:prstGeom>
-          <a:noFill/>
-        </p:spPr>
-        <p:txBody>
-          <a:bodyPr wrap="square" lIns="0" rIns="0" tIns="0" bIns="0">
-            <a:spAutoFit/>
-          </a:bodyPr>
-          <a:lstStyle/>
-          <a:p>
-            <a:pPr>
-              <a:spcAft>
-                <a:spcPts val="800"/>
-              </a:spcAft>
-              <a:defRPr sz="2300" b="1">
-                <a:solidFill>
                   <a:srgbClr val="173E3C"/>
                 </a:solidFill>
                 <a:latin typeface="Noto Sans CJK JP"/>
@@ -7292,53 +7449,14 @@
       </p:sp>
       <p:sp>
         <p:nvSpPr>
-          <p:cNvPr id="12" name="TextBox 11"/>
-          <p:cNvSpPr txBox="1"/>
-          <p:nvPr/>
-        </p:nvSpPr>
-        <p:spPr>
-          <a:xfrm>
-            <a:off x="4352544" y="2084832"/>
-            <a:ext cx="1463040" cy="310896"/>
-          </a:xfrm>
-          <a:prstGeom prst="rect">
-            <a:avLst/>
-          </a:prstGeom>
-          <a:noFill/>
-        </p:spPr>
-        <p:txBody>
-          <a:bodyPr wrap="square" lIns="0" rIns="0" tIns="0" bIns="0">
-            <a:spAutoFit/>
-          </a:bodyPr>
-          <a:lstStyle/>
-          <a:p>
-            <a:pPr>
-              <a:spcAft>
-                <a:spcPts val="800"/>
-              </a:spcAft>
-              <a:defRPr sz="1400" b="0">
-                <a:solidFill>
-                  <a:srgbClr val="61716B"/>
-                </a:solidFill>
-                <a:latin typeface="Noto Sans CJK JP"/>
-              </a:defRPr>
-            </a:pPr>
-            <a:r>
-              <a:t>Shinano</a:t>
-            </a:r>
-          </a:p>
-        </p:txBody>
-      </p:sp>
-      <p:sp>
-        <p:nvSpPr>
-          <p:cNvPr id="13" name="Rounded Rectangle 12"/>
+          <p:cNvPr id="14" name="Rounded Rectangle 13"/>
           <p:cNvSpPr/>
           <p:nvPr/>
         </p:nvSpPr>
         <p:spPr>
           <a:xfrm>
-            <a:off x="658368" y="2688336"/>
-            <a:ext cx="5532120" cy="658368"/>
+            <a:off x="3493008" y="1984248"/>
+            <a:ext cx="2596896" cy="1920240"/>
           </a:xfrm>
           <a:prstGeom prst="roundRect">
             <a:avLst>
@@ -7374,73 +7492,60 @@
           </a:p>
         </p:txBody>
       </p:sp>
-      <p:sp>
-        <p:nvSpPr>
-          <p:cNvPr id="14" name="TextBox 13"/>
-          <p:cNvSpPr txBox="1"/>
-          <p:nvPr/>
-        </p:nvSpPr>
-        <p:spPr>
-          <a:xfrm>
-            <a:off x="896112" y="2834640"/>
-            <a:ext cx="521207" cy="320040"/>
-          </a:xfrm>
-          <a:prstGeom prst="rect">
-            <a:avLst/>
-          </a:prstGeom>
-          <a:noFill/>
-        </p:spPr>
-        <p:txBody>
-          <a:bodyPr wrap="square" lIns="0" rIns="0" tIns="0" bIns="0">
-            <a:spAutoFit/>
-          </a:bodyPr>
-          <a:lstStyle/>
-          <a:p>
-            <a:pPr>
+      <p:pic>
+        <p:nvPicPr>
+          <p:cNvPr id="15" name="Picture 14" descr="manuka.jpg">
+            <a:hlinkClick r:id="rId5"/>
+          </p:cNvPr>
+          <p:cNvPicPr>
+            <a:picLocks noChangeAspect="1"/>
+          </p:cNvPicPr>
+          <p:nvPr/>
+        </p:nvPicPr>
+        <p:blipFill>
+          <a:blip r:embed="rId4"/>
+          <a:stretch>
+            <a:fillRect/>
+          </a:stretch>
+        </p:blipFill>
+        <p:spPr>
+          <a:xfrm>
+            <a:off x="4059936" y="2075688"/>
+            <a:ext cx="1463040" cy="1463040"/>
+          </a:xfrm>
+          <a:prstGeom prst="rect">
+            <a:avLst/>
+          </a:prstGeom>
+        </p:spPr>
+      </p:pic>
+      <p:sp>
+        <p:nvSpPr>
+          <p:cNvPr id="16" name="TextBox 15"/>
+          <p:cNvSpPr txBox="1"/>
+          <p:nvPr/>
+        </p:nvSpPr>
+        <p:spPr>
+          <a:xfrm>
+            <a:off x="3648456" y="3602736"/>
+            <a:ext cx="2286000" cy="274320"/>
+          </a:xfrm>
+          <a:prstGeom prst="rect">
+            <a:avLst/>
+          </a:prstGeom>
+          <a:noFill/>
+        </p:spPr>
+        <p:txBody>
+          <a:bodyPr wrap="square" lIns="0" rIns="0" tIns="0" bIns="0">
+            <a:spAutoFit/>
+          </a:bodyPr>
+          <a:lstStyle/>
+          <a:p>
+            <a:pPr algn="ctr">
               <a:spcAft>
                 <a:spcPts val="800"/>
               </a:spcAft>
               <a:defRPr sz="1600" b="1">
                 <a:solidFill>
-                  <a:srgbClr val="24685E"/>
-                </a:solidFill>
-                <a:latin typeface="Noto Sans CJK JP"/>
-              </a:defRPr>
-            </a:pPr>
-            <a:r>
-              <a:t>02</a:t>
-            </a:r>
-          </a:p>
-        </p:txBody>
-      </p:sp>
-      <p:sp>
-        <p:nvSpPr>
-          <p:cNvPr id="15" name="TextBox 14"/>
-          <p:cNvSpPr txBox="1"/>
-          <p:nvPr/>
-        </p:nvSpPr>
-        <p:spPr>
-          <a:xfrm>
-            <a:off x="1691640" y="2798064"/>
-            <a:ext cx="2560320" cy="411480"/>
-          </a:xfrm>
-          <a:prstGeom prst="rect">
-            <a:avLst/>
-          </a:prstGeom>
-          <a:noFill/>
-        </p:spPr>
-        <p:txBody>
-          <a:bodyPr wrap="square" lIns="0" rIns="0" tIns="0" bIns="0">
-            <a:spAutoFit/>
-          </a:bodyPr>
-          <a:lstStyle/>
-          <a:p>
-            <a:pPr>
-              <a:spcAft>
-                <a:spcPts val="800"/>
-              </a:spcAft>
-              <a:defRPr sz="2300" b="1">
-                <a:solidFill>
                   <a:srgbClr val="173E3C"/>
                 </a:solidFill>
                 <a:latin typeface="Noto Sans CJK JP"/>
@@ -7448,45 +7553,6 @@
             </a:pPr>
             <a:r>
               <a:t>マヌカ</a:t>
-            </a:r>
-          </a:p>
-        </p:txBody>
-      </p:sp>
-      <p:sp>
-        <p:nvSpPr>
-          <p:cNvPr id="16" name="TextBox 15"/>
-          <p:cNvSpPr txBox="1"/>
-          <p:nvPr/>
-        </p:nvSpPr>
-        <p:spPr>
-          <a:xfrm>
-            <a:off x="4352544" y="2871216"/>
-            <a:ext cx="1463040" cy="310896"/>
-          </a:xfrm>
-          <a:prstGeom prst="rect">
-            <a:avLst/>
-          </a:prstGeom>
-          <a:noFill/>
-        </p:spPr>
-        <p:txBody>
-          <a:bodyPr wrap="square" lIns="0" rIns="0" tIns="0" bIns="0">
-            <a:spAutoFit/>
-          </a:bodyPr>
-          <a:lstStyle/>
-          <a:p>
-            <a:pPr>
-              <a:spcAft>
-                <a:spcPts val="800"/>
-              </a:spcAft>
-              <a:defRPr sz="1400" b="0">
-                <a:solidFill>
-                  <a:srgbClr val="61716B"/>
-                </a:solidFill>
-                <a:latin typeface="Noto Sans CJK JP"/>
-              </a:defRPr>
-            </a:pPr>
-            <a:r>
-              <a:t>Manuka</a:t>
             </a:r>
           </a:p>
         </p:txBody>
@@ -7499,8 +7565,8 @@
         </p:nvSpPr>
         <p:spPr>
           <a:xfrm>
-            <a:off x="658368" y="3474720"/>
-            <a:ext cx="5532120" cy="658368"/>
+            <a:off x="6327648" y="1984248"/>
+            <a:ext cx="2596896" cy="1920240"/>
           </a:xfrm>
           <a:prstGeom prst="roundRect">
             <a:avLst>
@@ -7536,73 +7602,60 @@
           </a:p>
         </p:txBody>
       </p:sp>
-      <p:sp>
-        <p:nvSpPr>
-          <p:cNvPr id="18" name="TextBox 17"/>
-          <p:cNvSpPr txBox="1"/>
-          <p:nvPr/>
-        </p:nvSpPr>
-        <p:spPr>
-          <a:xfrm>
-            <a:off x="896112" y="3621024"/>
-            <a:ext cx="521207" cy="320040"/>
-          </a:xfrm>
-          <a:prstGeom prst="rect">
-            <a:avLst/>
-          </a:prstGeom>
-          <a:noFill/>
-        </p:spPr>
-        <p:txBody>
-          <a:bodyPr wrap="square" lIns="0" rIns="0" tIns="0" bIns="0">
-            <a:spAutoFit/>
-          </a:bodyPr>
-          <a:lstStyle/>
-          <a:p>
-            <a:pPr>
+      <p:pic>
+        <p:nvPicPr>
+          <p:cNvPr id="18" name="Picture 17" descr="moe.jpg">
+            <a:hlinkClick r:id="rId7"/>
+          </p:cNvPr>
+          <p:cNvPicPr>
+            <a:picLocks noChangeAspect="1"/>
+          </p:cNvPicPr>
+          <p:nvPr/>
+        </p:nvPicPr>
+        <p:blipFill>
+          <a:blip r:embed="rId6"/>
+          <a:stretch>
+            <a:fillRect/>
+          </a:stretch>
+        </p:blipFill>
+        <p:spPr>
+          <a:xfrm>
+            <a:off x="6894576" y="2075688"/>
+            <a:ext cx="1463040" cy="1463040"/>
+          </a:xfrm>
+          <a:prstGeom prst="rect">
+            <a:avLst/>
+          </a:prstGeom>
+        </p:spPr>
+      </p:pic>
+      <p:sp>
+        <p:nvSpPr>
+          <p:cNvPr id="19" name="TextBox 18"/>
+          <p:cNvSpPr txBox="1"/>
+          <p:nvPr/>
+        </p:nvSpPr>
+        <p:spPr>
+          <a:xfrm>
+            <a:off x="6483096" y="3602736"/>
+            <a:ext cx="2286000" cy="274320"/>
+          </a:xfrm>
+          <a:prstGeom prst="rect">
+            <a:avLst/>
+          </a:prstGeom>
+          <a:noFill/>
+        </p:spPr>
+        <p:txBody>
+          <a:bodyPr wrap="square" lIns="0" rIns="0" tIns="0" bIns="0">
+            <a:spAutoFit/>
+          </a:bodyPr>
+          <a:lstStyle/>
+          <a:p>
+            <a:pPr algn="ctr">
               <a:spcAft>
                 <a:spcPts val="800"/>
               </a:spcAft>
               <a:defRPr sz="1600" b="1">
                 <a:solidFill>
-                  <a:srgbClr val="24685E"/>
-                </a:solidFill>
-                <a:latin typeface="Noto Sans CJK JP"/>
-              </a:defRPr>
-            </a:pPr>
-            <a:r>
-              <a:t>03</a:t>
-            </a:r>
-          </a:p>
-        </p:txBody>
-      </p:sp>
-      <p:sp>
-        <p:nvSpPr>
-          <p:cNvPr id="19" name="TextBox 18"/>
-          <p:cNvSpPr txBox="1"/>
-          <p:nvPr/>
-        </p:nvSpPr>
-        <p:spPr>
-          <a:xfrm>
-            <a:off x="1691640" y="3584448"/>
-            <a:ext cx="2560320" cy="411480"/>
-          </a:xfrm>
-          <a:prstGeom prst="rect">
-            <a:avLst/>
-          </a:prstGeom>
-          <a:noFill/>
-        </p:spPr>
-        <p:txBody>
-          <a:bodyPr wrap="square" lIns="0" rIns="0" tIns="0" bIns="0">
-            <a:spAutoFit/>
-          </a:bodyPr>
-          <a:lstStyle/>
-          <a:p>
-            <a:pPr>
-              <a:spcAft>
-                <a:spcPts val="800"/>
-              </a:spcAft>
-              <a:defRPr sz="2300" b="1">
-                <a:solidFill>
                   <a:srgbClr val="173E3C"/>
                 </a:solidFill>
                 <a:latin typeface="Noto Sans CJK JP"/>
@@ -7616,53 +7669,14 @@
       </p:sp>
       <p:sp>
         <p:nvSpPr>
-          <p:cNvPr id="20" name="TextBox 19"/>
-          <p:cNvSpPr txBox="1"/>
-          <p:nvPr/>
-        </p:nvSpPr>
-        <p:spPr>
-          <a:xfrm>
-            <a:off x="4352544" y="3657600"/>
-            <a:ext cx="1463040" cy="310896"/>
-          </a:xfrm>
-          <a:prstGeom prst="rect">
-            <a:avLst/>
-          </a:prstGeom>
-          <a:noFill/>
-        </p:spPr>
-        <p:txBody>
-          <a:bodyPr wrap="square" lIns="0" rIns="0" tIns="0" bIns="0">
-            <a:spAutoFit/>
-          </a:bodyPr>
-          <a:lstStyle/>
-          <a:p>
-            <a:pPr>
-              <a:spcAft>
-                <a:spcPts val="800"/>
-              </a:spcAft>
-              <a:defRPr sz="1400" b="0">
-                <a:solidFill>
-                  <a:srgbClr val="61716B"/>
-                </a:solidFill>
-                <a:latin typeface="Noto Sans CJK JP"/>
-              </a:defRPr>
-            </a:pPr>
-            <a:r>
-              <a:t>Moe</a:t>
-            </a:r>
-          </a:p>
-        </p:txBody>
-      </p:sp>
-      <p:sp>
-        <p:nvSpPr>
-          <p:cNvPr id="21" name="Rounded Rectangle 20"/>
+          <p:cNvPr id="20" name="Rounded Rectangle 19"/>
           <p:cNvSpPr/>
           <p:nvPr/>
         </p:nvSpPr>
         <p:spPr>
           <a:xfrm>
-            <a:off x="658368" y="4261104"/>
-            <a:ext cx="5532120" cy="658368"/>
+            <a:off x="9162288" y="1984248"/>
+            <a:ext cx="2596896" cy="1920240"/>
           </a:xfrm>
           <a:prstGeom prst="roundRect">
             <a:avLst>
@@ -7698,6 +7712,32 @@
           </a:p>
         </p:txBody>
       </p:sp>
+      <p:pic>
+        <p:nvPicPr>
+          <p:cNvPr id="21" name="Picture 20" descr="lime.jpg">
+            <a:hlinkClick r:id="rId9"/>
+          </p:cNvPr>
+          <p:cNvPicPr>
+            <a:picLocks noChangeAspect="1"/>
+          </p:cNvPicPr>
+          <p:nvPr/>
+        </p:nvPicPr>
+        <p:blipFill>
+          <a:blip r:embed="rId8"/>
+          <a:stretch>
+            <a:fillRect/>
+          </a:stretch>
+        </p:blipFill>
+        <p:spPr>
+          <a:xfrm>
+            <a:off x="9729216" y="2075688"/>
+            <a:ext cx="1463040" cy="1463040"/>
+          </a:xfrm>
+          <a:prstGeom prst="rect">
+            <a:avLst/>
+          </a:prstGeom>
+        </p:spPr>
+      </p:pic>
       <p:sp>
         <p:nvSpPr>
           <p:cNvPr id="22" name="TextBox 21"/>
@@ -7706,65 +7746,26 @@
         </p:nvSpPr>
         <p:spPr>
           <a:xfrm>
-            <a:off x="896112" y="4407408"/>
-            <a:ext cx="521207" cy="320040"/>
-          </a:xfrm>
-          <a:prstGeom prst="rect">
-            <a:avLst/>
-          </a:prstGeom>
-          <a:noFill/>
-        </p:spPr>
-        <p:txBody>
-          <a:bodyPr wrap="square" lIns="0" rIns="0" tIns="0" bIns="0">
-            <a:spAutoFit/>
-          </a:bodyPr>
-          <a:lstStyle/>
-          <a:p>
-            <a:pPr>
+            <a:off x="9317736" y="3602736"/>
+            <a:ext cx="2286000" cy="274320"/>
+          </a:xfrm>
+          <a:prstGeom prst="rect">
+            <a:avLst/>
+          </a:prstGeom>
+          <a:noFill/>
+        </p:spPr>
+        <p:txBody>
+          <a:bodyPr wrap="square" lIns="0" rIns="0" tIns="0" bIns="0">
+            <a:spAutoFit/>
+          </a:bodyPr>
+          <a:lstStyle/>
+          <a:p>
+            <a:pPr algn="ctr">
               <a:spcAft>
                 <a:spcPts val="800"/>
               </a:spcAft>
               <a:defRPr sz="1600" b="1">
                 <a:solidFill>
-                  <a:srgbClr val="24685E"/>
-                </a:solidFill>
-                <a:latin typeface="Noto Sans CJK JP"/>
-              </a:defRPr>
-            </a:pPr>
-            <a:r>
-              <a:t>04</a:t>
-            </a:r>
-          </a:p>
-        </p:txBody>
-      </p:sp>
-      <p:sp>
-        <p:nvSpPr>
-          <p:cNvPr id="23" name="TextBox 22"/>
-          <p:cNvSpPr txBox="1"/>
-          <p:nvPr/>
-        </p:nvSpPr>
-        <p:spPr>
-          <a:xfrm>
-            <a:off x="1691640" y="4370832"/>
-            <a:ext cx="2560320" cy="411480"/>
-          </a:xfrm>
-          <a:prstGeom prst="rect">
-            <a:avLst/>
-          </a:prstGeom>
-          <a:noFill/>
-        </p:spPr>
-        <p:txBody>
-          <a:bodyPr wrap="square" lIns="0" rIns="0" tIns="0" bIns="0">
-            <a:spAutoFit/>
-          </a:bodyPr>
-          <a:lstStyle/>
-          <a:p>
-            <a:pPr>
-              <a:spcAft>
-                <a:spcPts val="800"/>
-              </a:spcAft>
-              <a:defRPr sz="2300" b="1">
-                <a:solidFill>
                   <a:srgbClr val="173E3C"/>
                 </a:solidFill>
                 <a:latin typeface="Noto Sans CJK JP"/>
@@ -7778,53 +7779,14 @@
       </p:sp>
       <p:sp>
         <p:nvSpPr>
-          <p:cNvPr id="24" name="TextBox 23"/>
-          <p:cNvSpPr txBox="1"/>
-          <p:nvPr/>
-        </p:nvSpPr>
-        <p:spPr>
-          <a:xfrm>
-            <a:off x="4352544" y="4443984"/>
-            <a:ext cx="1463040" cy="310896"/>
-          </a:xfrm>
-          <a:prstGeom prst="rect">
-            <a:avLst/>
-          </a:prstGeom>
-          <a:noFill/>
-        </p:spPr>
-        <p:txBody>
-          <a:bodyPr wrap="square" lIns="0" rIns="0" tIns="0" bIns="0">
-            <a:spAutoFit/>
-          </a:bodyPr>
-          <a:lstStyle/>
-          <a:p>
-            <a:pPr>
-              <a:spcAft>
-                <a:spcPts val="800"/>
-              </a:spcAft>
-              <a:defRPr sz="1400" b="0">
-                <a:solidFill>
-                  <a:srgbClr val="61716B"/>
-                </a:solidFill>
-                <a:latin typeface="Noto Sans CJK JP"/>
-              </a:defRPr>
-            </a:pPr>
-            <a:r>
-              <a:t>Lime</a:t>
-            </a:r>
-          </a:p>
-        </p:txBody>
-      </p:sp>
-      <p:sp>
-        <p:nvSpPr>
-          <p:cNvPr id="25" name="Rounded Rectangle 24"/>
+          <p:cNvPr id="23" name="Rounded Rectangle 22"/>
           <p:cNvSpPr/>
           <p:nvPr/>
         </p:nvSpPr>
         <p:spPr>
           <a:xfrm>
-            <a:off x="658368" y="5047488"/>
-            <a:ext cx="5532120" cy="658368"/>
+            <a:off x="2075688" y="4361688"/>
+            <a:ext cx="2596896" cy="1920240"/>
           </a:xfrm>
           <a:prstGeom prst="roundRect">
             <a:avLst>
@@ -7860,142 +7822,26 @@
           </a:p>
         </p:txBody>
       </p:sp>
-      <p:sp>
-        <p:nvSpPr>
-          <p:cNvPr id="26" name="TextBox 25"/>
-          <p:cNvSpPr txBox="1"/>
-          <p:nvPr/>
-        </p:nvSpPr>
-        <p:spPr>
-          <a:xfrm>
-            <a:off x="896112" y="5193792"/>
-            <a:ext cx="521207" cy="320040"/>
-          </a:xfrm>
-          <a:prstGeom prst="rect">
-            <a:avLst/>
-          </a:prstGeom>
-          <a:noFill/>
-        </p:spPr>
-        <p:txBody>
-          <a:bodyPr wrap="square" lIns="0" rIns="0" tIns="0" bIns="0">
-            <a:spAutoFit/>
-          </a:bodyPr>
-          <a:lstStyle/>
-          <a:p>
-            <a:pPr>
-              <a:spcAft>
-                <a:spcPts val="800"/>
-              </a:spcAft>
-              <a:defRPr sz="1600" b="1">
-                <a:solidFill>
-                  <a:srgbClr val="24685E"/>
-                </a:solidFill>
-                <a:latin typeface="Noto Sans CJK JP"/>
-              </a:defRPr>
-            </a:pPr>
-            <a:r>
-              <a:t>05</a:t>
-            </a:r>
-          </a:p>
-        </p:txBody>
-      </p:sp>
-      <p:sp>
-        <p:nvSpPr>
-          <p:cNvPr id="27" name="TextBox 26"/>
-          <p:cNvSpPr txBox="1"/>
-          <p:nvPr/>
-        </p:nvSpPr>
-        <p:spPr>
-          <a:xfrm>
-            <a:off x="1691640" y="5157216"/>
-            <a:ext cx="2560320" cy="411480"/>
-          </a:xfrm>
-          <a:prstGeom prst="rect">
-            <a:avLst/>
-          </a:prstGeom>
-          <a:noFill/>
-        </p:spPr>
-        <p:txBody>
-          <a:bodyPr wrap="square" lIns="0" rIns="0" tIns="0" bIns="0">
-            <a:spAutoFit/>
-          </a:bodyPr>
-          <a:lstStyle/>
-          <a:p>
-            <a:pPr>
-              <a:spcAft>
-                <a:spcPts val="800"/>
-              </a:spcAft>
-              <a:defRPr sz="2300" b="1">
-                <a:solidFill>
-                  <a:srgbClr val="173E3C"/>
-                </a:solidFill>
-                <a:latin typeface="Noto Sans CJK JP"/>
-              </a:defRPr>
-            </a:pPr>
-            <a:r>
-              <a:t>桔梗</a:t>
-            </a:r>
-          </a:p>
-        </p:txBody>
-      </p:sp>
-      <p:sp>
-        <p:nvSpPr>
-          <p:cNvPr id="28" name="TextBox 27"/>
-          <p:cNvSpPr txBox="1"/>
-          <p:nvPr/>
-        </p:nvSpPr>
-        <p:spPr>
-          <a:xfrm>
-            <a:off x="4352544" y="5230368"/>
-            <a:ext cx="1463040" cy="310896"/>
-          </a:xfrm>
-          <a:prstGeom prst="rect">
-            <a:avLst/>
-          </a:prstGeom>
-          <a:noFill/>
-        </p:spPr>
-        <p:txBody>
-          <a:bodyPr wrap="square" lIns="0" rIns="0" tIns="0" bIns="0">
-            <a:spAutoFit/>
-          </a:bodyPr>
-          <a:lstStyle/>
-          <a:p>
-            <a:pPr>
-              <a:spcAft>
-                <a:spcPts val="800"/>
-              </a:spcAft>
-              <a:defRPr sz="1400" b="0">
-                <a:solidFill>
-                  <a:srgbClr val="61716B"/>
-                </a:solidFill>
-                <a:latin typeface="Noto Sans CJK JP"/>
-              </a:defRPr>
-            </a:pPr>
-            <a:r>
-              <a:t>Kikyo</a:t>
-            </a:r>
-          </a:p>
-        </p:txBody>
-      </p:sp>
       <p:pic>
         <p:nvPicPr>
-          <p:cNvPr id="29" name="Picture 28" descr="exec-871844d4-edbb-4a08-9d69-90132a8b8d7d.png"/>
+          <p:cNvPr id="24" name="Picture 23" descr="komano.jpg">
+            <a:hlinkClick r:id="rId11"/>
+          </p:cNvPr>
           <p:cNvPicPr>
             <a:picLocks noChangeAspect="1"/>
           </p:cNvPicPr>
           <p:nvPr/>
         </p:nvPicPr>
         <p:blipFill>
-          <a:blip r:embed="rId2"/>
-          <a:srcRect l="50000" t="50000"/>
+          <a:blip r:embed="rId10"/>
           <a:stretch>
             <a:fillRect/>
           </a:stretch>
         </p:blipFill>
         <p:spPr>
           <a:xfrm>
-            <a:off x="7114032" y="1929384"/>
-            <a:ext cx="4096512" cy="4096512"/>
+            <a:off x="2642616" y="4453127"/>
+            <a:ext cx="1463040" cy="1463040"/>
           </a:xfrm>
           <a:prstGeom prst="rect">
             <a:avLst/>
@@ -8004,31 +7850,290 @@
       </p:pic>
       <p:sp>
         <p:nvSpPr>
-          <p:cNvPr id="30" name="TextBox 29"/>
-          <p:cNvSpPr txBox="1"/>
-          <p:nvPr/>
-        </p:nvSpPr>
-        <p:spPr>
-          <a:xfrm>
-            <a:off x="7114032" y="6099048"/>
-            <a:ext cx="4096512" cy="274320"/>
-          </a:xfrm>
-          <a:prstGeom prst="rect">
-            <a:avLst/>
-          </a:prstGeom>
-          <a:noFill/>
-        </p:spPr>
-        <p:txBody>
-          <a:bodyPr wrap="square" lIns="0" rIns="0" tIns="0" bIns="0">
-            <a:spAutoFit/>
-          </a:bodyPr>
-          <a:lstStyle/>
-          <a:p>
-            <a:pPr>
-              <a:spcAft>
-                <a:spcPts val="800"/>
-              </a:spcAft>
-              <a:defRPr sz="800" b="0">
+          <p:cNvPr id="25" name="TextBox 24"/>
+          <p:cNvSpPr txBox="1"/>
+          <p:nvPr/>
+        </p:nvSpPr>
+        <p:spPr>
+          <a:xfrm>
+            <a:off x="2231136" y="5980175"/>
+            <a:ext cx="2286000" cy="274320"/>
+          </a:xfrm>
+          <a:prstGeom prst="rect">
+            <a:avLst/>
+          </a:prstGeom>
+          <a:noFill/>
+        </p:spPr>
+        <p:txBody>
+          <a:bodyPr wrap="square" lIns="0" rIns="0" tIns="0" bIns="0">
+            <a:spAutoFit/>
+          </a:bodyPr>
+          <a:lstStyle/>
+          <a:p>
+            <a:pPr algn="ctr">
+              <a:spcAft>
+                <a:spcPts val="800"/>
+              </a:spcAft>
+              <a:defRPr sz="1600" b="1">
+                <a:solidFill>
+                  <a:srgbClr val="173E3C"/>
+                </a:solidFill>
+                <a:latin typeface="Noto Sans CJK JP"/>
+              </a:defRPr>
+            </a:pPr>
+            <a:r>
+              <a:t>狛乃</a:t>
+            </a:r>
+          </a:p>
+        </p:txBody>
+      </p:sp>
+      <p:sp>
+        <p:nvSpPr>
+          <p:cNvPr id="26" name="Rounded Rectangle 25"/>
+          <p:cNvSpPr/>
+          <p:nvPr/>
+        </p:nvSpPr>
+        <p:spPr>
+          <a:xfrm>
+            <a:off x="4910328" y="4361688"/>
+            <a:ext cx="2596896" cy="1920240"/>
+          </a:xfrm>
+          <a:prstGeom prst="roundRect">
+            <a:avLst>
+              <a:gd name="adj" fmla="val 10000"/>
+            </a:avLst>
+          </a:prstGeom>
+          <a:solidFill>
+            <a:srgbClr val="FFFFFF"/>
+          </a:solidFill>
+          <a:ln>
+            <a:noFill/>
+          </a:ln>
+        </p:spPr>
+        <p:style>
+          <a:lnRef idx="1">
+            <a:schemeClr val="accent1"/>
+          </a:lnRef>
+          <a:fillRef idx="3">
+            <a:schemeClr val="accent1"/>
+          </a:fillRef>
+          <a:effectRef idx="2">
+            <a:schemeClr val="accent1"/>
+          </a:effectRef>
+          <a:fontRef idx="minor">
+            <a:schemeClr val="lt1"/>
+          </a:fontRef>
+        </p:style>
+        <p:txBody>
+          <a:bodyPr rtlCol="0" anchor="ctr"/>
+          <a:lstStyle/>
+          <a:p>
+            <a:pPr algn="ctr"/>
+          </a:p>
+        </p:txBody>
+      </p:sp>
+      <p:pic>
+        <p:nvPicPr>
+          <p:cNvPr id="27" name="Picture 26" descr="maki.jpg">
+            <a:hlinkClick r:id="rId13"/>
+          </p:cNvPr>
+          <p:cNvPicPr>
+            <a:picLocks noChangeAspect="1"/>
+          </p:cNvPicPr>
+          <p:nvPr/>
+        </p:nvPicPr>
+        <p:blipFill>
+          <a:blip r:embed="rId12"/>
+          <a:stretch>
+            <a:fillRect/>
+          </a:stretch>
+        </p:blipFill>
+        <p:spPr>
+          <a:xfrm>
+            <a:off x="5477256" y="4453127"/>
+            <a:ext cx="1463040" cy="1463040"/>
+          </a:xfrm>
+          <a:prstGeom prst="rect">
+            <a:avLst/>
+          </a:prstGeom>
+        </p:spPr>
+      </p:pic>
+      <p:sp>
+        <p:nvSpPr>
+          <p:cNvPr id="28" name="TextBox 27"/>
+          <p:cNvSpPr txBox="1"/>
+          <p:nvPr/>
+        </p:nvSpPr>
+        <p:spPr>
+          <a:xfrm>
+            <a:off x="5065776" y="5980175"/>
+            <a:ext cx="2286000" cy="274320"/>
+          </a:xfrm>
+          <a:prstGeom prst="rect">
+            <a:avLst/>
+          </a:prstGeom>
+          <a:noFill/>
+        </p:spPr>
+        <p:txBody>
+          <a:bodyPr wrap="square" lIns="0" rIns="0" tIns="0" bIns="0">
+            <a:spAutoFit/>
+          </a:bodyPr>
+          <a:lstStyle/>
+          <a:p>
+            <a:pPr algn="ctr">
+              <a:spcAft>
+                <a:spcPts val="800"/>
+              </a:spcAft>
+              <a:defRPr sz="1600" b="1">
+                <a:solidFill>
+                  <a:srgbClr val="173E3C"/>
+                </a:solidFill>
+                <a:latin typeface="Noto Sans CJK JP"/>
+              </a:defRPr>
+            </a:pPr>
+            <a:r>
+              <a:t>碼希</a:t>
+            </a:r>
+          </a:p>
+        </p:txBody>
+      </p:sp>
+      <p:sp>
+        <p:nvSpPr>
+          <p:cNvPr id="29" name="Rounded Rectangle 28"/>
+          <p:cNvSpPr/>
+          <p:nvPr/>
+        </p:nvSpPr>
+        <p:spPr>
+          <a:xfrm>
+            <a:off x="7744968" y="4361688"/>
+            <a:ext cx="2596896" cy="1920240"/>
+          </a:xfrm>
+          <a:prstGeom prst="roundRect">
+            <a:avLst>
+              <a:gd name="adj" fmla="val 10000"/>
+            </a:avLst>
+          </a:prstGeom>
+          <a:solidFill>
+            <a:srgbClr val="FFFFFF"/>
+          </a:solidFill>
+          <a:ln>
+            <a:noFill/>
+          </a:ln>
+        </p:spPr>
+        <p:style>
+          <a:lnRef idx="1">
+            <a:schemeClr val="accent1"/>
+          </a:lnRef>
+          <a:fillRef idx="3">
+            <a:schemeClr val="accent1"/>
+          </a:fillRef>
+          <a:effectRef idx="2">
+            <a:schemeClr val="accent1"/>
+          </a:effectRef>
+          <a:fontRef idx="minor">
+            <a:schemeClr val="lt1"/>
+          </a:fontRef>
+        </p:style>
+        <p:txBody>
+          <a:bodyPr rtlCol="0" anchor="ctr"/>
+          <a:lstStyle/>
+          <a:p>
+            <a:pPr algn="ctr"/>
+          </a:p>
+        </p:txBody>
+      </p:sp>
+      <p:pic>
+        <p:nvPicPr>
+          <p:cNvPr id="30" name="Picture 29" descr="kuuta.jpg">
+            <a:hlinkClick r:id="rId15"/>
+          </p:cNvPr>
+          <p:cNvPicPr>
+            <a:picLocks noChangeAspect="1"/>
+          </p:cNvPicPr>
+          <p:nvPr/>
+        </p:nvPicPr>
+        <p:blipFill>
+          <a:blip r:embed="rId14"/>
+          <a:stretch>
+            <a:fillRect/>
+          </a:stretch>
+        </p:blipFill>
+        <p:spPr>
+          <a:xfrm>
+            <a:off x="8311896" y="4453127"/>
+            <a:ext cx="1463040" cy="1463040"/>
+          </a:xfrm>
+          <a:prstGeom prst="rect">
+            <a:avLst/>
+          </a:prstGeom>
+        </p:spPr>
+      </p:pic>
+      <p:sp>
+        <p:nvSpPr>
+          <p:cNvPr id="31" name="TextBox 30"/>
+          <p:cNvSpPr txBox="1"/>
+          <p:nvPr/>
+        </p:nvSpPr>
+        <p:spPr>
+          <a:xfrm>
+            <a:off x="7900416" y="5980175"/>
+            <a:ext cx="2286000" cy="274320"/>
+          </a:xfrm>
+          <a:prstGeom prst="rect">
+            <a:avLst/>
+          </a:prstGeom>
+          <a:noFill/>
+        </p:spPr>
+        <p:txBody>
+          <a:bodyPr wrap="square" lIns="0" rIns="0" tIns="0" bIns="0">
+            <a:spAutoFit/>
+          </a:bodyPr>
+          <a:lstStyle/>
+          <a:p>
+            <a:pPr algn="ctr">
+              <a:spcAft>
+                <a:spcPts val="800"/>
+              </a:spcAft>
+              <a:defRPr sz="1600" b="1">
+                <a:solidFill>
+                  <a:srgbClr val="173E3C"/>
+                </a:solidFill>
+                <a:latin typeface="Noto Sans CJK JP"/>
+              </a:defRPr>
+            </a:pPr>
+            <a:r>
+              <a:t>くうた</a:t>
+            </a:r>
+          </a:p>
+        </p:txBody>
+      </p:sp>
+      <p:sp>
+        <p:nvSpPr>
+          <p:cNvPr id="32" name="TextBox 31"/>
+          <p:cNvSpPr txBox="1"/>
+          <p:nvPr/>
+        </p:nvSpPr>
+        <p:spPr>
+          <a:xfrm>
+            <a:off x="8183879" y="6291072"/>
+            <a:ext cx="3200400" cy="128016"/>
+          </a:xfrm>
+          <a:prstGeom prst="rect">
+            <a:avLst/>
+          </a:prstGeom>
+          <a:noFill/>
+        </p:spPr>
+        <p:txBody>
+          <a:bodyPr wrap="square" lIns="0" rIns="0" tIns="0" bIns="0">
+            <a:spAutoFit/>
+          </a:bodyPr>
+          <a:lstStyle/>
+          <a:p>
+            <a:pPr>
+              <a:spcAft>
+                <a:spcPts val="800"/>
+              </a:spcAft>
+              <a:defRPr sz="700" b="0">
                 <a:solidFill>
                   <a:srgbClr val="61716B"/>
                 </a:solidFill>
@@ -8036,7 +8141,7 @@
               </a:defRPr>
             </a:pPr>
             <a:r>
-              <a:t>参考イメージ（AI生成）</a:t>
+              <a:t>画像出典：各モデルのBOOTH販売ページ</a:t>
             </a:r>
           </a:p>
         </p:txBody>
@@ -8304,7 +8409,7 @@
               </a:defRPr>
             </a:pPr>
             <a:r>
-              <a:t>アース製薬 企業ブース｜3Dお風呂セット 制作発注資料｜制作内容 v0.4</a:t>
+              <a:t>アース製薬 企業ブース｜3Dお風呂セット 制作発注資料｜制作内容 v0.5</a:t>
             </a:r>
           </a:p>
         </p:txBody>
@@ -8967,7 +9072,7 @@
               </a:defRPr>
             </a:pPr>
             <a:r>
-              <a:t>アース製薬 企業ブース｜3Dお風呂セット 制作発注資料｜制作内容 v0.4</a:t>
+              <a:t>アース製薬 企業ブース｜3Dお風呂セット 制作発注資料｜制作内容 v0.5</a:t>
             </a:r>
           </a:p>
         </p:txBody>
@@ -9013,7 +9118,7 @@
       </p:sp>
       <p:pic>
         <p:nvPicPr>
-          <p:cNvPr id="9" name="Picture 8" descr="exec-871844d4-edbb-4a08-9d69-90132a8b8d7d.png"/>
+          <p:cNvPr id="9" name="Picture 8" descr="exec-c7a9a72c-5423-4325-bae1-c7d3b8f836c6.png"/>
           <p:cNvPicPr>
             <a:picLocks noChangeAspect="1"/>
           </p:cNvPicPr>
@@ -9021,6 +9126,7 @@
         </p:nvPicPr>
         <p:blipFill>
           <a:blip r:embed="rId2"/>
+          <a:srcRect r="50000" b="50000"/>
           <a:stretch>
             <a:fillRect/>
           </a:stretch>
@@ -9028,16 +9134,91 @@
         <p:spPr>
           <a:xfrm>
             <a:off x="640080" y="1920240"/>
-            <a:ext cx="4069080" cy="4069080"/>
+            <a:ext cx="2034540" cy="2034540"/>
           </a:xfrm>
           <a:prstGeom prst="rect">
             <a:avLst/>
           </a:prstGeom>
         </p:spPr>
       </p:pic>
-      <p:sp>
-        <p:nvSpPr>
-          <p:cNvPr id="10" name="TextBox 9"/>
+      <p:pic>
+        <p:nvPicPr>
+          <p:cNvPr id="10" name="Picture 9" descr="exec-c7a9a72c-5423-4325-bae1-c7d3b8f836c6.png"/>
+          <p:cNvPicPr>
+            <a:picLocks noChangeAspect="1"/>
+          </p:cNvPicPr>
+          <p:nvPr/>
+        </p:nvPicPr>
+        <p:blipFill>
+          <a:blip r:embed="rId2"/>
+          <a:srcRect l="50000" b="50000"/>
+          <a:stretch>
+            <a:fillRect/>
+          </a:stretch>
+        </p:blipFill>
+        <p:spPr>
+          <a:xfrm>
+            <a:off x="2674620" y="1920240"/>
+            <a:ext cx="2034540" cy="2034540"/>
+          </a:xfrm>
+          <a:prstGeom prst="rect">
+            <a:avLst/>
+          </a:prstGeom>
+        </p:spPr>
+      </p:pic>
+      <p:pic>
+        <p:nvPicPr>
+          <p:cNvPr id="11" name="Picture 10" descr="exec-871844d4-edbb-4a08-9d69-90132a8b8d7d.png"/>
+          <p:cNvPicPr>
+            <a:picLocks noChangeAspect="1"/>
+          </p:cNvPicPr>
+          <p:nvPr/>
+        </p:nvPicPr>
+        <p:blipFill>
+          <a:blip r:embed="rId3"/>
+          <a:srcRect r="50000" t="50000"/>
+          <a:stretch>
+            <a:fillRect/>
+          </a:stretch>
+        </p:blipFill>
+        <p:spPr>
+          <a:xfrm>
+            <a:off x="640080" y="3954780"/>
+            <a:ext cx="2034540" cy="2034540"/>
+          </a:xfrm>
+          <a:prstGeom prst="rect">
+            <a:avLst/>
+          </a:prstGeom>
+        </p:spPr>
+      </p:pic>
+      <p:pic>
+        <p:nvPicPr>
+          <p:cNvPr id="12" name="Picture 11" descr="exec-871844d4-edbb-4a08-9d69-90132a8b8d7d.png"/>
+          <p:cNvPicPr>
+            <a:picLocks noChangeAspect="1"/>
+          </p:cNvPicPr>
+          <p:nvPr/>
+        </p:nvPicPr>
+        <p:blipFill>
+          <a:blip r:embed="rId3"/>
+          <a:srcRect l="50000" t="50000"/>
+          <a:stretch>
+            <a:fillRect/>
+          </a:stretch>
+        </p:blipFill>
+        <p:spPr>
+          <a:xfrm>
+            <a:off x="2674620" y="3954780"/>
+            <a:ext cx="2034540" cy="2034540"/>
+          </a:xfrm>
+          <a:prstGeom prst="rect">
+            <a:avLst/>
+          </a:prstGeom>
+        </p:spPr>
+      </p:pic>
+      <p:sp>
+        <p:nvSpPr>
+          <p:cNvPr id="13" name="TextBox 12"/>
           <p:cNvSpPr txBox="1"/>
           <p:nvPr/>
         </p:nvSpPr>
@@ -9076,7 +9257,7 @@
       </p:sp>
       <p:sp>
         <p:nvSpPr>
-          <p:cNvPr id="11" name="Rounded Rectangle 10"/>
+          <p:cNvPr id="14" name="Rounded Rectangle 13"/>
           <p:cNvSpPr/>
           <p:nvPr/>
         </p:nvSpPr>
@@ -9121,7 +9302,7 @@
       </p:sp>
       <p:sp>
         <p:nvSpPr>
-          <p:cNvPr id="12" name="TextBox 11"/>
+          <p:cNvPr id="15" name="TextBox 14"/>
           <p:cNvSpPr txBox="1"/>
           <p:nvPr/>
         </p:nvSpPr>
@@ -9160,7 +9341,7 @@
       </p:sp>
       <p:sp>
         <p:nvSpPr>
-          <p:cNvPr id="13" name="TextBox 12"/>
+          <p:cNvPr id="16" name="TextBox 15"/>
           <p:cNvSpPr txBox="1"/>
           <p:nvPr/>
         </p:nvSpPr>
@@ -9199,7 +9380,7 @@
       </p:sp>
       <p:sp>
         <p:nvSpPr>
-          <p:cNvPr id="14" name="TextBox 13"/>
+          <p:cNvPr id="17" name="TextBox 16"/>
           <p:cNvSpPr txBox="1"/>
           <p:nvPr/>
         </p:nvSpPr>
@@ -9238,7 +9419,7 @@
       </p:sp>
       <p:sp>
         <p:nvSpPr>
-          <p:cNvPr id="15" name="Rounded Rectangle 14"/>
+          <p:cNvPr id="18" name="Rounded Rectangle 17"/>
           <p:cNvSpPr/>
           <p:nvPr/>
         </p:nvSpPr>
@@ -9283,7 +9464,7 @@
       </p:sp>
       <p:sp>
         <p:nvSpPr>
-          <p:cNvPr id="16" name="TextBox 15"/>
+          <p:cNvPr id="19" name="TextBox 18"/>
           <p:cNvSpPr txBox="1"/>
           <p:nvPr/>
         </p:nvSpPr>
@@ -9322,7 +9503,7 @@
       </p:sp>
       <p:sp>
         <p:nvSpPr>
-          <p:cNvPr id="17" name="TextBox 16"/>
+          <p:cNvPr id="20" name="TextBox 19"/>
           <p:cNvSpPr txBox="1"/>
           <p:nvPr/>
         </p:nvSpPr>
@@ -9361,7 +9542,7 @@
       </p:sp>
       <p:sp>
         <p:nvSpPr>
-          <p:cNvPr id="18" name="TextBox 17"/>
+          <p:cNvPr id="21" name="TextBox 20"/>
           <p:cNvSpPr txBox="1"/>
           <p:nvPr/>
         </p:nvSpPr>
@@ -9400,7 +9581,7 @@
       </p:sp>
       <p:sp>
         <p:nvSpPr>
-          <p:cNvPr id="19" name="Rounded Rectangle 18"/>
+          <p:cNvPr id="22" name="Rounded Rectangle 21"/>
           <p:cNvSpPr/>
           <p:nvPr/>
         </p:nvSpPr>
@@ -9445,7 +9626,7 @@
       </p:sp>
       <p:sp>
         <p:nvSpPr>
-          <p:cNvPr id="20" name="TextBox 19"/>
+          <p:cNvPr id="23" name="TextBox 22"/>
           <p:cNvSpPr txBox="1"/>
           <p:nvPr/>
         </p:nvSpPr>
@@ -9484,7 +9665,7 @@
       </p:sp>
       <p:sp>
         <p:nvSpPr>
-          <p:cNvPr id="21" name="TextBox 20"/>
+          <p:cNvPr id="24" name="TextBox 23"/>
           <p:cNvSpPr txBox="1"/>
           <p:nvPr/>
         </p:nvSpPr>
@@ -9523,7 +9704,7 @@
       </p:sp>
       <p:sp>
         <p:nvSpPr>
-          <p:cNvPr id="22" name="TextBox 21"/>
+          <p:cNvPr id="25" name="TextBox 24"/>
           <p:cNvSpPr txBox="1"/>
           <p:nvPr/>
         </p:nvSpPr>

--- a/documents/slides/bath-set-production-slides.pptx
+++ b/documents/slides/bath-set-production-slides.pptx
@@ -3340,7 +3340,7 @@
               </a:defRPr>
             </a:pPr>
             <a:r>
-              <a:t>アース製薬 企業ブース｜3Dお風呂セット 制作発注資料｜制作内容 v0.5</a:t>
+              <a:t>アース製薬 企業ブース｜3Dお風呂セット 制作発注資料｜制作内容 v0.6</a:t>
             </a:r>
           </a:p>
         </p:txBody>
@@ -4148,7 +4148,7 @@
               </a:defRPr>
             </a:pPr>
             <a:r>
-              <a:t>アース製薬 企業ブース｜3Dお風呂セット 制作発注資料｜制作内容 v0.5</a:t>
+              <a:t>アース製薬 企業ブース｜3Dお風呂セット 制作発注資料｜制作内容 v0.6</a:t>
             </a:r>
           </a:p>
         </p:txBody>
@@ -5281,7 +5281,7 @@
               </a:defRPr>
             </a:pPr>
             <a:r>
-              <a:t>アース製薬 企業ブース｜3Dお風呂セット 制作発注資料｜制作内容 v0.5</a:t>
+              <a:t>アース製薬 企業ブース｜3Dお風呂セット 制作発注資料｜制作内容 v0.6</a:t>
             </a:r>
           </a:p>
         </p:txBody>
@@ -6010,7 +6010,7 @@
               </a:defRPr>
             </a:pPr>
             <a:r>
-              <a:t>アース製薬 企業ブース｜3Dお風呂セット 制作発注資料｜制作内容 v0.5</a:t>
+              <a:t>アース製薬 企業ブース｜3Dお風呂セット 制作発注資料｜制作内容 v0.6</a:t>
             </a:r>
           </a:p>
         </p:txBody>
@@ -6559,7 +6559,7 @@
               </a:defRPr>
             </a:pPr>
             <a:r>
-              <a:t>アース製薬 企業ブース｜3Dお風呂セット 制作発注資料｜制作内容 v0.5</a:t>
+              <a:t>アース製薬 企業ブース｜3Dお風呂セット 制作発注資料｜制作内容 v0.6</a:t>
             </a:r>
           </a:p>
         </p:txBody>
@@ -7215,7 +7215,7 @@
               </a:defRPr>
             </a:pPr>
             <a:r>
-              <a:t>アース製薬 企業ブース｜3Dお風呂セット 制作発注資料｜制作内容 v0.5</a:t>
+              <a:t>アース製薬 企業ブース｜3Dお風呂セット 制作発注資料｜制作内容 v0.6</a:t>
             </a:r>
           </a:p>
         </p:txBody>
@@ -7714,7 +7714,7 @@
       </p:sp>
       <p:pic>
         <p:nvPicPr>
-          <p:cNvPr id="21" name="Picture 20" descr="lime.jpg">
+          <p:cNvPr id="21" name="Picture 20" descr="kikyo.jpg">
             <a:hlinkClick r:id="rId9"/>
           </p:cNvPr>
           <p:cNvPicPr>
@@ -7772,7 +7772,7 @@
               </a:defRPr>
             </a:pPr>
             <a:r>
-              <a:t>ライム</a:t>
+              <a:t>桔梗</a:t>
             </a:r>
           </a:p>
         </p:txBody>
@@ -7824,7 +7824,7 @@
       </p:sp>
       <p:pic>
         <p:nvPicPr>
-          <p:cNvPr id="24" name="Picture 23" descr="komano.jpg">
+          <p:cNvPr id="24" name="Picture 23" descr="vlau.jpg">
             <a:hlinkClick r:id="rId11"/>
           </p:cNvPr>
           <p:cNvPicPr>
@@ -7874,7 +7874,7 @@
               <a:spcAft>
                 <a:spcPts val="800"/>
               </a:spcAft>
-              <a:defRPr sz="1600" b="1">
+              <a:defRPr sz="1300" b="1">
                 <a:solidFill>
                   <a:srgbClr val="173E3C"/>
                 </a:solidFill>
@@ -7882,7 +7882,7 @@
               </a:defRPr>
             </a:pPr>
             <a:r>
-              <a:t>狛乃</a:t>
+              <a:t>ドラゴニュート・ヴラウ</a:t>
             </a:r>
           </a:p>
         </p:txBody>
@@ -7934,7 +7934,7 @@
       </p:sp>
       <p:pic>
         <p:nvPicPr>
-          <p:cNvPr id="27" name="Picture 26" descr="maki.jpg">
+          <p:cNvPr id="27" name="Picture 26" descr="bamessa.jpg">
             <a:hlinkClick r:id="rId13"/>
           </p:cNvPr>
           <p:cNvPicPr>
@@ -7992,7 +7992,7 @@
               </a:defRPr>
             </a:pPr>
             <a:r>
-              <a:t>碼希</a:t>
+              <a:t>バメッサ</a:t>
             </a:r>
           </a:p>
         </p:txBody>
@@ -8044,7 +8044,7 @@
       </p:sp>
       <p:pic>
         <p:nvPicPr>
-          <p:cNvPr id="30" name="Picture 29" descr="kuuta.jpg">
+          <p:cNvPr id="30" name="Picture 29" descr="komano.jpg">
             <a:hlinkClick r:id="rId15"/>
           </p:cNvPr>
           <p:cNvPicPr>
@@ -8102,7 +8102,7 @@
               </a:defRPr>
             </a:pPr>
             <a:r>
-              <a:t>くうた</a:t>
+              <a:t>狛乃</a:t>
             </a:r>
           </a:p>
         </p:txBody>
@@ -8409,7 +8409,7 @@
               </a:defRPr>
             </a:pPr>
             <a:r>
-              <a:t>アース製薬 企業ブース｜3Dお風呂セット 制作発注資料｜制作内容 v0.5</a:t>
+              <a:t>アース製薬 企業ブース｜3Dお風呂セット 制作発注資料｜制作内容 v0.6</a:t>
             </a:r>
           </a:p>
         </p:txBody>
@@ -9072,7 +9072,7 @@
               </a:defRPr>
             </a:pPr>
             <a:r>
-              <a:t>アース製薬 企業ブース｜3Dお風呂セット 制作発注資料｜制作内容 v0.5</a:t>
+              <a:t>アース製薬 企業ブース｜3Dお風呂セット 制作発注資料｜制作内容 v0.6</a:t>
             </a:r>
           </a:p>
         </p:txBody>
